--- a/reference/MLP.pptx
+++ b/reference/MLP.pptx
@@ -5,7 +5,7 @@
     <p:sldMasterId id="2147483868" r:id="rId1"/>
   </p:sldMasterIdLst>
   <p:notesMasterIdLst>
-    <p:notesMasterId r:id="rId17"/>
+    <p:notesMasterId r:id="rId23"/>
   </p:notesMasterIdLst>
   <p:sldIdLst>
     <p:sldId id="256" r:id="rId2"/>
@@ -23,9 +23,15 @@
     <p:sldId id="263" r:id="rId14"/>
     <p:sldId id="264" r:id="rId15"/>
     <p:sldId id="266" r:id="rId16"/>
+    <p:sldId id="274" r:id="rId17"/>
+    <p:sldId id="275" r:id="rId18"/>
+    <p:sldId id="279" r:id="rId19"/>
+    <p:sldId id="280" r:id="rId20"/>
+    <p:sldId id="276" r:id="rId21"/>
+    <p:sldId id="278" r:id="rId22"/>
   </p:sldIdLst>
   <p:sldSz cx="12192000" cy="6858000"/>
-  <p:notesSz cx="6858000" cy="9144000"/>
+  <p:notesSz cx="7099300" cy="10234613"/>
   <p:defaultTextStyle>
     <a:defPPr>
       <a:defRPr lang="ko-KR"/>
@@ -349,6 +355,201 @@
 </pc:chgInfo>
 </file>
 
+<file path=ppt/ink/ink1.xml><?xml version="1.0" encoding="utf-8"?>
+<inkml:ink xmlns:inkml="http://www.w3.org/2003/InkML">
+  <inkml:definitions>
+    <inkml:context xml:id="ctx0">
+      <inkml:inkSource xml:id="inkSrc0">
+        <inkml:traceFormat>
+          <inkml:channel name="X" type="integer" min="-2.14748E9" max="2.14748E9" units="cm"/>
+          <inkml:channel name="Y" type="integer" min="-2.14748E9" max="2.14748E9" units="cm"/>
+          <inkml:channel name="F" type="integer" max="32767" units="dev"/>
+        </inkml:traceFormat>
+        <inkml:channelProperties>
+          <inkml:channelProperty channel="X" name="resolution" value="1000" units="1/cm"/>
+          <inkml:channelProperty channel="Y" name="resolution" value="1000" units="1/cm"/>
+          <inkml:channelProperty channel="F" name="resolution" value="0" units="1/dev"/>
+        </inkml:channelProperties>
+      </inkml:inkSource>
+      <inkml:timestamp xml:id="ts0" timeString="2025-10-19T11:56:12.675"/>
+    </inkml:context>
+    <inkml:brush xml:id="br0">
+      <inkml:brushProperty name="width" value="0.035" units="cm"/>
+      <inkml:brushProperty name="height" value="0.035" units="cm"/>
+    </inkml:brush>
+  </inkml:definitions>
+  <inkml:trace contextRef="#ctx0" brushRef="#br0">1 0 24575,'0'0'-8191</inkml:trace>
+</inkml:ink>
+</file>
+
+<file path=ppt/ink/ink2.xml><?xml version="1.0" encoding="utf-8"?>
+<inkml:ink xmlns:inkml="http://www.w3.org/2003/InkML">
+  <inkml:definitions>
+    <inkml:context xml:id="ctx0">
+      <inkml:inkSource xml:id="inkSrc0">
+        <inkml:traceFormat>
+          <inkml:channel name="X" type="integer" min="-2.14748E9" max="2.14748E9" units="cm"/>
+          <inkml:channel name="Y" type="integer" min="-2.14748E9" max="2.14748E9" units="cm"/>
+          <inkml:channel name="F" type="integer" max="32767" units="dev"/>
+        </inkml:traceFormat>
+        <inkml:channelProperties>
+          <inkml:channelProperty channel="X" name="resolution" value="1000" units="1/cm"/>
+          <inkml:channelProperty channel="Y" name="resolution" value="1000" units="1/cm"/>
+          <inkml:channelProperty channel="F" name="resolution" value="0" units="1/dev"/>
+        </inkml:channelProperties>
+      </inkml:inkSource>
+      <inkml:timestamp xml:id="ts0" timeString="2025-10-19T11:56:23.356"/>
+    </inkml:context>
+    <inkml:brush xml:id="br0">
+      <inkml:brushProperty name="width" value="0.035" units="cm"/>
+      <inkml:brushProperty name="height" value="0.035" units="cm"/>
+      <inkml:brushProperty name="color" value="#FFFFFF"/>
+    </inkml:brush>
+  </inkml:definitions>
+  <inkml:trace contextRef="#ctx0" brushRef="#br0">1183 293 24575,'14'15'0,"-1"0"0,20 30 0,19 23 0,-22-37 0,2-2 0,1-1 0,1-2 0,70 42 0,-371-166 0,227 84 0,-41-14 0,-600-184 0,644 203 0,0-1 0,0-2 0,1-1 0,1-2 0,1-2 0,0-1 0,1-1 0,-42-33 0,71 49 0,0-1 0,0 0 0,0 0 0,1 0 0,-1 0 0,1 0 0,0-1 0,0 1 0,1-1 0,-4-8 0,6 11 0,0 1 0,-1-1 0,1 1 0,0-1 0,0 1 0,0-1 0,0 1 0,0-1 0,0 1 0,1 0 0,-1-1 0,0 1 0,1-1 0,-1 1 0,1-1 0,0 1 0,-1 0 0,1-1 0,0 1 0,0 0 0,0 0 0,0 0 0,0 0 0,0-1 0,0 1 0,0 1 0,0-1 0,1 0 0,-1 0 0,0 0 0,0 1 0,1-1 0,-1 0 0,1 1 0,-1-1 0,0 1 0,1 0 0,-1 0 0,1-1 0,-1 1 0,1 0 0,1 0 0,7-1 0,0 0 0,0 1 0,0 0 0,0 0 0,0 1 0,0 0 0,-1 1 0,1 0 0,0 1 0,12 4 0,13 8 0,46 25 0,270 163 0,-55-30 0,-213-129 0,-29-17 0,0 3 0,-2 2 0,84 69 0,-107-67 0,-29-33 0,0-1 0,1 1 0,-1 0 0,0-1 0,0 1 0,1-1 0,-1 1 0,0 0 0,0-1 0,0 1 0,0 0 0,0-1 0,0 1 0,0 0 0,0-1 0,0 1 0,0 0 0,-1-1 0,1 1 0,0 0 0,0-1 0,-1 2 0,0-2 0,1 1 0,-1 0 0,0 0 0,0-1 0,0 1 0,0-1 0,0 1 0,0-1 0,0 1 0,0-1 0,-1 1 0,1-1 0,0 0 0,0 0 0,0 0 0,0 1 0,-2-1 0,-10-1 0,0-1 0,0 1 0,1-2 0,-1 0 0,1 0 0,0-1 0,0-1 0,0 0 0,-18-11 0,-9-3 0,-981-494 0,1011 508 0,-17-10 0,1 0 0,0-2 0,2-1 0,-35-33 0,57 50 0,9 10 0,14 21 0,-8 8-1365,-10-26-5461</inkml:trace>
+</inkml:ink>
+</file>
+
+<file path=ppt/ink/ink3.xml><?xml version="1.0" encoding="utf-8"?>
+<inkml:ink xmlns:inkml="http://www.w3.org/2003/InkML">
+  <inkml:definitions>
+    <inkml:context xml:id="ctx0">
+      <inkml:inkSource xml:id="inkSrc0">
+        <inkml:traceFormat>
+          <inkml:channel name="X" type="integer" min="-2.14748E9" max="2.14748E9" units="cm"/>
+          <inkml:channel name="Y" type="integer" min="-2.14748E9" max="2.14748E9" units="cm"/>
+          <inkml:channel name="F" type="integer" max="32767" units="dev"/>
+        </inkml:traceFormat>
+        <inkml:channelProperties>
+          <inkml:channelProperty channel="X" name="resolution" value="1000" units="1/cm"/>
+          <inkml:channelProperty channel="Y" name="resolution" value="1000" units="1/cm"/>
+          <inkml:channelProperty channel="F" name="resolution" value="0" units="1/dev"/>
+        </inkml:channelProperties>
+      </inkml:inkSource>
+      <inkml:timestamp xml:id="ts0" timeString="2025-10-19T12:05:07.152"/>
+    </inkml:context>
+    <inkml:brush xml:id="br0">
+      <inkml:brushProperty name="width" value="0.035" units="cm"/>
+      <inkml:brushProperty name="height" value="0.035" units="cm"/>
+      <inkml:brushProperty name="color" value="#FFFFFF"/>
+    </inkml:brush>
+  </inkml:definitions>
+  <inkml:trace contextRef="#ctx0" brushRef="#br0">140 45 24575,'-2'-9'0,"-1"18"0,-2 20 0,6-2 0,2 0 0,1 0 0,10 41 0,2 10 0,-36-136 0,-2 1 0,-34-61 0,31 77 0,24 39 0,-1 0 0,1 0 0,-1 0 0,0 0 0,1 0 0,-1 0 0,0 1 0,0-1 0,0 1 0,0-1 0,-1 1 0,1 0 0,0 0 0,0 0 0,-1 0 0,-2-1 0,4 3 0,1-1 0,-1 0 0,1 0 0,-1 1 0,1-1 0,-1 0 0,1 1 0,0-1 0,-1 0 0,1 1 0,0-1 0,-1 1 0,1-1 0,0 0 0,-1 1 0,1-1 0,0 1 0,0-1 0,-1 1 0,1-1 0,0 1 0,0-1 0,0 1 0,0 0 0,0-1 0,0 1 0,0-1 0,0 1 0,0-1 0,0 1 0,0-1 0,0 1 0,0-1 0,0 1 0,1-1 0,-1 1 0,0-1 0,0 1 0,1 0 0,9 33 0,-7-25 0,-2-4 0,21 84 0,60 155 0,-68-209 0,15 32 0,-27-62 0,1 0 0,0 0 0,0-1 0,0 0 0,1 0 0,-1 0 0,1 0 0,0 0 0,0-1 0,7 5 0,-10-7 0,0 0 0,0 0 0,0-1 0,0 1 0,0-1 0,0 1 0,0-1 0,0 1 0,0-1 0,0 0 0,0 1 0,0-1 0,0 0 0,1 0 0,-1 0 0,0 0 0,0 0 0,0 0 0,0 0 0,0 0 0,0-1 0,1 1 0,-1 0 0,0 0 0,0-1 0,0 1 0,0-1 0,0 1 0,0-1 0,0 0 0,0 1 0,0-1 0,-1 0 0,1 0 0,0 1 0,0-1 0,-1 0 0,1 0 0,0 0 0,0-2 0,2-4 0,0-1 0,0 0 0,-1 0 0,0 0 0,1-9 0,7-26 0,0 28 0,0 0 0,0 0 0,2 1 0,0 1 0,0 0 0,1 0 0,25-17 0,109-64 0,-144 92 0,53-24 0,-34 17 0,-32 15 0,-25 11-1365,25-11-5461</inkml:trace>
+</inkml:ink>
+</file>
+
+<file path=ppt/ink/ink4.xml><?xml version="1.0" encoding="utf-8"?>
+<inkml:ink xmlns:inkml="http://www.w3.org/2003/InkML">
+  <inkml:definitions>
+    <inkml:context xml:id="ctx0">
+      <inkml:inkSource xml:id="inkSrc0">
+        <inkml:traceFormat>
+          <inkml:channel name="X" type="integer" min="-2.14748E9" max="2.14748E9" units="cm"/>
+          <inkml:channel name="Y" type="integer" min="-2.14748E9" max="2.14748E9" units="cm"/>
+          <inkml:channel name="F" type="integer" max="32767" units="dev"/>
+        </inkml:traceFormat>
+        <inkml:channelProperties>
+          <inkml:channelProperty channel="X" name="resolution" value="1000" units="1/cm"/>
+          <inkml:channelProperty channel="Y" name="resolution" value="1000" units="1/cm"/>
+          <inkml:channelProperty channel="F" name="resolution" value="0" units="1/dev"/>
+        </inkml:channelProperties>
+      </inkml:inkSource>
+      <inkml:timestamp xml:id="ts0" timeString="2025-10-19T12:05:09.041"/>
+    </inkml:context>
+    <inkml:brush xml:id="br0">
+      <inkml:brushProperty name="width" value="0.035" units="cm"/>
+      <inkml:brushProperty name="height" value="0.035" units="cm"/>
+      <inkml:brushProperty name="color" value="#FFFFFF"/>
+    </inkml:brush>
+  </inkml:definitions>
+  <inkml:trace contextRef="#ctx0" brushRef="#br0">1 69 24575,'0'0'0,"3"35"0,0-31 0,-1-2 0,-1-1 0,0 1 0,1 0 0,-1-1 0,0 1 0,0 0 0,0 0 0,0 0 0,0 0 0,-1 0 0,1 0 0,-1 0 0,1 0 0,-1 0 0,0 0 0,1 0 0,-1 0 0,-1 4 0,9-62 0,-8 50 0,0-22 0,0 28 0,0 0 0,0-1 0,0 1 0,0-1 0,0 1 0,0-1 0,0 1 0,0 0 0,0-1 0,0 1 0,0-1 0,0 1 0,0 0 0,-1-1 0,1 1 0,0-1 0,0 1 0,0 0 0,-1-1 0,1 1 0,0 0 0,0-1 0,-1 1 0,1 0 0,0-1 0,-1 1 0,1 0 0,0 0 0,-1-1 0,1 1 0,0 0 0,-1 0 0,1 0 0,-1-1 0,1 1 0,0 0 0,-1 0 0,1 0 0,-1 0 0,1 0 0,-1 0 0,1 0 0,0 0 0,-1 0 0,-5 26 0,8-13 0,-2-13 0,1 1 0,-1-1 0,0 0 0,0 0 0,1 0 0,-1 0 0,0 0 0,1 0 0,-1 0 0,0 0 0,0 0 0,1 0 0,-1 0 0,0 0 0,0 0 0,1 0 0,-1 0 0,0 0 0,1 0 0,-1 0 0,0 0 0,0 0 0,1 0 0,-1 0 0,0 0 0,0-1 0,1 1 0,-1 0 0,0 0 0,0 0 0,1 0 0,-1-1 0,0 1 0,0 0 0,0 0 0,0-1 0,1 1 0,-1 0 0,0 0 0,0-1 0,27-36 0,-23 30 0,0 0 0,0 1 0,1 0 0,0 0 0,7-6 0,-12 12 0,1 0 0,0 1 0,-1-1 0,1 0 0,-1 1 0,1-1 0,-1 1 0,1-1 0,-1 1 0,1-1 0,-1 1 0,1-1 0,-1 1 0,0-1 0,1 1 0,-1 0 0,0-1 0,0 1 0,1 0 0,-1-1 0,0 1 0,0 0 0,0-1 0,0 1 0,0 0 0,0-1 0,0 1 0,0 0 0,0-1 0,0 1 0,0 1 0,3 27 0,11 332 0,-14-361 0,0 0 0,0 0 0,0 0 0,1 0 0,-1 0 0,0 0 0,0 0 0,0 0 0,0 0 0,0-1 0,0 1 0,0 0 0,0 0 0,0 0 0,0 0 0,0 0 0,0 0 0,0 0 0,1 0 0,-1 0 0,0 0 0,0 0 0,0 0 0,0 0 0,0 0 0,0 0 0,0 0 0,0 0 0,0 0 0,0 0 0,0 0 0,0 0 0,1 0 0,-1 0 0,0 1 0,0-1 0,0 0 0,0 0 0,0 0 0,0 0 0,0 0 0,0 0 0,0 0 0,0 0 0,0 0 0,0 0 0,0 0 0,0 0 0,0 0 0,0 1 0,7-15 0,6-20 0,-3 0 0,-1 0 0,-1 0 0,-3-1 0,0 0 0,-2-69 0,-4 111 0,0 1 0,-1-1 0,0 0 0,0 0 0,0 0 0,-6 10 0,-4 14 0,-3 14 0,3 0 0,2 1 0,-8 90 0,18-136 0,0 0 0,0 0 0,0 0 0,0 0 0,0 0 0,0 0 0,1 0 0,-1 0 0,0 0 0,0 0 0,0 0 0,0 0 0,0 0 0,0 0 0,1 0 0,-1 0 0,0 0 0,0 0 0,0 0 0,0 0 0,0 0 0,0 0 0,0 0 0,1 0 0,-1 1 0,0-1 0,0 0 0,0 0 0,0 0 0,0 0 0,0 0 0,0 0 0,0 0 0,0 0 0,1 0 0,-1 0 0,0 1 0,0-1 0,0 0 0,0 0 0,0 0 0,0 0 0,0 0 0,0 0 0,0 1 0,0-1 0,0 0 0,0 0 0,0 0 0,0 0 0,0 0 0,0 0 0,0 1 0,0-1 0,0 0 0,0 0 0,0 0 0,0 0 0,0 0 0,0 0 0,-1 1 0,10-16 0,7-23 0,-5-13-1365,-8 31-5461</inkml:trace>
+</inkml:ink>
+</file>
+
+<file path=ppt/ink/ink5.xml><?xml version="1.0" encoding="utf-8"?>
+<inkml:ink xmlns:inkml="http://www.w3.org/2003/InkML">
+  <inkml:definitions>
+    <inkml:context xml:id="ctx0">
+      <inkml:inkSource xml:id="inkSrc0">
+        <inkml:traceFormat>
+          <inkml:channel name="X" type="integer" min="-2.14748E9" max="2.14748E9" units="cm"/>
+          <inkml:channel name="Y" type="integer" min="-2.14748E9" max="2.14748E9" units="cm"/>
+          <inkml:channel name="F" type="integer" max="32767" units="dev"/>
+        </inkml:traceFormat>
+        <inkml:channelProperties>
+          <inkml:channelProperty channel="X" name="resolution" value="1000" units="1/cm"/>
+          <inkml:channelProperty channel="Y" name="resolution" value="1000" units="1/cm"/>
+          <inkml:channelProperty channel="F" name="resolution" value="0" units="1/dev"/>
+        </inkml:channelProperties>
+      </inkml:inkSource>
+      <inkml:timestamp xml:id="ts0" timeString="2025-10-19T12:05:14.412"/>
+    </inkml:context>
+    <inkml:brush xml:id="br0">
+      <inkml:brushProperty name="width" value="0.035" units="cm"/>
+      <inkml:brushProperty name="height" value="0.035" units="cm"/>
+      <inkml:brushProperty name="color" value="#FFFFFF"/>
+    </inkml:brush>
+  </inkml:definitions>
+  <inkml:trace contextRef="#ctx0" brushRef="#br0">180 186 24575,'2'-3'0,"1"0"0,-1 0 0,0 0 0,0-1 0,0 1 0,-1 0 0,1-1 0,-1 0 0,0 1 0,1-6 0,-1 7 0,4-17 0,-2 1 0,0-1 0,1-33 0,-2 24 0,-1 23 0,1 7 0,2 17 0,4 28 0,-4-6 0,-3-27 0,1-1 0,0 1 0,1-1 0,8 27 0,-8-30 0,0-1 0,-1 1 0,0 0 0,-1 0 0,0 18 0,3 18 0,-47-71 0,39 22 0,-31-35 0,34 37 0,0-1 0,0 1 0,0-1 0,0 0 0,0 0 0,0 1 0,0-1 0,0 0 0,0 0 0,1 0 0,-1 0 0,1 0 0,0 0 0,0 0 0,-1 0 0,1 0 0,0 0 0,1 0 0,-1 0 0,0 0 0,1-3 0,0 5 0,-1-1 0,0 1 0,0 0 0,0-1 0,1 1 0,-1 0 0,0-1 0,0 1 0,1 0 0,-1 0 0,0-1 0,1 1 0,-1 0 0,0 0 0,1 0 0,-1-1 0,1 1 0,-1 0 0,0 0 0,1 0 0,-1 0 0,0 0 0,1 0 0,-1 0 0,1 0 0,-1 0 0,0 0 0,1 0 0,-1 0 0,1 0 0,-1 0 0,0 0 0,1 0 0,-1 0 0,1 1 0,-1-1 0,0 0 0,1 0 0,-1 0 0,0 1 0,1-1 0,-1 0 0,0 0 0,0 1 0,1-1 0,-1 0 0,0 1 0,0-1 0,1 0 0,-1 1 0,0-1 0,0 0 0,0 1 0,0-1 0,0 1 0,1-1 0,-1 1 0,17 28 0,-13-21 0,1-1 0,0-1 0,1 0 0,0 0 0,0 0 0,0 0 0,1-1 0,-1 0 0,1-1 0,1 1 0,-1-1 0,1-1 0,-1 0 0,1 0 0,0 0 0,0-1 0,0 0 0,1 0 0,-1-1 0,0 0 0,10 0 0,-17-1 0,0 0 0,0 0 0,0-1 0,0 1 0,0 0 0,-1 0 0,1 0 0,0 0 0,0-1 0,0 1 0,-1 0 0,1-1 0,0 1 0,0-1 0,-1 1 0,1-1 0,0 1 0,-1-1 0,1 0 0,0 1 0,-1-1 0,1 0 0,-1 1 0,1-1 0,-1 0 0,1 1 0,-1-1 0,0 0 0,1 0 0,-1 0 0,0 0 0,0 1 0,0-1 0,1 0 0,-1 0 0,0 0 0,0 0 0,0 0 0,0 1 0,-1-1 0,1 0 0,0 0 0,0 0 0,0 0 0,-1 0 0,1 1 0,0-1 0,-1 0 0,1 0 0,-1 1 0,1-1 0,-1 0 0,1 1 0,-1-1 0,0 0 0,-2-5 0,-1 1 0,1 0 0,-1 0 0,0 0 0,0 1 0,-7-6 0,2 3 0,-1 2 0,0-1 0,-20-7 0,27 12 0,0-1 0,0 1 0,0 0 0,-1 0 0,1 0 0,0 1 0,-1-1 0,1 1 0,0 0 0,-1 0 0,1 0 0,-1 0 0,1 1 0,0-1 0,-1 1 0,-5 2 0,1 4 0,0 2 0,1-1 0,0 1 0,0 0 0,1 0 0,0 1 0,-5 12 0,-22 69 0,28-65 0,4-21 0,0 0 0,0 0 0,0-1 0,0 1 0,-1 0 0,1 0 0,-1-1 0,-1 1 0,1-1 0,-4 6 0,28-71 0,-15 47 0,0 0 0,0 1 0,1 0 0,1 0 0,0 1 0,14-15 0,-21 25 0,0 0 0,0 0 0,1 0 0,-1 0 0,1 0 0,-1 0 0,1 1 0,0-1 0,-1 1 0,1 0 0,0 0 0,0 0 0,0 0 0,0 0 0,0 1 0,0-1 0,0 1 0,0 0 0,0 0 0,0 0 0,0 0 0,1 1 0,-1-1 0,0 1 0,0-1 0,-1 1 0,1 0 0,0 1 0,0-1 0,0 0 0,-1 1 0,1-1 0,0 1 0,-1 0 0,0 0 0,1 0 0,-1 0 0,3 4 0,3 2 0,0-1 0,-1 0 0,0 0 0,0 1 0,0 0 0,9 17 0,-15-23 0,0-1 0,-1 0 0,1 1 0,-1-1 0,1 1 0,-1-1 0,0 1 0,0-1 0,1 1 0,-1-1 0,0 1 0,0-1 0,-1 1 0,1-1 0,0 1 0,0-1 0,-1 1 0,1-1 0,-1 2 0,-1-1 0,1 0 0,-1 0 0,0 0 0,1 0 0,-1 0 0,0-1 0,0 1 0,0-1 0,0 0 0,0 1 0,0-1 0,-1 0 0,1 0 0,0 0 0,-5 1 0,-22 4 0,-1-1 0,0-1 0,0-2 0,0-1 0,0-1 0,-34-5 0,45 4 0,17 1 0,0 0 0,0 0 0,0 0 0,0 0 0,1 0 0,-1-1 0,0 1 0,0 0 0,0-1 0,1 1 0,-1-1 0,0 0 0,1 0 0,-1 1 0,1-1 0,-1 0 0,0 0 0,1-1 0,0 1 0,-1 0 0,1 0 0,0-1 0,0 1 0,0-1 0,0 1 0,0-1 0,0 1 0,0-1 0,0 0 0,0 1 0,1-1 0,-1 0 0,1 0 0,0 1 0,-1-1 0,1 0 0,0 0 0,0 0 0,0 0 0,0 1 0,0-1 0,1 0 0,-1 0 0,0 0 0,1 1 0,1-4 0,0-2 0,0 1 0,1-1 0,0 1 0,0 0 0,0 0 0,1 0 0,0 1 0,0-1 0,1 1 0,-1 0 0,8-6 0,-9 9 0,6-4 0,0-1 0,0 0 0,-1 0 0,0-1 0,0 0 0,0 0 0,-1-1 0,0 0 0,-1 0 0,7-13 0,8-24 0,22-40 0,-42 107 0,-7 14 0,-30 107 0,31-122 0,4 18 0,1-33 0,0 0 0,0 0 0,0 0 0,0 0 0,-1-1 0,-2 11 0,-1-18 0,0-1 0,1 1 0,-1-1 0,1 0 0,0 0 0,-5-7 0,-159-247 0,165 253 0,12 15 0,14 17 0,32 30 111,-22-25-1587,-28-25-5350</inkml:trace>
+</inkml:ink>
+</file>
+
+<file path=ppt/ink/ink6.xml><?xml version="1.0" encoding="utf-8"?>
+<inkml:ink xmlns:inkml="http://www.w3.org/2003/InkML">
+  <inkml:definitions>
+    <inkml:context xml:id="ctx0">
+      <inkml:inkSource xml:id="inkSrc0">
+        <inkml:traceFormat>
+          <inkml:channel name="X" type="integer" min="-2.14748E9" max="2.14748E9" units="cm"/>
+          <inkml:channel name="Y" type="integer" min="-2.14748E9" max="2.14748E9" units="cm"/>
+          <inkml:channel name="F" type="integer" max="32767" units="dev"/>
+        </inkml:traceFormat>
+        <inkml:channelProperties>
+          <inkml:channelProperty channel="X" name="resolution" value="1000" units="1/cm"/>
+          <inkml:channelProperty channel="Y" name="resolution" value="1000" units="1/cm"/>
+          <inkml:channelProperty channel="F" name="resolution" value="0" units="1/dev"/>
+        </inkml:channelProperties>
+      </inkml:inkSource>
+      <inkml:timestamp xml:id="ts0" timeString="2025-10-19T12:08:22.821"/>
+    </inkml:context>
+    <inkml:brush xml:id="br0">
+      <inkml:brushProperty name="width" value="0.035" units="cm"/>
+      <inkml:brushProperty name="height" value="0.035" units="cm"/>
+      <inkml:brushProperty name="color" value="#FFFFFF"/>
+    </inkml:brush>
+  </inkml:definitions>
+  <inkml:trace contextRef="#ctx0" brushRef="#br0">1 0 24575,'0'0'-8191</inkml:trace>
+</inkml:ink>
+</file>
+
+<file path=ppt/ink/ink7.xml><?xml version="1.0" encoding="utf-8"?>
+<inkml:ink xmlns:inkml="http://www.w3.org/2003/InkML">
+  <inkml:definitions>
+    <inkml:context xml:id="ctx0">
+      <inkml:inkSource xml:id="inkSrc0">
+        <inkml:traceFormat>
+          <inkml:channel name="X" type="integer" min="-2.14748E9" max="2.14748E9" units="cm"/>
+          <inkml:channel name="Y" type="integer" min="-2.14748E9" max="2.14748E9" units="cm"/>
+          <inkml:channel name="F" type="integer" max="32767" units="dev"/>
+        </inkml:traceFormat>
+        <inkml:channelProperties>
+          <inkml:channelProperty channel="X" name="resolution" value="1000" units="1/cm"/>
+          <inkml:channelProperty channel="Y" name="resolution" value="1000" units="1/cm"/>
+          <inkml:channelProperty channel="F" name="resolution" value="0" units="1/dev"/>
+        </inkml:channelProperties>
+      </inkml:inkSource>
+      <inkml:timestamp xml:id="ts0" timeString="2025-10-19T12:08:30.400"/>
+    </inkml:context>
+    <inkml:brush xml:id="br0">
+      <inkml:brushProperty name="width" value="0.035" units="cm"/>
+      <inkml:brushProperty name="height" value="0.035" units="cm"/>
+      <inkml:brushProperty name="color" value="#FFFFFF"/>
+    </inkml:brush>
+  </inkml:definitions>
+  <inkml:trace contextRef="#ctx0" brushRef="#br0">0 0 24575,'0'0'-8191</inkml:trace>
+</inkml:ink>
+</file>
+
 <file path=ppt/notesMasters/notesMaster1.xml><?xml version="1.0" encoding="utf-8"?>
 <p:notesMaster xmlns:a="http://schemas.openxmlformats.org/drawingml/2006/main" xmlns:r="http://schemas.openxmlformats.org/officeDocument/2006/relationships" xmlns:p="http://schemas.openxmlformats.org/presentationml/2006/main">
   <p:cSld>
@@ -384,17 +585,17 @@
         <p:spPr>
           <a:xfrm>
             <a:off x="0" y="0"/>
-            <a:ext cx="2971800" cy="458788"/>
+            <a:ext cx="3076363" cy="513508"/>
           </a:xfrm>
           <a:prstGeom prst="rect">
             <a:avLst/>
           </a:prstGeom>
         </p:spPr>
         <p:txBody>
-          <a:bodyPr vert="horz" lIns="91440" tIns="45720" rIns="91440" bIns="45720" rtlCol="0"/>
+          <a:bodyPr vert="horz" lIns="99048" tIns="49524" rIns="99048" bIns="49524" rtlCol="0"/>
           <a:lstStyle>
             <a:lvl1pPr algn="l">
-              <a:defRPr sz="1200"/>
+              <a:defRPr sz="1300"/>
             </a:lvl1pPr>
           </a:lstStyle>
           <a:p>
@@ -414,24 +615,24 @@
         </p:nvSpPr>
         <p:spPr>
           <a:xfrm>
-            <a:off x="3884613" y="0"/>
-            <a:ext cx="2971800" cy="458788"/>
+            <a:off x="4021294" y="0"/>
+            <a:ext cx="3076363" cy="513508"/>
           </a:xfrm>
           <a:prstGeom prst="rect">
             <a:avLst/>
           </a:prstGeom>
         </p:spPr>
         <p:txBody>
-          <a:bodyPr vert="horz" lIns="91440" tIns="45720" rIns="91440" bIns="45720" rtlCol="0"/>
+          <a:bodyPr vert="horz" lIns="99048" tIns="49524" rIns="99048" bIns="49524" rtlCol="0"/>
           <a:lstStyle>
             <a:lvl1pPr algn="r">
-              <a:defRPr sz="1200"/>
+              <a:defRPr sz="1300"/>
             </a:lvl1pPr>
           </a:lstStyle>
           <a:p>
             <a:fld id="{E3AAF688-E8A5-0046-9222-F1AA7125E0B2}" type="datetimeFigureOut">
               <a:rPr kumimoji="1" lang="ko-KR" altLang="en-US" smtClean="0"/>
-              <a:t>2025. 9. 22.</a:t>
+              <a:t>2025-10-19</a:t>
             </a:fld>
             <a:endParaRPr kumimoji="1" lang="ko-KR" altLang="en-US"/>
           </a:p>
@@ -449,8 +650,8 @@
         </p:nvSpPr>
         <p:spPr>
           <a:xfrm>
-            <a:off x="685800" y="1143000"/>
-            <a:ext cx="5486400" cy="3086100"/>
+            <a:off x="479425" y="1279525"/>
+            <a:ext cx="6140450" cy="3454400"/>
           </a:xfrm>
           <a:prstGeom prst="rect">
             <a:avLst/>
@@ -463,7 +664,7 @@
           </a:ln>
         </p:spPr>
         <p:txBody>
-          <a:bodyPr vert="horz" lIns="91440" tIns="45720" rIns="91440" bIns="45720" rtlCol="0" anchor="ctr"/>
+          <a:bodyPr vert="horz" lIns="99048" tIns="49524" rIns="99048" bIns="49524" rtlCol="0" anchor="ctr"/>
           <a:lstStyle/>
           <a:p>
             <a:endParaRPr lang="ko-KR" altLang="en-US"/>
@@ -482,15 +683,15 @@
         </p:nvSpPr>
         <p:spPr>
           <a:xfrm>
-            <a:off x="685800" y="4400550"/>
-            <a:ext cx="5486400" cy="3600450"/>
+            <a:off x="709930" y="4925407"/>
+            <a:ext cx="5679440" cy="4029879"/>
           </a:xfrm>
           <a:prstGeom prst="rect">
             <a:avLst/>
           </a:prstGeom>
         </p:spPr>
         <p:txBody>
-          <a:bodyPr vert="horz" lIns="91440" tIns="45720" rIns="91440" bIns="45720" rtlCol="0"/>
+          <a:bodyPr vert="horz" lIns="99048" tIns="49524" rIns="99048" bIns="49524" rtlCol="0"/>
           <a:lstStyle/>
           <a:p>
             <a:pPr lvl="0"/>
@@ -541,18 +742,18 @@
         </p:nvSpPr>
         <p:spPr>
           <a:xfrm>
-            <a:off x="0" y="8685213"/>
-            <a:ext cx="2971800" cy="458787"/>
+            <a:off x="0" y="9721107"/>
+            <a:ext cx="3076363" cy="513507"/>
           </a:xfrm>
           <a:prstGeom prst="rect">
             <a:avLst/>
           </a:prstGeom>
         </p:spPr>
         <p:txBody>
-          <a:bodyPr vert="horz" lIns="91440" tIns="45720" rIns="91440" bIns="45720" rtlCol="0" anchor="b"/>
+          <a:bodyPr vert="horz" lIns="99048" tIns="49524" rIns="99048" bIns="49524" rtlCol="0" anchor="b"/>
           <a:lstStyle>
             <a:lvl1pPr algn="l">
-              <a:defRPr sz="1200"/>
+              <a:defRPr sz="1300"/>
             </a:lvl1pPr>
           </a:lstStyle>
           <a:p>
@@ -572,18 +773,18 @@
         </p:nvSpPr>
         <p:spPr>
           <a:xfrm>
-            <a:off x="3884613" y="8685213"/>
-            <a:ext cx="2971800" cy="458787"/>
+            <a:off x="4021294" y="9721107"/>
+            <a:ext cx="3076363" cy="513507"/>
           </a:xfrm>
           <a:prstGeom prst="rect">
             <a:avLst/>
           </a:prstGeom>
         </p:spPr>
         <p:txBody>
-          <a:bodyPr vert="horz" lIns="91440" tIns="45720" rIns="91440" bIns="45720" rtlCol="0" anchor="b"/>
+          <a:bodyPr vert="horz" lIns="99048" tIns="49524" rIns="99048" bIns="49524" rtlCol="0" anchor="b"/>
           <a:lstStyle>
             <a:lvl1pPr algn="r">
-              <a:defRPr sz="1200"/>
+              <a:defRPr sz="1300"/>
             </a:lvl1pPr>
           </a:lstStyle>
           <a:p>
@@ -1752,7 +1953,7 @@
           <a:p>
             <a:fld id="{D29CF56E-D922-4450-9794-8B0E1451F6EB}" type="datetime1">
               <a:rPr lang="en-US" smtClean="0"/>
-              <a:t>9/22/25</a:t>
+              <a:t>10/19/2025</a:t>
             </a:fld>
             <a:endParaRPr lang="en-US" dirty="0"/>
           </a:p>
@@ -2329,7 +2530,7 @@
           <a:p>
             <a:fld id="{9C5C1F80-0989-4135-BEC0-53996BCA1D73}" type="datetime1">
               <a:rPr lang="en-US" smtClean="0"/>
-              <a:t>9/22/25</a:t>
+              <a:t>10/19/2025</a:t>
             </a:fld>
             <a:endParaRPr lang="en-US" dirty="0"/>
           </a:p>
@@ -2887,7 +3088,7 @@
           <a:p>
             <a:fld id="{2B346B3B-D23C-46FC-82B4-EC936862EBB6}" type="datetime1">
               <a:rPr lang="en-US" smtClean="0"/>
-              <a:t>9/22/25</a:t>
+              <a:t>10/19/2025</a:t>
             </a:fld>
             <a:endParaRPr lang="en-US" dirty="0"/>
           </a:p>
@@ -3417,7 +3618,7 @@
           <a:p>
             <a:fld id="{11039C6F-01AE-405F-93D2-431591D79461}" type="datetime1">
               <a:rPr lang="en-US" smtClean="0"/>
-              <a:t>9/22/25</a:t>
+              <a:t>10/19/2025</a:t>
             </a:fld>
             <a:endParaRPr lang="en-US" dirty="0"/>
           </a:p>
@@ -3820,7 +4021,7 @@
           <a:p>
             <a:fld id="{6AE82713-2685-4CB9-BD26-DD329F3C67A6}" type="datetime1">
               <a:rPr lang="en-US" smtClean="0"/>
-              <a:t>9/22/25</a:t>
+              <a:t>10/19/2025</a:t>
             </a:fld>
             <a:endParaRPr lang="en-US" dirty="0"/>
           </a:p>
@@ -4219,7 +4420,7 @@
           <a:p>
             <a:fld id="{957926B3-CA5D-44FB-BC2D-6B05FBB97B04}" type="datetime1">
               <a:rPr lang="en-US" smtClean="0"/>
-              <a:t>9/22/25</a:t>
+              <a:t>10/19/2025</a:t>
             </a:fld>
             <a:endParaRPr lang="en-US" dirty="0"/>
           </a:p>
@@ -4617,7 +4818,7 @@
           <a:p>
             <a:fld id="{7E009212-C305-41EC-8687-C39B36C09AF0}" type="datetime1">
               <a:rPr lang="en-US" smtClean="0"/>
-              <a:t>9/22/25</a:t>
+              <a:t>10/19/2025</a:t>
             </a:fld>
             <a:endParaRPr lang="en-US" dirty="0"/>
           </a:p>
@@ -5016,7 +5217,7 @@
           <a:p>
             <a:fld id="{7CD886C8-FB0E-44DB-9413-26C9933623BA}" type="datetime1">
               <a:rPr lang="en-US" smtClean="0"/>
-              <a:t>9/22/25</a:t>
+              <a:t>10/19/2025</a:t>
             </a:fld>
             <a:endParaRPr lang="en-US" dirty="0"/>
           </a:p>
@@ -5416,7 +5617,7 @@
           <a:p>
             <a:fld id="{278A6864-E7E2-494F-A90A-ECC53613C6EC}" type="datetime1">
               <a:rPr lang="en-US" smtClean="0"/>
-              <a:t>9/22/25</a:t>
+              <a:t>10/19/2025</a:t>
             </a:fld>
             <a:endParaRPr lang="en-US" dirty="0"/>
           </a:p>
@@ -5783,7 +5984,7 @@
           <a:p>
             <a:fld id="{2F4ED686-7864-484B-8047-F06E855FD995}" type="datetime1">
               <a:rPr lang="en-US" smtClean="0"/>
-              <a:t>9/22/25</a:t>
+              <a:t>10/19/2025</a:t>
             </a:fld>
             <a:endParaRPr lang="en-US" dirty="0"/>
           </a:p>
@@ -6164,7 +6365,7 @@
           <a:p>
             <a:fld id="{CB8F8C76-8E31-4D47-BC79-85F35E81929B}" type="datetime1">
               <a:rPr lang="en-US" smtClean="0"/>
-              <a:t>9/22/25</a:t>
+              <a:t>10/19/2025</a:t>
             </a:fld>
             <a:endParaRPr lang="en-US" dirty="0"/>
           </a:p>
@@ -6543,7 +6744,7 @@
           <a:p>
             <a:fld id="{CBE1C96F-46D7-47BB-8945-9667BCB4F5BB}" type="datetime1">
               <a:rPr lang="en-US" smtClean="0"/>
-              <a:t>9/22/25</a:t>
+              <a:t>10/19/2025</a:t>
             </a:fld>
             <a:endParaRPr lang="en-US" dirty="0"/>
           </a:p>
@@ -6976,7 +7177,7 @@
           <a:p>
             <a:fld id="{85640267-1344-46BE-B105-162E68855468}" type="datetime1">
               <a:rPr lang="en-US" smtClean="0"/>
-              <a:t>9/22/25</a:t>
+              <a:t>10/19/2025</a:t>
             </a:fld>
             <a:endParaRPr lang="en-US" dirty="0"/>
           </a:p>
@@ -7393,7 +7594,7 @@
           <a:p>
             <a:fld id="{1C45E567-307A-4358-87B7-AFD16C4C07D5}" type="datetime1">
               <a:rPr lang="en-US" smtClean="0"/>
-              <a:t>9/22/25</a:t>
+              <a:t>10/19/2025</a:t>
             </a:fld>
             <a:endParaRPr lang="en-US" dirty="0"/>
           </a:p>
@@ -7611,7 +7812,7 @@
           <a:p>
             <a:fld id="{E016730A-3443-4D7F-BC47-3A3CDB3837FC}" type="datetime1">
               <a:rPr lang="en-US" smtClean="0"/>
-              <a:t>9/22/25</a:t>
+              <a:t>10/19/2025</a:t>
             </a:fld>
             <a:endParaRPr lang="en-US" dirty="0"/>
           </a:p>
@@ -8228,7 +8429,7 @@
           <a:p>
             <a:fld id="{D9193AC5-F257-4C01-8A7B-A4CD87F22F04}" type="datetime1">
               <a:rPr lang="en-US" smtClean="0"/>
-              <a:t>9/22/25</a:t>
+              <a:t>10/19/2025</a:t>
             </a:fld>
             <a:endParaRPr lang="en-US" dirty="0"/>
           </a:p>
@@ -8599,7 +8800,7 @@
           <a:p>
             <a:fld id="{A64EBB10-E93E-4729-97C4-FAB8DF4548E2}" type="datetime1">
               <a:rPr lang="en-US" smtClean="0"/>
-              <a:t>9/22/25</a:t>
+              <a:t>10/19/2025</a:t>
             </a:fld>
             <a:endParaRPr lang="en-US" dirty="0"/>
           </a:p>
@@ -8872,7 +9073,7 @@
           <a:p>
             <a:fld id="{7040DD2C-7FC6-41A9-87A2-29E4EDD4A815}" type="datetime1">
               <a:rPr lang="en-US" smtClean="0"/>
-              <a:t>9/22/25</a:t>
+              <a:t>10/19/2025</a:t>
             </a:fld>
             <a:endParaRPr lang="en-US" dirty="0"/>
           </a:p>
@@ -9497,7 +9698,7 @@
           <a:p>
             <a:fld id="{C8E3A8ED-7C53-48B7-8E07-F767A8357B67}" type="datetime1">
               <a:rPr lang="en-US" smtClean="0"/>
-              <a:t>9/22/25</a:t>
+              <a:t>10/19/2025</a:t>
             </a:fld>
             <a:endParaRPr lang="en-US" dirty="0"/>
           </a:p>
@@ -9932,7 +10133,7 @@
           <a:p>
             <a:fld id="{81AC3B39-0D1D-4C0E-BE8E-C570B18D6B3B}" type="datetime1">
               <a:rPr lang="en-US" smtClean="0"/>
-              <a:t>9/22/25</a:t>
+              <a:t>10/19/2025</a:t>
             </a:fld>
             <a:endParaRPr lang="en-US" dirty="0"/>
           </a:p>
@@ -10181,7 +10382,7 @@
           <a:p>
             <a:fld id="{0780F3AB-C899-4854-A4A4-B2E20F203358}" type="datetime1">
               <a:rPr lang="en-US" smtClean="0"/>
-              <a:t>9/22/25</a:t>
+              <a:t>10/19/2025</a:t>
             </a:fld>
             <a:endParaRPr lang="en-US" dirty="0"/>
           </a:p>
@@ -10821,7 +11022,7 @@
           <a:p>
             <a:fld id="{1095A040-388D-41D5-A09F-3EC1A1D097A8}" type="datetime1">
               <a:rPr lang="en-US" smtClean="0"/>
-              <a:t>9/22/25</a:t>
+              <a:t>10/19/2025</a:t>
             </a:fld>
             <a:endParaRPr lang="en-US" dirty="0"/>
           </a:p>
@@ -11241,7 +11442,7 @@
           <a:p>
             <a:fld id="{A6379DD5-AE65-4D02-9BCE-257CC17A63B7}" type="datetime1">
               <a:rPr lang="en-US" smtClean="0"/>
-              <a:t>9/22/25</a:t>
+              <a:t>10/19/2025</a:t>
             </a:fld>
             <a:endParaRPr lang="en-US" dirty="0"/>
           </a:p>
@@ -11683,7 +11884,7 @@
           <a:p>
             <a:fld id="{5ECB542C-378A-4AAF-83EE-A3767FF83605}" type="datetime1">
               <a:rPr lang="en-US" smtClean="0"/>
-              <a:t>9/22/25</a:t>
+              <a:t>10/19/2025</a:t>
             </a:fld>
             <a:endParaRPr lang="en-US"/>
           </a:p>
@@ -11975,7 +12176,7 @@
           <a:p>
             <a:fld id="{16C6F251-EB74-4ADA-AD63-D85EC3A9D616}" type="datetime1">
               <a:rPr lang="en-US" smtClean="0"/>
-              <a:t>9/22/25</a:t>
+              <a:t>10/19/2025</a:t>
             </a:fld>
             <a:endParaRPr lang="en-US" dirty="0"/>
           </a:p>
@@ -12383,7 +12584,7 @@
           <a:p>
             <a:fld id="{7305F46D-792E-48B7-9047-8A1672515077}" type="datetime1">
               <a:rPr lang="en-US" smtClean="0"/>
-              <a:t>9/22/25</a:t>
+              <a:t>10/19/2025</a:t>
             </a:fld>
             <a:endParaRPr lang="en-US" dirty="0"/>
           </a:p>
@@ -12791,7 +12992,7 @@
           <a:p>
             <a:fld id="{8B53D3FE-D727-4B50-874D-41D5E635B20A}" type="datetime1">
               <a:rPr lang="en-US" smtClean="0"/>
-              <a:t>9/22/25</a:t>
+              <a:t>10/19/2025</a:t>
             </a:fld>
             <a:endParaRPr lang="en-US" dirty="0"/>
           </a:p>
@@ -13199,7 +13400,7 @@
           <a:p>
             <a:fld id="{FE942071-3A2D-4B86-82F9-428DB212BAF8}" type="datetime1">
               <a:rPr lang="en-US" smtClean="0"/>
-              <a:t>9/22/25</a:t>
+              <a:t>10/19/2025</a:t>
             </a:fld>
             <a:endParaRPr lang="en-US" dirty="0"/>
           </a:p>
@@ -13880,7 +14081,7 @@
           <a:p>
             <a:fld id="{040D1012-6B36-4753-8153-E5F982239567}" type="datetime1">
               <a:rPr lang="en-US" smtClean="0"/>
-              <a:t>9/22/25</a:t>
+              <a:t>10/19/2025</a:t>
             </a:fld>
             <a:endParaRPr lang="en-US" dirty="0"/>
           </a:p>
@@ -14073,7 +14274,7 @@
           <a:p>
             <a:fld id="{02E2BBBB-FE25-456C-89E4-A0303F0273E5}" type="datetime1">
               <a:rPr lang="en-US" smtClean="0"/>
-              <a:t>9/22/25</a:t>
+              <a:t>10/19/2025</a:t>
             </a:fld>
             <a:endParaRPr lang="en-US" dirty="0"/>
           </a:p>
@@ -14290,7 +14491,7 @@
           <a:p>
             <a:fld id="{1315EE4B-219D-4799-AB8D-57B100451C5D}" type="datetime1">
               <a:rPr lang="en-US" smtClean="0"/>
-              <a:t>9/22/25</a:t>
+              <a:t>10/19/2025</a:t>
             </a:fld>
             <a:endParaRPr lang="en-US" dirty="0"/>
           </a:p>
@@ -14630,7 +14831,7 @@
           <a:p>
             <a:fld id="{6499AFF4-C109-45E7-87CB-3A41EC6C3342}" type="datetime1">
               <a:rPr lang="en-US" smtClean="0"/>
-              <a:t>9/22/25</a:t>
+              <a:t>10/19/2025</a:t>
             </a:fld>
             <a:endParaRPr lang="en-US" dirty="0"/>
           </a:p>
@@ -15645,7 +15846,7 @@
           <a:p>
             <a:fld id="{50AFEFF9-BDF1-4CFA-B535-0413D62BE29A}" type="datetime1">
               <a:rPr lang="en-US" smtClean="0"/>
-              <a:t>9/22/25</a:t>
+              <a:t>10/19/2025</a:t>
             </a:fld>
             <a:endParaRPr lang="en-US" dirty="0"/>
           </a:p>
@@ -15874,7 +16075,7 @@
           <a:p>
             <a:fld id="{9DFFF819-4E26-4576-8A6D-DA055CFF682A}" type="datetime1">
               <a:rPr lang="en-US" smtClean="0"/>
-              <a:t>9/22/25</a:t>
+              <a:t>10/19/2025</a:t>
             </a:fld>
             <a:endParaRPr lang="en-US" dirty="0"/>
           </a:p>
@@ -16538,7 +16739,7 @@
           <a:p>
             <a:fld id="{6E761A50-B070-4EAD-9EB9-92E4929324E7}" type="datetime1">
               <a:rPr lang="en-US" smtClean="0"/>
-              <a:t>9/22/25</a:t>
+              <a:t>10/19/2025</a:t>
             </a:fld>
             <a:endParaRPr lang="en-US" dirty="0"/>
           </a:p>
@@ -16754,7 +16955,7 @@
           <a:p>
             <a:fld id="{9A1CBA35-F376-4C5F-B8C5-4C103617FD91}" type="datetime1">
               <a:rPr lang="en-US" smtClean="0"/>
-              <a:t>9/22/25</a:t>
+              <a:t>10/19/2025</a:t>
             </a:fld>
             <a:endParaRPr lang="en-US" dirty="0"/>
           </a:p>
@@ -17424,7 +17625,7 @@
           <a:p>
             <a:fld id="{BA89D600-DCDC-4EC3-BDD3-052C2836DAF2}" type="datetime1">
               <a:rPr lang="en-US" smtClean="0"/>
-              <a:t>9/22/25</a:t>
+              <a:t>10/19/2025</a:t>
             </a:fld>
             <a:endParaRPr lang="en-US" dirty="0"/>
           </a:p>
@@ -17950,7 +18151,7 @@
           <a:p>
             <a:fld id="{3ADB2DB3-0A08-4E5B-8BB6-A488CF1C042F}" type="datetime1">
               <a:rPr lang="en-US" smtClean="0"/>
-              <a:t>9/22/25</a:t>
+              <a:t>10/19/2025</a:t>
             </a:fld>
             <a:endParaRPr lang="en-US" dirty="0"/>
           </a:p>
@@ -18294,7 +18495,7 @@
           <a:p>
             <a:fld id="{7A329DD1-6F17-4170-B2B1-1A76C32D62A1}" type="datetime1">
               <a:rPr lang="en-US" smtClean="0"/>
-              <a:t>9/22/25</a:t>
+              <a:t>10/19/2025</a:t>
             </a:fld>
             <a:endParaRPr lang="en-US" dirty="0"/>
           </a:p>
@@ -18790,7 +18991,7 @@
           <a:p>
             <a:fld id="{BA7E6053-DA33-4DC9-86BB-0E52E5EB5B56}" type="datetime1">
               <a:rPr lang="en-US" smtClean="0"/>
-              <a:t>9/22/25</a:t>
+              <a:t>10/19/2025</a:t>
             </a:fld>
             <a:endParaRPr lang="en-US" dirty="0"/>
           </a:p>
@@ -18935,7 +19136,7 @@
           <a:p>
             <a:fld id="{7C72CE4D-D83F-44D4-ACB0-A88A6B9DB4F7}" type="datetime1">
               <a:rPr lang="en-US" smtClean="0"/>
-              <a:t>9/22/25</a:t>
+              <a:t>10/19/2025</a:t>
             </a:fld>
             <a:endParaRPr lang="en-US"/>
           </a:p>
@@ -19051,7 +19252,7 @@
           <a:p>
             <a:fld id="{9A62F981-1EE1-49F5-B605-4EA23F0307AC}" type="datetime1">
               <a:rPr lang="en-US" smtClean="0"/>
-              <a:t>9/22/25</a:t>
+              <a:t>10/19/2025</a:t>
             </a:fld>
             <a:endParaRPr lang="en-US"/>
           </a:p>
@@ -19508,7 +19709,7 @@
           <a:p>
             <a:fld id="{B0B6493B-A447-4205-AC2D-AE2DEDAE4E3B}" type="datetime1">
               <a:rPr lang="en-US" smtClean="0"/>
-              <a:t>9/22/25</a:t>
+              <a:t>10/19/2025</a:t>
             </a:fld>
             <a:endParaRPr lang="en-US"/>
           </a:p>
@@ -19930,7 +20131,7 @@
           <a:p>
             <a:fld id="{1F9A354F-9C13-4261-9BA4-DD76051C2429}" type="datetime1">
               <a:rPr lang="en-US" smtClean="0"/>
-              <a:t>9/22/25</a:t>
+              <a:t>10/19/2025</a:t>
             </a:fld>
             <a:endParaRPr lang="en-US" dirty="0"/>
           </a:p>
@@ -20367,7 +20568,7 @@
           <a:p>
             <a:fld id="{2602ACF4-9E47-4D03-8EA6-1CE7E20F9165}" type="datetime1">
               <a:rPr lang="en-US" smtClean="0"/>
-              <a:t>9/22/25</a:t>
+              <a:t>10/19/2025</a:t>
             </a:fld>
             <a:endParaRPr lang="en-US" dirty="0"/>
           </a:p>
@@ -20770,7 +20971,7 @@
           <a:p>
             <a:fld id="{D3A9CD26-23FE-488A-AF3B-5DDE99301C10}" type="datetime1">
               <a:rPr lang="en-US" smtClean="0"/>
-              <a:t>9/22/25</a:t>
+              <a:t>10/19/2025</a:t>
             </a:fld>
             <a:endParaRPr lang="en-US" dirty="0"/>
           </a:p>
@@ -21029,7 +21230,7 @@
           <a:p>
             <a:fld id="{CC67263D-2536-4E2E-A4D6-BA89E45F00B0}" type="datetime1">
               <a:rPr lang="en-US" smtClean="0"/>
-              <a:t>9/22/25</a:t>
+              <a:t>10/19/2025</a:t>
             </a:fld>
             <a:endParaRPr lang="en-US" dirty="0"/>
           </a:p>
@@ -21652,7 +21853,7 @@
           <a:p>
             <a:fld id="{3A82B809-8BB3-463C-8B5E-28962B4654D8}" type="datetime1">
               <a:rPr lang="en-US" smtClean="0"/>
-              <a:t>9/22/25</a:t>
+              <a:t>10/19/2025</a:t>
             </a:fld>
             <a:endParaRPr lang="en-US" dirty="0"/>
           </a:p>
@@ -21875,7 +22076,7 @@
           <a:p>
             <a:fld id="{2DB8F537-5E0E-4697-8198-FDF0E53F372F}" type="datetime1">
               <a:rPr lang="en-US" smtClean="0"/>
-              <a:t>9/22/25</a:t>
+              <a:t>10/19/2025</a:t>
             </a:fld>
             <a:endParaRPr lang="en-US" dirty="0"/>
           </a:p>
@@ -22369,7 +22570,7 @@
           <a:p>
             <a:fld id="{1D4E7D34-A495-4E23-B1D1-F5D651D22AFE}" type="datetime1">
               <a:rPr lang="en-US" smtClean="0"/>
-              <a:t>9/22/25</a:t>
+              <a:t>10/19/2025</a:t>
             </a:fld>
             <a:endParaRPr lang="en-US" dirty="0"/>
           </a:p>
@@ -22552,7 +22753,7 @@
           <a:p>
             <a:fld id="{85976A96-D1F6-4A74-B023-FDE16753EDD7}" type="datetime1">
               <a:rPr lang="en-US" smtClean="0"/>
-              <a:t>9/22/25</a:t>
+              <a:t>10/19/2025</a:t>
             </a:fld>
             <a:endParaRPr lang="en-US" dirty="0"/>
           </a:p>
@@ -22811,7 +23012,7 @@
           <a:p>
             <a:fld id="{FD1C4689-B28D-4D3C-8B05-9ABB967E2A3E}" type="datetime1">
               <a:rPr lang="en-US" smtClean="0"/>
-              <a:t>9/22/25</a:t>
+              <a:t>10/19/2025</a:t>
             </a:fld>
             <a:endParaRPr lang="en-US" dirty="0"/>
           </a:p>
@@ -23243,20 +23444,23 @@
         </p:nvSpPr>
         <p:spPr>
           <a:xfrm>
-            <a:off x="612648" y="502920"/>
+            <a:off x="612648" y="576072"/>
             <a:ext cx="5852160" cy="2953512"/>
           </a:xfrm>
         </p:spPr>
         <p:txBody>
           <a:bodyPr anchor="t">
-            <a:normAutofit/>
+            <a:normAutofit fontScale="90000"/>
           </a:bodyPr>
           <a:lstStyle/>
           <a:p>
             <a:r>
               <a:rPr kumimoji="1" lang="ko-KR" altLang="en-US" dirty="0"/>
-              <a:t>스포츠</a:t>
-            </a:r>
+              <a:t>스포츠 데이터 분석</a:t>
+            </a:r>
+            <a:br>
+              <a:rPr kumimoji="1" lang="en-US" altLang="ko-KR" dirty="0"/>
+            </a:br>
             <a:br>
               <a:rPr kumimoji="1" lang="en-US" altLang="ko-KR" dirty="0"/>
             </a:br>
@@ -23330,12 +23534,171 @@
           </a:p>
         </p:txBody>
       </p:sp>
+      <mc:AlternateContent xmlns:mc="http://schemas.openxmlformats.org/markup-compatibility/2006">
+        <mc:Choice xmlns:p14="http://schemas.microsoft.com/office/powerpoint/2010/main" Requires="p14">
+          <p:contentPart p14:bwMode="auto" r:id="rId2">
+            <p14:nvContentPartPr>
+              <p14:cNvPr id="13" name="잉크 12">
+                <a:extLst>
+                  <a:ext uri="{FF2B5EF4-FFF2-40B4-BE49-F238E27FC236}">
+                    <a16:creationId xmlns:a16="http://schemas.microsoft.com/office/drawing/2014/main" id="{73F04E46-E0F9-86D5-8BEC-00EA6F71BF83}"/>
+                  </a:ext>
+                </a:extLst>
+              </p14:cNvPr>
+              <p14:cNvContentPartPr/>
+              <p14:nvPr/>
+            </p14:nvContentPartPr>
+            <p14:xfrm>
+              <a:off x="9225219" y="2530980"/>
+              <a:ext cx="360" cy="360"/>
+            </p14:xfrm>
+          </p:contentPart>
+        </mc:Choice>
+        <mc:Fallback>
+          <p:pic>
+            <p:nvPicPr>
+              <p:cNvPr id="13" name="잉크 12">
+                <a:extLst>
+                  <a:ext uri="{FF2B5EF4-FFF2-40B4-BE49-F238E27FC236}">
+                    <a16:creationId xmlns:a16="http://schemas.microsoft.com/office/drawing/2014/main" id="{73F04E46-E0F9-86D5-8BEC-00EA6F71BF83}"/>
+                  </a:ext>
+                </a:extLst>
+              </p:cNvPr>
+              <p:cNvPicPr/>
+              <p:nvPr/>
+            </p:nvPicPr>
+            <p:blipFill>
+              <a:blip r:embed="rId3"/>
+              <a:stretch>
+                <a:fillRect/>
+              </a:stretch>
+            </p:blipFill>
+            <p:spPr>
+              <a:xfrm>
+                <a:off x="9219099" y="2524860"/>
+                <a:ext cx="12600" cy="12600"/>
+              </a:xfrm>
+              <a:prstGeom prst="rect">
+                <a:avLst/>
+              </a:prstGeom>
+            </p:spPr>
+          </p:pic>
+        </mc:Fallback>
+      </mc:AlternateContent>
+      <mc:AlternateContent xmlns:mc="http://schemas.openxmlformats.org/markup-compatibility/2006">
+        <mc:Choice xmlns:p14="http://schemas.microsoft.com/office/powerpoint/2010/main" Requires="p14">
+          <p:contentPart p14:bwMode="auto" r:id="rId4">
+            <p14:nvContentPartPr>
+              <p14:cNvPr id="16" name="잉크 15">
+                <a:extLst>
+                  <a:ext uri="{FF2B5EF4-FFF2-40B4-BE49-F238E27FC236}">
+                    <a16:creationId xmlns:a16="http://schemas.microsoft.com/office/drawing/2014/main" id="{0E27449D-E7B4-BD75-223D-FB448FB64831}"/>
+                  </a:ext>
+                </a:extLst>
+              </p14:cNvPr>
+              <p14:cNvContentPartPr/>
+              <p14:nvPr/>
+            </p14:nvContentPartPr>
+            <p14:xfrm>
+              <a:off x="9583419" y="776340"/>
+              <a:ext cx="550080" cy="266400"/>
+            </p14:xfrm>
+          </p:contentPart>
+        </mc:Choice>
+        <mc:Fallback>
+          <p:pic>
+            <p:nvPicPr>
+              <p:cNvPr id="16" name="잉크 15">
+                <a:extLst>
+                  <a:ext uri="{FF2B5EF4-FFF2-40B4-BE49-F238E27FC236}">
+                    <a16:creationId xmlns:a16="http://schemas.microsoft.com/office/drawing/2014/main" id="{0E27449D-E7B4-BD75-223D-FB448FB64831}"/>
+                  </a:ext>
+                </a:extLst>
+              </p:cNvPr>
+              <p:cNvPicPr/>
+              <p:nvPr/>
+            </p:nvPicPr>
+            <p:blipFill>
+              <a:blip r:embed="rId5"/>
+              <a:stretch>
+                <a:fillRect/>
+              </a:stretch>
+            </p:blipFill>
+            <p:spPr>
+              <a:xfrm>
+                <a:off x="9577299" y="770220"/>
+                <a:ext cx="562320" cy="278640"/>
+              </a:xfrm>
+              <a:prstGeom prst="rect">
+                <a:avLst/>
+              </a:prstGeom>
+            </p:spPr>
+          </p:pic>
+        </mc:Fallback>
+      </mc:AlternateContent>
       <p:sp>
         <p:nvSpPr>
-          <p:cNvPr id="8" name="Picture Placeholder 3">
-            <a:extLst>
-              <a:ext uri="{FF2B5EF4-FFF2-40B4-BE49-F238E27FC236}">
-                <a16:creationId xmlns:a16="http://schemas.microsoft.com/office/drawing/2014/main" id="{661287F0-3BE7-0007-835B-541A2BA61883}"/>
+          <p:cNvPr id="9" name="Straight Connector 8">
+            <a:extLst>
+              <a:ext uri="{FF2B5EF4-FFF2-40B4-BE49-F238E27FC236}">
+                <a16:creationId xmlns:a16="http://schemas.microsoft.com/office/drawing/2014/main" id="{C9F62F3E-EC9B-4A5C-B6B5-5E0F8B83389E}"/>
+              </a:ext>
+            </a:extLst>
+          </p:cNvPr>
+          <p:cNvSpPr/>
+          <p:nvPr/>
+        </p:nvSpPr>
+        <p:spPr>
+          <a:xfrm>
+            <a:off x="10629360" y="865080"/>
+            <a:ext cx="0" cy="0"/>
+          </a:xfrm>
+          <a:prstGeom prst="line">
+            <a:avLst/>
+          </a:prstGeom>
+          <a:solidFill>
+            <a:srgbClr val="FFFFFF">
+              <a:alpha val="5000"/>
+            </a:srgbClr>
+          </a:solidFill>
+          <a:ln w="12600">
+            <a:solidFill>
+              <a:srgbClr val="FFFFFF"/>
+            </a:solidFill>
+          </a:ln>
+        </p:spPr>
+        <p:style>
+          <a:lnRef idx="1">
+            <a:schemeClr val="accent1"/>
+          </a:lnRef>
+          <a:fillRef idx="0">
+            <a:schemeClr val="accent1"/>
+          </a:fillRef>
+          <a:effectRef idx="0">
+            <a:schemeClr val="accent1"/>
+          </a:effectRef>
+          <a:fontRef idx="minor">
+            <a:schemeClr val="tx1"/>
+          </a:fontRef>
+        </p:style>
+        <p:txBody>
+          <a:bodyPr wrap="none" rtlCol="0" anchor="ctr" anchorCtr="1"/>
+          <a:lstStyle/>
+          <a:p>
+            <a:endParaRPr lang="en-US">
+              <a:solidFill>
+                <a:srgbClr val="FFFFFF"/>
+              </a:solidFill>
+            </a:endParaRPr>
+          </a:p>
+        </p:txBody>
+      </p:sp>
+      <p:sp>
+        <p:nvSpPr>
+          <p:cNvPr id="26" name="그림 개체 틀 25">
+            <a:extLst>
+              <a:ext uri="{FF2B5EF4-FFF2-40B4-BE49-F238E27FC236}">
+                <a16:creationId xmlns:a16="http://schemas.microsoft.com/office/drawing/2014/main" id="{82E5FDEA-4F4C-31BA-993C-E255066840C0}"/>
               </a:ext>
             </a:extLst>
           </p:cNvPr>
@@ -23347,19 +23710,222 @@
           </p:nvPr>
         </p:nvSpPr>
         <p:spPr>
-          <a:xfrm>
-            <a:off x="7534656" y="0"/>
-            <a:ext cx="4654296" cy="6858000"/>
-          </a:xfrm>
+          <a:solidFill>
+            <a:schemeClr val="bg1"/>
+          </a:solidFill>
         </p:spPr>
         <p:txBody>
           <a:bodyPr/>
           <a:lstStyle/>
           <a:p>
-            <a:endParaRPr lang="ko-KR" altLang="en-US"/>
+            <a:endParaRPr lang="ko-KR" altLang="en-US" dirty="0"/>
           </a:p>
         </p:txBody>
       </p:sp>
+      <p:pic>
+        <p:nvPicPr>
+          <p:cNvPr id="27" name="그림 26" descr="텍스트, 로고, 폰트, 그래픽이(가) 표시된 사진">
+            <a:extLst>
+              <a:ext uri="{FF2B5EF4-FFF2-40B4-BE49-F238E27FC236}">
+                <a16:creationId xmlns:a16="http://schemas.microsoft.com/office/drawing/2014/main" id="{DD1A0AB4-F4B5-CDAA-FD6F-19C65DEFDD0F}"/>
+              </a:ext>
+            </a:extLst>
+          </p:cNvPr>
+          <p:cNvPicPr>
+            <a:picLocks noChangeAspect="1"/>
+          </p:cNvPicPr>
+          <p:nvPr/>
+        </p:nvPicPr>
+        <p:blipFill>
+          <a:blip r:embed="rId6"/>
+          <a:stretch>
+            <a:fillRect/>
+          </a:stretch>
+        </p:blipFill>
+        <p:spPr>
+          <a:xfrm>
+            <a:off x="7534656" y="1783504"/>
+            <a:ext cx="4654295" cy="3240727"/>
+          </a:xfrm>
+          <a:prstGeom prst="rect">
+            <a:avLst/>
+          </a:prstGeom>
+        </p:spPr>
+      </p:pic>
+      <p:grpSp>
+        <p:nvGrpSpPr>
+          <p:cNvPr id="32" name="그룹 31">
+            <a:extLst>
+              <a:ext uri="{FF2B5EF4-FFF2-40B4-BE49-F238E27FC236}">
+                <a16:creationId xmlns:a16="http://schemas.microsoft.com/office/drawing/2014/main" id="{BB30400A-D04A-0A6B-6A49-0F710023AF92}"/>
+              </a:ext>
+            </a:extLst>
+          </p:cNvPr>
+          <p:cNvGrpSpPr/>
+          <p:nvPr/>
+        </p:nvGrpSpPr>
+        <p:grpSpPr>
+          <a:xfrm>
+            <a:off x="7580220" y="218493"/>
+            <a:ext cx="268200" cy="262440"/>
+            <a:chOff x="7580220" y="218493"/>
+            <a:chExt cx="268200" cy="262440"/>
+          </a:xfrm>
+        </p:grpSpPr>
+        <mc:AlternateContent xmlns:mc="http://schemas.openxmlformats.org/markup-compatibility/2006">
+          <mc:Choice xmlns:p14="http://schemas.microsoft.com/office/powerpoint/2010/main" Requires="p14">
+            <p:contentPart p14:bwMode="auto" r:id="rId7">
+              <p14:nvContentPartPr>
+                <p14:cNvPr id="28" name="잉크 27">
+                  <a:extLst>
+                    <a:ext uri="{FF2B5EF4-FFF2-40B4-BE49-F238E27FC236}">
+                      <a16:creationId xmlns:a16="http://schemas.microsoft.com/office/drawing/2014/main" id="{62485F62-87D4-2D69-F818-841302A9294A}"/>
+                    </a:ext>
+                  </a:extLst>
+                </p14:cNvPr>
+                <p14:cNvContentPartPr/>
+                <p14:nvPr/>
+              </p14:nvContentPartPr>
+              <p14:xfrm>
+                <a:off x="7625220" y="279333"/>
+                <a:ext cx="223200" cy="201600"/>
+              </p14:xfrm>
+            </p:contentPart>
+          </mc:Choice>
+          <mc:Fallback>
+            <p:pic>
+              <p:nvPicPr>
+                <p:cNvPr id="28" name="잉크 27">
+                  <a:extLst>
+                    <a:ext uri="{FF2B5EF4-FFF2-40B4-BE49-F238E27FC236}">
+                      <a16:creationId xmlns:a16="http://schemas.microsoft.com/office/drawing/2014/main" id="{62485F62-87D4-2D69-F818-841302A9294A}"/>
+                    </a:ext>
+                  </a:extLst>
+                </p:cNvPr>
+                <p:cNvPicPr/>
+                <p:nvPr/>
+              </p:nvPicPr>
+              <p:blipFill>
+                <a:blip r:embed="rId8"/>
+                <a:stretch>
+                  <a:fillRect/>
+                </a:stretch>
+              </p:blipFill>
+              <p:spPr>
+                <a:xfrm>
+                  <a:off x="7619100" y="273213"/>
+                  <a:ext cx="235440" cy="213840"/>
+                </a:xfrm>
+                <a:prstGeom prst="rect">
+                  <a:avLst/>
+                </a:prstGeom>
+              </p:spPr>
+            </p:pic>
+          </mc:Fallback>
+        </mc:AlternateContent>
+        <mc:AlternateContent xmlns:mc="http://schemas.openxmlformats.org/markup-compatibility/2006">
+          <mc:Choice xmlns:p14="http://schemas.microsoft.com/office/powerpoint/2010/main" Requires="p14">
+            <p:contentPart p14:bwMode="auto" r:id="rId9">
+              <p14:nvContentPartPr>
+                <p14:cNvPr id="29" name="잉크 28">
+                  <a:extLst>
+                    <a:ext uri="{FF2B5EF4-FFF2-40B4-BE49-F238E27FC236}">
+                      <a16:creationId xmlns:a16="http://schemas.microsoft.com/office/drawing/2014/main" id="{67625B05-E953-069C-CCC1-ECE0838E753F}"/>
+                    </a:ext>
+                  </a:extLst>
+                </p14:cNvPr>
+                <p14:cNvContentPartPr/>
+                <p14:nvPr/>
+              </p14:nvContentPartPr>
+              <p14:xfrm>
+                <a:off x="7638540" y="303813"/>
+                <a:ext cx="63000" cy="163800"/>
+              </p14:xfrm>
+            </p:contentPart>
+          </mc:Choice>
+          <mc:Fallback>
+            <p:pic>
+              <p:nvPicPr>
+                <p:cNvPr id="29" name="잉크 28">
+                  <a:extLst>
+                    <a:ext uri="{FF2B5EF4-FFF2-40B4-BE49-F238E27FC236}">
+                      <a16:creationId xmlns:a16="http://schemas.microsoft.com/office/drawing/2014/main" id="{67625B05-E953-069C-CCC1-ECE0838E753F}"/>
+                    </a:ext>
+                  </a:extLst>
+                </p:cNvPr>
+                <p:cNvPicPr/>
+                <p:nvPr/>
+              </p:nvPicPr>
+              <p:blipFill>
+                <a:blip r:embed="rId10"/>
+                <a:stretch>
+                  <a:fillRect/>
+                </a:stretch>
+              </p:blipFill>
+              <p:spPr>
+                <a:xfrm>
+                  <a:off x="7632420" y="297693"/>
+                  <a:ext cx="75240" cy="176040"/>
+                </a:xfrm>
+                <a:prstGeom prst="rect">
+                  <a:avLst/>
+                </a:prstGeom>
+              </p:spPr>
+            </p:pic>
+          </mc:Fallback>
+        </mc:AlternateContent>
+        <mc:AlternateContent xmlns:mc="http://schemas.openxmlformats.org/markup-compatibility/2006">
+          <mc:Choice xmlns:p14="http://schemas.microsoft.com/office/powerpoint/2010/main" Requires="p14">
+            <p:contentPart p14:bwMode="auto" r:id="rId11">
+              <p14:nvContentPartPr>
+                <p14:cNvPr id="31" name="잉크 30">
+                  <a:extLst>
+                    <a:ext uri="{FF2B5EF4-FFF2-40B4-BE49-F238E27FC236}">
+                      <a16:creationId xmlns:a16="http://schemas.microsoft.com/office/drawing/2014/main" id="{44CFBA9D-526D-1628-7039-2744B43CE759}"/>
+                    </a:ext>
+                  </a:extLst>
+                </p14:cNvPr>
+                <p14:cNvContentPartPr/>
+                <p14:nvPr/>
+              </p14:nvContentPartPr>
+              <p14:xfrm>
+                <a:off x="7580220" y="218493"/>
+                <a:ext cx="144000" cy="174960"/>
+              </p14:xfrm>
+            </p:contentPart>
+          </mc:Choice>
+          <mc:Fallback>
+            <p:pic>
+              <p:nvPicPr>
+                <p:cNvPr id="31" name="잉크 30">
+                  <a:extLst>
+                    <a:ext uri="{FF2B5EF4-FFF2-40B4-BE49-F238E27FC236}">
+                      <a16:creationId xmlns:a16="http://schemas.microsoft.com/office/drawing/2014/main" id="{44CFBA9D-526D-1628-7039-2744B43CE759}"/>
+                    </a:ext>
+                  </a:extLst>
+                </p:cNvPr>
+                <p:cNvPicPr/>
+                <p:nvPr/>
+              </p:nvPicPr>
+              <p:blipFill>
+                <a:blip r:embed="rId12"/>
+                <a:stretch>
+                  <a:fillRect/>
+                </a:stretch>
+              </p:blipFill>
+              <p:spPr>
+                <a:xfrm>
+                  <a:off x="7574100" y="212373"/>
+                  <a:ext cx="156240" cy="187200"/>
+                </a:xfrm>
+                <a:prstGeom prst="rect">
+                  <a:avLst/>
+                </a:prstGeom>
+              </p:spPr>
+            </p:pic>
+          </mc:Fallback>
+        </mc:AlternateContent>
+      </p:grpSp>
     </p:spTree>
     <p:extLst>
       <p:ext uri="{BB962C8B-B14F-4D97-AF65-F5344CB8AC3E}">
@@ -25150,13 +25716,7 @@
                       <a:rPr kumimoji="1" lang="ko-KR" altLang="en-US" i="1">
                         <a:latin typeface="Cambria Math" panose="02040503050406030204" pitchFamily="18" charset="0"/>
                       </a:rPr>
-                      <m:t> </m:t>
-                    </m:r>
-                    <m:r>
-                      <a:rPr kumimoji="1" lang="en-US" altLang="ko-KR" i="1">
-                        <a:latin typeface="Cambria Math" panose="02040503050406030204" pitchFamily="18" charset="0"/>
-                      </a:rPr>
-                      <m:t>(</m:t>
+                      <m:t> (</m:t>
                     </m:r>
                     <m:r>
                       <a:rPr kumimoji="1" lang="en-US" altLang="ko-KR" i="1">
@@ -25427,13 +25987,7 @@
                       <a:rPr kumimoji="1" lang="en-US" altLang="ko-KR" i="1">
                         <a:latin typeface="Cambria Math" panose="02040503050406030204" pitchFamily="18" charset="0"/>
                       </a:rPr>
-                      <m:t>:</m:t>
-                    </m:r>
-                    <m:r>
-                      <a:rPr kumimoji="1" lang="ko-KR" altLang="en-US" i="1">
-                        <a:latin typeface="Cambria Math" panose="02040503050406030204" pitchFamily="18" charset="0"/>
-                      </a:rPr>
-                      <m:t> </m:t>
+                      <m:t>: </m:t>
                     </m:r>
                     <m:r>
                       <a:rPr kumimoji="1" lang="ko-KR" altLang="en-US" i="1">
@@ -30160,6 +30714,6516 @@
 </p:sld>
 </file>
 
+<file path=ppt/slides/slide16.xml><?xml version="1.0" encoding="utf-8"?>
+<p:sld xmlns:a="http://schemas.openxmlformats.org/drawingml/2006/main" xmlns:r="http://schemas.openxmlformats.org/officeDocument/2006/relationships" xmlns:p="http://schemas.openxmlformats.org/presentationml/2006/main">
+  <p:cSld>
+    <p:spTree>
+      <p:nvGrpSpPr>
+        <p:cNvPr id="1" name=""/>
+        <p:cNvGrpSpPr/>
+        <p:nvPr/>
+      </p:nvGrpSpPr>
+      <p:grpSpPr>
+        <a:xfrm>
+          <a:off x="0" y="0"/>
+          <a:ext cx="0" cy="0"/>
+          <a:chOff x="0" y="0"/>
+          <a:chExt cx="0" cy="0"/>
+        </a:xfrm>
+      </p:grpSpPr>
+      <p:sp>
+        <p:nvSpPr>
+          <p:cNvPr id="2" name="제목 1">
+            <a:extLst>
+              <a:ext uri="{FF2B5EF4-FFF2-40B4-BE49-F238E27FC236}">
+                <a16:creationId xmlns:a16="http://schemas.microsoft.com/office/drawing/2014/main" id="{10FAB249-17EF-1477-D5B0-551155BBAF6E}"/>
+              </a:ext>
+            </a:extLst>
+          </p:cNvPr>
+          <p:cNvSpPr>
+            <a:spLocks noGrp="1"/>
+          </p:cNvSpPr>
+          <p:nvPr>
+            <p:ph type="title"/>
+          </p:nvPr>
+        </p:nvSpPr>
+        <p:spPr>
+          <a:xfrm>
+            <a:off x="612648" y="296528"/>
+            <a:ext cx="10954512" cy="795528"/>
+          </a:xfrm>
+        </p:spPr>
+        <p:txBody>
+          <a:bodyPr/>
+          <a:lstStyle/>
+          <a:p>
+            <a:r>
+              <a:rPr lang="ko-KR" altLang="en-US" dirty="0"/>
+              <a:t>주제 선정 동기</a:t>
+            </a:r>
+            <a:r>
+              <a:rPr lang="en-US" altLang="ko-KR" dirty="0"/>
+              <a:t>(</a:t>
+            </a:r>
+            <a:r>
+              <a:rPr lang="ko-KR" altLang="en-US" dirty="0"/>
+              <a:t>실시간 승률 분석</a:t>
+            </a:r>
+            <a:r>
+              <a:rPr lang="en-US" altLang="ko-KR" dirty="0"/>
+              <a:t>)</a:t>
+            </a:r>
+            <a:endParaRPr lang="ko-KR" altLang="en-US" dirty="0"/>
+          </a:p>
+        </p:txBody>
+      </p:sp>
+      <p:sp>
+        <p:nvSpPr>
+          <p:cNvPr id="3" name="내용 개체 틀 2">
+            <a:extLst>
+              <a:ext uri="{FF2B5EF4-FFF2-40B4-BE49-F238E27FC236}">
+                <a16:creationId xmlns:a16="http://schemas.microsoft.com/office/drawing/2014/main" id="{E08B08EE-4C34-A744-9B1A-2EF98E04B69F}"/>
+              </a:ext>
+            </a:extLst>
+          </p:cNvPr>
+          <p:cNvSpPr>
+            <a:spLocks noGrp="1"/>
+          </p:cNvSpPr>
+          <p:nvPr>
+            <p:ph idx="1"/>
+          </p:nvPr>
+        </p:nvSpPr>
+        <p:spPr>
+          <a:xfrm>
+            <a:off x="612648" y="1225845"/>
+            <a:ext cx="10954512" cy="4956047"/>
+          </a:xfrm>
+        </p:spPr>
+        <p:txBody>
+          <a:bodyPr>
+            <a:normAutofit fontScale="85000" lnSpcReduction="20000"/>
+          </a:bodyPr>
+          <a:lstStyle/>
+          <a:p>
+            <a:pPr marL="342900" indent="-342900">
+              <a:buAutoNum type="arabicPeriod"/>
+            </a:pPr>
+            <a:r>
+              <a:rPr lang="ko-KR" altLang="en-US" dirty="0"/>
+              <a:t>평소 스포츠에 관심이 많았음</a:t>
+            </a:r>
+            <a:endParaRPr lang="en-US" altLang="ko-KR" dirty="0"/>
+          </a:p>
+          <a:p>
+            <a:pPr marL="342900" indent="-342900">
+              <a:buAutoNum type="arabicPeriod"/>
+            </a:pPr>
+            <a:endParaRPr lang="en-US" altLang="ko-KR" dirty="0"/>
+          </a:p>
+          <a:p>
+            <a:pPr marL="342900" indent="-342900">
+              <a:buAutoNum type="arabicPeriod"/>
+            </a:pPr>
+            <a:r>
+              <a:rPr lang="ko-KR" altLang="en-US" dirty="0"/>
+              <a:t>어떤 스포츠 경기에 대해 데이터 분석을 하여 수치적으로 나타낸 값들이 궁금하였음</a:t>
+            </a:r>
+            <a:endParaRPr lang="en-US" altLang="ko-KR" dirty="0"/>
+          </a:p>
+          <a:p>
+            <a:pPr marL="342900" indent="-342900">
+              <a:buAutoNum type="arabicPeriod"/>
+            </a:pPr>
+            <a:endParaRPr lang="en-US" altLang="ko-KR" dirty="0"/>
+          </a:p>
+          <a:p>
+            <a:pPr marL="342900" indent="-342900">
+              <a:buAutoNum type="arabicPeriod"/>
+            </a:pPr>
+            <a:r>
+              <a:rPr lang="ko-KR" altLang="en-US" dirty="0"/>
+              <a:t>경기 중계 시에 실시간으로 바뀌는 상황에 대한 상대적 승률이 궁금하였음</a:t>
+            </a:r>
+            <a:endParaRPr lang="en-US" altLang="ko-KR" dirty="0"/>
+          </a:p>
+          <a:p>
+            <a:pPr marL="342900" indent="-342900">
+              <a:buAutoNum type="arabicPeriod"/>
+            </a:pPr>
+            <a:endParaRPr lang="en-US" altLang="ko-KR" dirty="0"/>
+          </a:p>
+          <a:p>
+            <a:pPr marL="342900" indent="-342900">
+              <a:buAutoNum type="arabicPeriod"/>
+            </a:pPr>
+            <a:r>
+              <a:rPr lang="ko-KR" altLang="en-US" dirty="0"/>
+              <a:t>내가 좋아하는 팀에 대한 기여</a:t>
+            </a:r>
+            <a:r>
+              <a:rPr lang="en-US" altLang="ko-KR" dirty="0"/>
+              <a:t>(</a:t>
+            </a:r>
+            <a:r>
+              <a:rPr lang="ko-KR" altLang="en-US" dirty="0"/>
+              <a:t>팀 스포츠 데이터에 대한 분석을 통해 장단점 및 상대 전적 데이터 확보</a:t>
+            </a:r>
+            <a:r>
+              <a:rPr lang="en-US" altLang="ko-KR" dirty="0"/>
+              <a:t>)</a:t>
+            </a:r>
+          </a:p>
+          <a:p>
+            <a:pPr marL="342900" indent="-342900">
+              <a:buAutoNum type="arabicPeriod"/>
+            </a:pPr>
+            <a:endParaRPr lang="en-US" altLang="ko-KR" dirty="0"/>
+          </a:p>
+          <a:p>
+            <a:pPr marL="342900" indent="-342900">
+              <a:buAutoNum type="arabicPeriod"/>
+            </a:pPr>
+            <a:r>
+              <a:rPr lang="ko-KR" altLang="en-US" dirty="0"/>
+              <a:t>어떤 스포츠에서도 이기고 있는 경기임에도 내가 좋아하는 팀을 응원하는 마음에</a:t>
+            </a:r>
+            <a:r>
+              <a:rPr lang="en-US" altLang="ko-KR" dirty="0"/>
+              <a:t> </a:t>
+            </a:r>
+            <a:r>
+              <a:rPr lang="ko-KR" altLang="en-US" dirty="0"/>
+              <a:t>혹시나 </a:t>
+            </a:r>
+            <a:r>
+              <a:rPr lang="ko-KR" altLang="en-US" dirty="0" err="1"/>
+              <a:t>역전당하지</a:t>
+            </a:r>
+            <a:r>
+              <a:rPr lang="ko-KR" altLang="en-US" dirty="0"/>
+              <a:t> 않을까 하는 불안한 경험이 있을 것이다</a:t>
+            </a:r>
+            <a:endParaRPr lang="en-US" altLang="ko-KR" dirty="0"/>
+          </a:p>
+          <a:p>
+            <a:pPr marL="342900" indent="-342900">
+              <a:buAutoNum type="arabicPeriod"/>
+            </a:pPr>
+            <a:endParaRPr lang="en-US" altLang="ko-KR" dirty="0"/>
+          </a:p>
+          <a:p>
+            <a:pPr marL="342900" indent="-342900">
+              <a:buAutoNum type="arabicPeriod"/>
+            </a:pPr>
+            <a:r>
+              <a:rPr lang="ko-KR" altLang="en-US" dirty="0"/>
+              <a:t>이러한 것에 도움을 줄 수 있는 프로젝트가 되면 좋겠다</a:t>
+            </a:r>
+            <a:endParaRPr lang="en-US" altLang="ko-KR" dirty="0"/>
+          </a:p>
+          <a:p>
+            <a:pPr marL="342900" indent="-342900">
+              <a:buAutoNum type="arabicPeriod"/>
+            </a:pPr>
+            <a:endParaRPr lang="en-US" altLang="ko-KR" dirty="0"/>
+          </a:p>
+          <a:p>
+            <a:pPr marL="342900" indent="-342900">
+              <a:buAutoNum type="arabicPeriod"/>
+            </a:pPr>
+            <a:r>
+              <a:rPr lang="ko-KR" altLang="en-US" dirty="0"/>
+              <a:t>실시간 승패예측 프로그램을 활용해 경기 내적으로 운동선수에게 전략 및 전술의 수정 혹은 피드백을 통해 경기력 향상을 기대</a:t>
+            </a:r>
+            <a:endParaRPr lang="en-US" altLang="ko-KR" dirty="0"/>
+          </a:p>
+        </p:txBody>
+      </p:sp>
+      <mc:AlternateContent xmlns:mc="http://schemas.openxmlformats.org/markup-compatibility/2006">
+        <mc:Choice xmlns:p14="http://schemas.microsoft.com/office/powerpoint/2010/main" Requires="p14">
+          <p:contentPart p14:bwMode="auto" r:id="rId2">
+            <p14:nvContentPartPr>
+              <p14:cNvPr id="4" name="잉크 3">
+                <a:extLst>
+                  <a:ext uri="{FF2B5EF4-FFF2-40B4-BE49-F238E27FC236}">
+                    <a16:creationId xmlns:a16="http://schemas.microsoft.com/office/drawing/2014/main" id="{F7EEC7DC-1EB3-44C5-4BBB-AD6467DE7771}"/>
+                  </a:ext>
+                </a:extLst>
+              </p14:cNvPr>
+              <p14:cNvContentPartPr/>
+              <p14:nvPr/>
+            </p14:nvContentPartPr>
+            <p14:xfrm>
+              <a:off x="4617895" y="1182069"/>
+              <a:ext cx="360" cy="360"/>
+            </p14:xfrm>
+          </p:contentPart>
+        </mc:Choice>
+        <mc:Fallback>
+          <p:pic>
+            <p:nvPicPr>
+              <p:cNvPr id="4" name="잉크 3">
+                <a:extLst>
+                  <a:ext uri="{FF2B5EF4-FFF2-40B4-BE49-F238E27FC236}">
+                    <a16:creationId xmlns:a16="http://schemas.microsoft.com/office/drawing/2014/main" id="{F7EEC7DC-1EB3-44C5-4BBB-AD6467DE7771}"/>
+                  </a:ext>
+                </a:extLst>
+              </p:cNvPr>
+              <p:cNvPicPr/>
+              <p:nvPr/>
+            </p:nvPicPr>
+            <p:blipFill>
+              <a:blip r:embed="rId3"/>
+              <a:stretch>
+                <a:fillRect/>
+              </a:stretch>
+            </p:blipFill>
+            <p:spPr>
+              <a:xfrm>
+                <a:off x="4611775" y="1175949"/>
+                <a:ext cx="12600" cy="12600"/>
+              </a:xfrm>
+              <a:prstGeom prst="rect">
+                <a:avLst/>
+              </a:prstGeom>
+            </p:spPr>
+          </p:pic>
+        </mc:Fallback>
+      </mc:AlternateContent>
+      <mc:AlternateContent xmlns:mc="http://schemas.openxmlformats.org/markup-compatibility/2006">
+        <mc:Choice xmlns:p14="http://schemas.microsoft.com/office/powerpoint/2010/main" Requires="p14">
+          <p:contentPart p14:bwMode="auto" r:id="rId4">
+            <p14:nvContentPartPr>
+              <p14:cNvPr id="6" name="잉크 5">
+                <a:extLst>
+                  <a:ext uri="{FF2B5EF4-FFF2-40B4-BE49-F238E27FC236}">
+                    <a16:creationId xmlns:a16="http://schemas.microsoft.com/office/drawing/2014/main" id="{90445EE4-7D1F-67AA-377D-C20CB8C35958}"/>
+                  </a:ext>
+                </a:extLst>
+              </p14:cNvPr>
+              <p14:cNvContentPartPr/>
+              <p14:nvPr/>
+            </p14:nvContentPartPr>
+            <p14:xfrm>
+              <a:off x="12653815" y="3703869"/>
+              <a:ext cx="360" cy="360"/>
+            </p14:xfrm>
+          </p:contentPart>
+        </mc:Choice>
+        <mc:Fallback>
+          <p:pic>
+            <p:nvPicPr>
+              <p:cNvPr id="6" name="잉크 5">
+                <a:extLst>
+                  <a:ext uri="{FF2B5EF4-FFF2-40B4-BE49-F238E27FC236}">
+                    <a16:creationId xmlns:a16="http://schemas.microsoft.com/office/drawing/2014/main" id="{90445EE4-7D1F-67AA-377D-C20CB8C35958}"/>
+                  </a:ext>
+                </a:extLst>
+              </p:cNvPr>
+              <p:cNvPicPr/>
+              <p:nvPr/>
+            </p:nvPicPr>
+            <p:blipFill>
+              <a:blip r:embed="rId3"/>
+              <a:stretch>
+                <a:fillRect/>
+              </a:stretch>
+            </p:blipFill>
+            <p:spPr>
+              <a:xfrm>
+                <a:off x="12647695" y="3697749"/>
+                <a:ext cx="12600" cy="12600"/>
+              </a:xfrm>
+              <a:prstGeom prst="rect">
+                <a:avLst/>
+              </a:prstGeom>
+            </p:spPr>
+          </p:pic>
+        </mc:Fallback>
+      </mc:AlternateContent>
+    </p:spTree>
+    <p:extLst>
+      <p:ext uri="{BB962C8B-B14F-4D97-AF65-F5344CB8AC3E}">
+        <p14:creationId xmlns:p14="http://schemas.microsoft.com/office/powerpoint/2010/main" val="2712605664"/>
+      </p:ext>
+    </p:extLst>
+  </p:cSld>
+  <p:clrMapOvr>
+    <a:masterClrMapping/>
+  </p:clrMapOvr>
+</p:sld>
+</file>
+
+<file path=ppt/slides/slide17.xml><?xml version="1.0" encoding="utf-8"?>
+<p:sld xmlns:a="http://schemas.openxmlformats.org/drawingml/2006/main" xmlns:r="http://schemas.openxmlformats.org/officeDocument/2006/relationships" xmlns:p="http://schemas.openxmlformats.org/presentationml/2006/main">
+  <p:cSld>
+    <p:spTree>
+      <p:nvGrpSpPr>
+        <p:cNvPr id="1" name=""/>
+        <p:cNvGrpSpPr/>
+        <p:nvPr/>
+      </p:nvGrpSpPr>
+      <p:grpSpPr>
+        <a:xfrm>
+          <a:off x="0" y="0"/>
+          <a:ext cx="0" cy="0"/>
+          <a:chOff x="0" y="0"/>
+          <a:chExt cx="0" cy="0"/>
+        </a:xfrm>
+      </p:grpSpPr>
+      <p:sp>
+        <p:nvSpPr>
+          <p:cNvPr id="2" name="제목 1">
+            <a:extLst>
+              <a:ext uri="{FF2B5EF4-FFF2-40B4-BE49-F238E27FC236}">
+                <a16:creationId xmlns:a16="http://schemas.microsoft.com/office/drawing/2014/main" id="{B345C0BC-DCCB-17E2-4E01-25E84B188E64}"/>
+              </a:ext>
+            </a:extLst>
+          </p:cNvPr>
+          <p:cNvSpPr>
+            <a:spLocks noGrp="1"/>
+          </p:cNvSpPr>
+          <p:nvPr>
+            <p:ph type="title"/>
+          </p:nvPr>
+        </p:nvSpPr>
+        <p:spPr/>
+        <p:txBody>
+          <a:bodyPr/>
+          <a:lstStyle/>
+          <a:p>
+            <a:r>
+              <a:rPr lang="ko-KR" altLang="en-US" dirty="0"/>
+              <a:t>데이터 수집 및 처리 과정</a:t>
+            </a:r>
+          </a:p>
+        </p:txBody>
+      </p:sp>
+      <p:sp>
+        <p:nvSpPr>
+          <p:cNvPr id="3" name="내용 개체 틀 2">
+            <a:extLst>
+              <a:ext uri="{FF2B5EF4-FFF2-40B4-BE49-F238E27FC236}">
+                <a16:creationId xmlns:a16="http://schemas.microsoft.com/office/drawing/2014/main" id="{158B6E4A-3781-A10A-05CA-76EEA66131BE}"/>
+              </a:ext>
+            </a:extLst>
+          </p:cNvPr>
+          <p:cNvSpPr>
+            <a:spLocks noGrp="1"/>
+          </p:cNvSpPr>
+          <p:nvPr>
+            <p:ph idx="1"/>
+          </p:nvPr>
+        </p:nvSpPr>
+        <p:spPr/>
+        <p:txBody>
+          <a:bodyPr>
+            <a:normAutofit fontScale="92500" lnSpcReduction="10000"/>
+          </a:bodyPr>
+          <a:lstStyle/>
+          <a:p>
+            <a:pPr marL="0" indent="0">
+              <a:buNone/>
+            </a:pPr>
+            <a:r>
+              <a:rPr lang="ko-KR" altLang="en-US" dirty="0"/>
+              <a:t>데이터 출처 </a:t>
+            </a:r>
+            <a:r>
+              <a:rPr lang="en-US" altLang="ko-KR" dirty="0"/>
+              <a:t>: KBL </a:t>
+            </a:r>
+            <a:r>
+              <a:rPr lang="ko-KR" altLang="en-US" dirty="0"/>
+              <a:t>공식 웹사이트 문자중계</a:t>
+            </a:r>
+            <a:endParaRPr lang="en-US" altLang="ko-KR" dirty="0"/>
+          </a:p>
+          <a:p>
+            <a:pPr marL="0" indent="0">
+              <a:buNone/>
+            </a:pPr>
+            <a:r>
+              <a:rPr lang="ko-KR" altLang="en-US" dirty="0"/>
+              <a:t>데이터 범위 </a:t>
+            </a:r>
+            <a:r>
+              <a:rPr lang="en-US" altLang="ko-KR" dirty="0"/>
+              <a:t>2021~2025</a:t>
+            </a:r>
+            <a:r>
+              <a:rPr lang="ko-KR" altLang="en-US" dirty="0"/>
+              <a:t>시즌 정규시즌 데이터 </a:t>
+            </a:r>
+            <a:r>
+              <a:rPr lang="en-US" altLang="ko-KR" dirty="0"/>
+              <a:t>  4</a:t>
+            </a:r>
+            <a:r>
+              <a:rPr lang="ko-KR" altLang="en-US" dirty="0"/>
+              <a:t>시즌의 총 </a:t>
+            </a:r>
+            <a:r>
+              <a:rPr lang="en-US" altLang="ko-KR" dirty="0"/>
+              <a:t>1080</a:t>
+            </a:r>
+            <a:r>
+              <a:rPr lang="ko-KR" altLang="en-US" dirty="0"/>
+              <a:t>경기 데이터 </a:t>
+            </a:r>
+            <a:endParaRPr lang="en-US" altLang="ko-KR" dirty="0"/>
+          </a:p>
+          <a:p>
+            <a:pPr marL="0" indent="0">
+              <a:buNone/>
+            </a:pPr>
+            <a:r>
+              <a:rPr lang="en-US" altLang="ko-KR" dirty="0"/>
+              <a:t>- </a:t>
+            </a:r>
+            <a:r>
+              <a:rPr lang="ko-KR" altLang="en-US" dirty="0"/>
+              <a:t>쿼터별 누적 데이터 수집</a:t>
+            </a:r>
+            <a:endParaRPr lang="en-US" altLang="ko-KR" dirty="0"/>
+          </a:p>
+          <a:p>
+            <a:pPr marL="0" indent="0">
+              <a:buNone/>
+            </a:pPr>
+            <a:endParaRPr lang="en-US" altLang="ko-KR" dirty="0"/>
+          </a:p>
+          <a:p>
+            <a:pPr marL="0" indent="0">
+              <a:buNone/>
+            </a:pPr>
+            <a:endParaRPr lang="en-US" altLang="ko-KR" dirty="0"/>
+          </a:p>
+          <a:p>
+            <a:pPr marL="0" indent="0">
+              <a:buNone/>
+            </a:pPr>
+            <a:endParaRPr lang="en-US" altLang="ko-KR" dirty="0"/>
+          </a:p>
+          <a:p>
+            <a:pPr marL="0" indent="0">
+              <a:buNone/>
+            </a:pPr>
+            <a:endParaRPr lang="en-US" altLang="ko-KR" dirty="0"/>
+          </a:p>
+          <a:p>
+            <a:pPr marL="0" indent="0">
+              <a:buNone/>
+            </a:pPr>
+            <a:endParaRPr lang="en-US" altLang="ko-KR" dirty="0"/>
+          </a:p>
+          <a:p>
+            <a:pPr marL="0" indent="0">
+              <a:buNone/>
+            </a:pPr>
+            <a:endParaRPr lang="en-US" altLang="ko-KR" dirty="0"/>
+          </a:p>
+          <a:p>
+            <a:pPr marL="0" indent="0">
+              <a:buNone/>
+            </a:pPr>
+            <a:endParaRPr lang="en-US" altLang="ko-KR" dirty="0"/>
+          </a:p>
+          <a:p>
+            <a:pPr marL="0" indent="0">
+              <a:buNone/>
+            </a:pPr>
+            <a:endParaRPr lang="en-US" altLang="ko-KR" dirty="0"/>
+          </a:p>
+          <a:p>
+            <a:pPr marL="0" indent="0">
+              <a:buNone/>
+            </a:pPr>
+            <a:r>
+              <a:rPr lang="ko-KR" altLang="en-US" dirty="0"/>
+              <a:t>수집방법 </a:t>
+            </a:r>
+            <a:r>
+              <a:rPr lang="en-US" altLang="ko-KR" dirty="0"/>
+              <a:t>: Python </a:t>
+            </a:r>
+            <a:r>
+              <a:rPr lang="ko-KR" altLang="en-US" dirty="0"/>
+              <a:t>기반 웹 </a:t>
+            </a:r>
+            <a:r>
+              <a:rPr lang="ko-KR" altLang="en-US" dirty="0" err="1"/>
+              <a:t>크롤링</a:t>
+            </a:r>
+            <a:endParaRPr lang="en-US" altLang="ko-KR" dirty="0"/>
+          </a:p>
+          <a:p>
+            <a:pPr marL="0" indent="0">
+              <a:buNone/>
+            </a:pPr>
+            <a:endParaRPr lang="en-US" altLang="ko-KR" dirty="0"/>
+          </a:p>
+        </p:txBody>
+      </p:sp>
+      <p:graphicFrame>
+        <p:nvGraphicFramePr>
+          <p:cNvPr id="4" name="표 3">
+            <a:extLst>
+              <a:ext uri="{FF2B5EF4-FFF2-40B4-BE49-F238E27FC236}">
+                <a16:creationId xmlns:a16="http://schemas.microsoft.com/office/drawing/2014/main" id="{C50EFBC2-9EB1-8FA7-8CA0-1A644468DB28}"/>
+              </a:ext>
+            </a:extLst>
+          </p:cNvPr>
+          <p:cNvGraphicFramePr>
+            <a:graphicFrameLocks noGrp="1"/>
+          </p:cNvGraphicFramePr>
+          <p:nvPr>
+            <p:extLst>
+              <p:ext uri="{D42A27DB-BD31-4B8C-83A1-F6EECF244321}">
+                <p14:modId xmlns:p14="http://schemas.microsoft.com/office/powerpoint/2010/main" val="2645973159"/>
+              </p:ext>
+            </p:extLst>
+          </p:nvPr>
+        </p:nvGraphicFramePr>
+        <p:xfrm>
+          <a:off x="713839" y="2727958"/>
+          <a:ext cx="7424322" cy="2495550"/>
+        </p:xfrm>
+        <a:graphic>
+          <a:graphicData uri="http://schemas.openxmlformats.org/drawingml/2006/table">
+            <a:tbl>
+              <a:tblPr firstRow="1" bandRow="1">
+                <a:tableStyleId>{5C22544A-7EE6-4342-B048-85BDC9FD1C3A}</a:tableStyleId>
+              </a:tblPr>
+              <a:tblGrid>
+                <a:gridCol w="2474774">
+                  <a:extLst>
+                    <a:ext uri="{9D8B030D-6E8A-4147-A177-3AD203B41FA5}">
+                      <a16:colId xmlns:a16="http://schemas.microsoft.com/office/drawing/2014/main" val="2285491562"/>
+                    </a:ext>
+                  </a:extLst>
+                </a:gridCol>
+                <a:gridCol w="2474774">
+                  <a:extLst>
+                    <a:ext uri="{9D8B030D-6E8A-4147-A177-3AD203B41FA5}">
+                      <a16:colId xmlns:a16="http://schemas.microsoft.com/office/drawing/2014/main" val="2092944145"/>
+                    </a:ext>
+                  </a:extLst>
+                </a:gridCol>
+                <a:gridCol w="2474774">
+                  <a:extLst>
+                    <a:ext uri="{9D8B030D-6E8A-4147-A177-3AD203B41FA5}">
+                      <a16:colId xmlns:a16="http://schemas.microsoft.com/office/drawing/2014/main" val="2871585221"/>
+                    </a:ext>
+                  </a:extLst>
+                </a:gridCol>
+              </a:tblGrid>
+              <a:tr h="415925">
+                <a:tc>
+                  <a:txBody>
+                    <a:bodyPr/>
+                    <a:lstStyle/>
+                    <a:p>
+                      <a:pPr algn="ctr" latinLnBrk="1"/>
+                      <a:r>
+                        <a:rPr lang="ko-KR" altLang="en-US" dirty="0">
+                          <a:solidFill>
+                            <a:schemeClr val="tx1"/>
+                          </a:solidFill>
+                        </a:rPr>
+                        <a:t> 시즌</a:t>
+                      </a:r>
+                    </a:p>
+                  </a:txBody>
+                  <a:tcPr>
+                    <a:lnL w="12700" cmpd="sng">
+                      <a:noFill/>
+                    </a:lnL>
+                    <a:lnR w="12700" cmpd="sng">
+                      <a:noFill/>
+                    </a:lnR>
+                    <a:lnT w="28575" cap="flat" cmpd="sng" algn="ctr">
+                      <a:solidFill>
+                        <a:schemeClr val="tx1"/>
+                      </a:solidFill>
+                      <a:prstDash val="solid"/>
+                      <a:round/>
+                      <a:headEnd type="none" w="med" len="med"/>
+                      <a:tailEnd type="none" w="med" len="med"/>
+                    </a:lnT>
+                    <a:lnB w="12700" cap="flat" cmpd="sng" algn="ctr">
+                      <a:solidFill>
+                        <a:schemeClr val="tx1"/>
+                      </a:solidFill>
+                      <a:prstDash val="solid"/>
+                      <a:round/>
+                      <a:headEnd type="none" w="med" len="med"/>
+                      <a:tailEnd type="none" w="med" len="med"/>
+                    </a:lnB>
+                    <a:lnTlToBr w="12700" cmpd="sng">
+                      <a:noFill/>
+                      <a:prstDash val="solid"/>
+                    </a:lnTlToBr>
+                    <a:lnBlToTr w="12700" cmpd="sng">
+                      <a:noFill/>
+                      <a:prstDash val="solid"/>
+                    </a:lnBlToTr>
+                    <a:solidFill>
+                      <a:schemeClr val="bg1"/>
+                    </a:solidFill>
+                  </a:tcPr>
+                </a:tc>
+                <a:tc>
+                  <a:txBody>
+                    <a:bodyPr/>
+                    <a:lstStyle/>
+                    <a:p>
+                      <a:pPr algn="ctr" latinLnBrk="1"/>
+                      <a:r>
+                        <a:rPr lang="ko-KR" altLang="en-US" dirty="0">
+                          <a:solidFill>
+                            <a:schemeClr val="tx1"/>
+                          </a:solidFill>
+                        </a:rPr>
+                        <a:t>경기</a:t>
+                      </a:r>
+                    </a:p>
+                  </a:txBody>
+                  <a:tcPr>
+                    <a:lnL w="12700" cmpd="sng">
+                      <a:noFill/>
+                    </a:lnL>
+                    <a:lnR w="12700" cmpd="sng">
+                      <a:noFill/>
+                    </a:lnR>
+                    <a:lnT w="28575" cap="flat" cmpd="sng" algn="ctr">
+                      <a:solidFill>
+                        <a:schemeClr val="tx1"/>
+                      </a:solidFill>
+                      <a:prstDash val="solid"/>
+                      <a:round/>
+                      <a:headEnd type="none" w="med" len="med"/>
+                      <a:tailEnd type="none" w="med" len="med"/>
+                    </a:lnT>
+                    <a:lnB w="12700" cap="flat" cmpd="sng" algn="ctr">
+                      <a:solidFill>
+                        <a:schemeClr val="tx1"/>
+                      </a:solidFill>
+                      <a:prstDash val="solid"/>
+                      <a:round/>
+                      <a:headEnd type="none" w="med" len="med"/>
+                      <a:tailEnd type="none" w="med" len="med"/>
+                    </a:lnB>
+                    <a:lnTlToBr w="12700" cmpd="sng">
+                      <a:noFill/>
+                      <a:prstDash val="solid"/>
+                    </a:lnTlToBr>
+                    <a:lnBlToTr w="12700" cmpd="sng">
+                      <a:noFill/>
+                      <a:prstDash val="solid"/>
+                    </a:lnBlToTr>
+                    <a:solidFill>
+                      <a:schemeClr val="bg1"/>
+                    </a:solidFill>
+                  </a:tcPr>
+                </a:tc>
+                <a:tc>
+                  <a:txBody>
+                    <a:bodyPr/>
+                    <a:lstStyle/>
+                    <a:p>
+                      <a:pPr algn="ctr" latinLnBrk="1"/>
+                      <a:r>
+                        <a:rPr lang="ko-KR" altLang="en-US" dirty="0">
+                          <a:solidFill>
+                            <a:schemeClr val="tx1"/>
+                          </a:solidFill>
+                        </a:rPr>
+                        <a:t>팀</a:t>
+                      </a:r>
+                    </a:p>
+                  </a:txBody>
+                  <a:tcPr>
+                    <a:lnL w="12700" cmpd="sng">
+                      <a:noFill/>
+                    </a:lnL>
+                    <a:lnR w="12700" cmpd="sng">
+                      <a:noFill/>
+                    </a:lnR>
+                    <a:lnT w="28575" cap="flat" cmpd="sng" algn="ctr">
+                      <a:solidFill>
+                        <a:schemeClr val="tx1"/>
+                      </a:solidFill>
+                      <a:prstDash val="solid"/>
+                      <a:round/>
+                      <a:headEnd type="none" w="med" len="med"/>
+                      <a:tailEnd type="none" w="med" len="med"/>
+                    </a:lnT>
+                    <a:lnB w="12700" cap="flat" cmpd="sng" algn="ctr">
+                      <a:solidFill>
+                        <a:schemeClr val="tx1"/>
+                      </a:solidFill>
+                      <a:prstDash val="solid"/>
+                      <a:round/>
+                      <a:headEnd type="none" w="med" len="med"/>
+                      <a:tailEnd type="none" w="med" len="med"/>
+                    </a:lnB>
+                    <a:lnTlToBr w="12700" cmpd="sng">
+                      <a:noFill/>
+                      <a:prstDash val="solid"/>
+                    </a:lnTlToBr>
+                    <a:lnBlToTr w="12700" cmpd="sng">
+                      <a:noFill/>
+                      <a:prstDash val="solid"/>
+                    </a:lnBlToTr>
+                    <a:solidFill>
+                      <a:schemeClr val="bg1"/>
+                    </a:solidFill>
+                  </a:tcPr>
+                </a:tc>
+                <a:extLst>
+                  <a:ext uri="{0D108BD9-81ED-4DB2-BD59-A6C34878D82A}">
+                    <a16:rowId xmlns:a16="http://schemas.microsoft.com/office/drawing/2014/main" val="1717067144"/>
+                  </a:ext>
+                </a:extLst>
+              </a:tr>
+              <a:tr h="415925">
+                <a:tc>
+                  <a:txBody>
+                    <a:bodyPr/>
+                    <a:lstStyle/>
+                    <a:p>
+                      <a:pPr algn="ctr" latinLnBrk="1"/>
+                      <a:r>
+                        <a:rPr lang="en-US" altLang="ko-KR" b="1" dirty="0"/>
+                        <a:t>21-22</a:t>
+                      </a:r>
+                      <a:endParaRPr lang="ko-KR" altLang="en-US" b="1" dirty="0"/>
+                    </a:p>
+                  </a:txBody>
+                  <a:tcPr>
+                    <a:lnL w="12700" cmpd="sng">
+                      <a:noFill/>
+                    </a:lnL>
+                    <a:lnR w="12700" cmpd="sng">
+                      <a:noFill/>
+                    </a:lnR>
+                    <a:lnT w="12700" cap="flat" cmpd="sng" algn="ctr">
+                      <a:solidFill>
+                        <a:schemeClr val="tx1"/>
+                      </a:solidFill>
+                      <a:prstDash val="solid"/>
+                      <a:round/>
+                      <a:headEnd type="none" w="med" len="med"/>
+                      <a:tailEnd type="none" w="med" len="med"/>
+                    </a:lnT>
+                    <a:lnB w="12700" cap="flat" cmpd="sng" algn="ctr">
+                      <a:solidFill>
+                        <a:schemeClr val="tx1"/>
+                      </a:solidFill>
+                      <a:prstDash val="solid"/>
+                      <a:round/>
+                      <a:headEnd type="none" w="med" len="med"/>
+                      <a:tailEnd type="none" w="med" len="med"/>
+                    </a:lnB>
+                    <a:lnTlToBr w="12700" cmpd="sng">
+                      <a:noFill/>
+                      <a:prstDash val="solid"/>
+                    </a:lnTlToBr>
+                    <a:lnBlToTr w="12700" cmpd="sng">
+                      <a:noFill/>
+                      <a:prstDash val="solid"/>
+                    </a:lnBlToTr>
+                    <a:solidFill>
+                      <a:schemeClr val="bg1"/>
+                    </a:solidFill>
+                  </a:tcPr>
+                </a:tc>
+                <a:tc>
+                  <a:txBody>
+                    <a:bodyPr/>
+                    <a:lstStyle/>
+                    <a:p>
+                      <a:pPr algn="ctr" latinLnBrk="1"/>
+                      <a:r>
+                        <a:rPr lang="en-US" altLang="ko-KR" dirty="0"/>
+                        <a:t>270</a:t>
+                      </a:r>
+                      <a:endParaRPr lang="ko-KR" altLang="en-US" dirty="0"/>
+                    </a:p>
+                  </a:txBody>
+                  <a:tcPr>
+                    <a:lnL w="12700" cmpd="sng">
+                      <a:noFill/>
+                    </a:lnL>
+                    <a:lnR w="12700" cmpd="sng">
+                      <a:noFill/>
+                    </a:lnR>
+                    <a:lnT w="12700" cap="flat" cmpd="sng" algn="ctr">
+                      <a:solidFill>
+                        <a:schemeClr val="tx1"/>
+                      </a:solidFill>
+                      <a:prstDash val="solid"/>
+                      <a:round/>
+                      <a:headEnd type="none" w="med" len="med"/>
+                      <a:tailEnd type="none" w="med" len="med"/>
+                    </a:lnT>
+                    <a:lnB w="12700" cap="flat" cmpd="sng" algn="ctr">
+                      <a:solidFill>
+                        <a:schemeClr val="tx1"/>
+                      </a:solidFill>
+                      <a:prstDash val="solid"/>
+                      <a:round/>
+                      <a:headEnd type="none" w="med" len="med"/>
+                      <a:tailEnd type="none" w="med" len="med"/>
+                    </a:lnB>
+                    <a:lnTlToBr w="12700" cmpd="sng">
+                      <a:noFill/>
+                      <a:prstDash val="solid"/>
+                    </a:lnTlToBr>
+                    <a:lnBlToTr w="12700" cmpd="sng">
+                      <a:noFill/>
+                      <a:prstDash val="solid"/>
+                    </a:lnBlToTr>
+                    <a:solidFill>
+                      <a:schemeClr val="bg1"/>
+                    </a:solidFill>
+                  </a:tcPr>
+                </a:tc>
+                <a:tc>
+                  <a:txBody>
+                    <a:bodyPr/>
+                    <a:lstStyle/>
+                    <a:p>
+                      <a:pPr algn="ctr" latinLnBrk="1"/>
+                      <a:r>
+                        <a:rPr lang="en-US" altLang="ko-KR" dirty="0"/>
+                        <a:t>10</a:t>
+                      </a:r>
+                      <a:endParaRPr lang="ko-KR" altLang="en-US" dirty="0"/>
+                    </a:p>
+                  </a:txBody>
+                  <a:tcPr>
+                    <a:lnL w="12700" cmpd="sng">
+                      <a:noFill/>
+                    </a:lnL>
+                    <a:lnR w="12700" cmpd="sng">
+                      <a:noFill/>
+                    </a:lnR>
+                    <a:lnT w="12700" cap="flat" cmpd="sng" algn="ctr">
+                      <a:solidFill>
+                        <a:schemeClr val="tx1"/>
+                      </a:solidFill>
+                      <a:prstDash val="solid"/>
+                      <a:round/>
+                      <a:headEnd type="none" w="med" len="med"/>
+                      <a:tailEnd type="none" w="med" len="med"/>
+                    </a:lnT>
+                    <a:lnB w="12700" cap="flat" cmpd="sng" algn="ctr">
+                      <a:solidFill>
+                        <a:schemeClr val="tx1"/>
+                      </a:solidFill>
+                      <a:prstDash val="solid"/>
+                      <a:round/>
+                      <a:headEnd type="none" w="med" len="med"/>
+                      <a:tailEnd type="none" w="med" len="med"/>
+                    </a:lnB>
+                    <a:lnTlToBr w="12700" cmpd="sng">
+                      <a:noFill/>
+                      <a:prstDash val="solid"/>
+                    </a:lnTlToBr>
+                    <a:lnBlToTr w="12700" cmpd="sng">
+                      <a:noFill/>
+                      <a:prstDash val="solid"/>
+                    </a:lnBlToTr>
+                    <a:solidFill>
+                      <a:schemeClr val="bg1"/>
+                    </a:solidFill>
+                  </a:tcPr>
+                </a:tc>
+                <a:extLst>
+                  <a:ext uri="{0D108BD9-81ED-4DB2-BD59-A6C34878D82A}">
+                    <a16:rowId xmlns:a16="http://schemas.microsoft.com/office/drawing/2014/main" val="3978943340"/>
+                  </a:ext>
+                </a:extLst>
+              </a:tr>
+              <a:tr h="415925">
+                <a:tc>
+                  <a:txBody>
+                    <a:bodyPr/>
+                    <a:lstStyle/>
+                    <a:p>
+                      <a:pPr algn="ctr" latinLnBrk="1"/>
+                      <a:r>
+                        <a:rPr lang="en-US" altLang="ko-KR" b="1" dirty="0"/>
+                        <a:t>22-23</a:t>
+                      </a:r>
+                      <a:endParaRPr lang="ko-KR" altLang="en-US" b="1" dirty="0"/>
+                    </a:p>
+                  </a:txBody>
+                  <a:tcPr>
+                    <a:lnL w="12700" cmpd="sng">
+                      <a:noFill/>
+                    </a:lnL>
+                    <a:lnR w="12700" cmpd="sng">
+                      <a:noFill/>
+                    </a:lnR>
+                    <a:lnT w="12700" cap="flat" cmpd="sng" algn="ctr">
+                      <a:solidFill>
+                        <a:schemeClr val="tx1"/>
+                      </a:solidFill>
+                      <a:prstDash val="solid"/>
+                      <a:round/>
+                      <a:headEnd type="none" w="med" len="med"/>
+                      <a:tailEnd type="none" w="med" len="med"/>
+                    </a:lnT>
+                    <a:lnB w="12700" cap="flat" cmpd="sng" algn="ctr">
+                      <a:solidFill>
+                        <a:schemeClr val="tx1"/>
+                      </a:solidFill>
+                      <a:prstDash val="solid"/>
+                      <a:round/>
+                      <a:headEnd type="none" w="med" len="med"/>
+                      <a:tailEnd type="none" w="med" len="med"/>
+                    </a:lnB>
+                    <a:lnTlToBr w="12700" cmpd="sng">
+                      <a:noFill/>
+                      <a:prstDash val="solid"/>
+                    </a:lnTlToBr>
+                    <a:lnBlToTr w="12700" cmpd="sng">
+                      <a:noFill/>
+                      <a:prstDash val="solid"/>
+                    </a:lnBlToTr>
+                    <a:solidFill>
+                      <a:schemeClr val="bg1"/>
+                    </a:solidFill>
+                  </a:tcPr>
+                </a:tc>
+                <a:tc>
+                  <a:txBody>
+                    <a:bodyPr/>
+                    <a:lstStyle/>
+                    <a:p>
+                      <a:pPr algn="ctr" latinLnBrk="1"/>
+                      <a:r>
+                        <a:rPr lang="en-US" altLang="ko-KR" dirty="0"/>
+                        <a:t>270</a:t>
+                      </a:r>
+                      <a:endParaRPr lang="ko-KR" altLang="en-US" dirty="0"/>
+                    </a:p>
+                  </a:txBody>
+                  <a:tcPr>
+                    <a:lnL w="12700" cmpd="sng">
+                      <a:noFill/>
+                    </a:lnL>
+                    <a:lnR w="12700" cmpd="sng">
+                      <a:noFill/>
+                    </a:lnR>
+                    <a:lnT w="12700" cap="flat" cmpd="sng" algn="ctr">
+                      <a:solidFill>
+                        <a:schemeClr val="tx1"/>
+                      </a:solidFill>
+                      <a:prstDash val="solid"/>
+                      <a:round/>
+                      <a:headEnd type="none" w="med" len="med"/>
+                      <a:tailEnd type="none" w="med" len="med"/>
+                    </a:lnT>
+                    <a:lnB w="12700" cap="flat" cmpd="sng" algn="ctr">
+                      <a:solidFill>
+                        <a:schemeClr val="tx1"/>
+                      </a:solidFill>
+                      <a:prstDash val="solid"/>
+                      <a:round/>
+                      <a:headEnd type="none" w="med" len="med"/>
+                      <a:tailEnd type="none" w="med" len="med"/>
+                    </a:lnB>
+                    <a:lnTlToBr w="12700" cmpd="sng">
+                      <a:noFill/>
+                      <a:prstDash val="solid"/>
+                    </a:lnTlToBr>
+                    <a:lnBlToTr w="12700" cmpd="sng">
+                      <a:noFill/>
+                      <a:prstDash val="solid"/>
+                    </a:lnBlToTr>
+                    <a:solidFill>
+                      <a:schemeClr val="bg1"/>
+                    </a:solidFill>
+                  </a:tcPr>
+                </a:tc>
+                <a:tc>
+                  <a:txBody>
+                    <a:bodyPr/>
+                    <a:lstStyle/>
+                    <a:p>
+                      <a:pPr algn="ctr" latinLnBrk="1"/>
+                      <a:r>
+                        <a:rPr lang="en-US" altLang="ko-KR" dirty="0"/>
+                        <a:t>10</a:t>
+                      </a:r>
+                      <a:endParaRPr lang="ko-KR" altLang="en-US" dirty="0"/>
+                    </a:p>
+                  </a:txBody>
+                  <a:tcPr>
+                    <a:lnL w="12700" cmpd="sng">
+                      <a:noFill/>
+                    </a:lnL>
+                    <a:lnR w="12700" cmpd="sng">
+                      <a:noFill/>
+                    </a:lnR>
+                    <a:lnT w="12700" cap="flat" cmpd="sng" algn="ctr">
+                      <a:solidFill>
+                        <a:schemeClr val="tx1"/>
+                      </a:solidFill>
+                      <a:prstDash val="solid"/>
+                      <a:round/>
+                      <a:headEnd type="none" w="med" len="med"/>
+                      <a:tailEnd type="none" w="med" len="med"/>
+                    </a:lnT>
+                    <a:lnB w="12700" cap="flat" cmpd="sng" algn="ctr">
+                      <a:solidFill>
+                        <a:schemeClr val="tx1"/>
+                      </a:solidFill>
+                      <a:prstDash val="solid"/>
+                      <a:round/>
+                      <a:headEnd type="none" w="med" len="med"/>
+                      <a:tailEnd type="none" w="med" len="med"/>
+                    </a:lnB>
+                    <a:lnTlToBr w="12700" cmpd="sng">
+                      <a:noFill/>
+                      <a:prstDash val="solid"/>
+                    </a:lnTlToBr>
+                    <a:lnBlToTr w="12700" cmpd="sng">
+                      <a:noFill/>
+                      <a:prstDash val="solid"/>
+                    </a:lnBlToTr>
+                    <a:solidFill>
+                      <a:schemeClr val="bg1"/>
+                    </a:solidFill>
+                  </a:tcPr>
+                </a:tc>
+                <a:extLst>
+                  <a:ext uri="{0D108BD9-81ED-4DB2-BD59-A6C34878D82A}">
+                    <a16:rowId xmlns:a16="http://schemas.microsoft.com/office/drawing/2014/main" val="4119509222"/>
+                  </a:ext>
+                </a:extLst>
+              </a:tr>
+              <a:tr h="415925">
+                <a:tc>
+                  <a:txBody>
+                    <a:bodyPr/>
+                    <a:lstStyle/>
+                    <a:p>
+                      <a:pPr algn="ctr" latinLnBrk="1"/>
+                      <a:r>
+                        <a:rPr lang="en-US" altLang="ko-KR" b="1" dirty="0"/>
+                        <a:t>23-24</a:t>
+                      </a:r>
+                      <a:endParaRPr lang="ko-KR" altLang="en-US" b="1" dirty="0"/>
+                    </a:p>
+                  </a:txBody>
+                  <a:tcPr>
+                    <a:lnL w="12700" cmpd="sng">
+                      <a:noFill/>
+                    </a:lnL>
+                    <a:lnR w="12700" cmpd="sng">
+                      <a:noFill/>
+                    </a:lnR>
+                    <a:lnT w="12700" cap="flat" cmpd="sng" algn="ctr">
+                      <a:solidFill>
+                        <a:schemeClr val="tx1"/>
+                      </a:solidFill>
+                      <a:prstDash val="solid"/>
+                      <a:round/>
+                      <a:headEnd type="none" w="med" len="med"/>
+                      <a:tailEnd type="none" w="med" len="med"/>
+                    </a:lnT>
+                    <a:lnB w="12700" cap="flat" cmpd="sng" algn="ctr">
+                      <a:solidFill>
+                        <a:schemeClr val="tx1"/>
+                      </a:solidFill>
+                      <a:prstDash val="solid"/>
+                      <a:round/>
+                      <a:headEnd type="none" w="med" len="med"/>
+                      <a:tailEnd type="none" w="med" len="med"/>
+                    </a:lnB>
+                    <a:lnTlToBr w="12700" cmpd="sng">
+                      <a:noFill/>
+                      <a:prstDash val="solid"/>
+                    </a:lnTlToBr>
+                    <a:lnBlToTr w="12700" cmpd="sng">
+                      <a:noFill/>
+                      <a:prstDash val="solid"/>
+                    </a:lnBlToTr>
+                    <a:solidFill>
+                      <a:schemeClr val="bg1"/>
+                    </a:solidFill>
+                  </a:tcPr>
+                </a:tc>
+                <a:tc>
+                  <a:txBody>
+                    <a:bodyPr/>
+                    <a:lstStyle/>
+                    <a:p>
+                      <a:pPr algn="ctr" latinLnBrk="1"/>
+                      <a:r>
+                        <a:rPr lang="en-US" altLang="ko-KR" dirty="0"/>
+                        <a:t>270</a:t>
+                      </a:r>
+                      <a:endParaRPr lang="ko-KR" altLang="en-US" dirty="0"/>
+                    </a:p>
+                  </a:txBody>
+                  <a:tcPr>
+                    <a:lnL w="12700" cmpd="sng">
+                      <a:noFill/>
+                    </a:lnL>
+                    <a:lnR w="12700" cmpd="sng">
+                      <a:noFill/>
+                    </a:lnR>
+                    <a:lnT w="12700" cap="flat" cmpd="sng" algn="ctr">
+                      <a:solidFill>
+                        <a:schemeClr val="tx1"/>
+                      </a:solidFill>
+                      <a:prstDash val="solid"/>
+                      <a:round/>
+                      <a:headEnd type="none" w="med" len="med"/>
+                      <a:tailEnd type="none" w="med" len="med"/>
+                    </a:lnT>
+                    <a:lnB w="12700" cap="flat" cmpd="sng" algn="ctr">
+                      <a:solidFill>
+                        <a:schemeClr val="tx1"/>
+                      </a:solidFill>
+                      <a:prstDash val="solid"/>
+                      <a:round/>
+                      <a:headEnd type="none" w="med" len="med"/>
+                      <a:tailEnd type="none" w="med" len="med"/>
+                    </a:lnB>
+                    <a:lnTlToBr w="12700" cmpd="sng">
+                      <a:noFill/>
+                      <a:prstDash val="solid"/>
+                    </a:lnTlToBr>
+                    <a:lnBlToTr w="12700" cmpd="sng">
+                      <a:noFill/>
+                      <a:prstDash val="solid"/>
+                    </a:lnBlToTr>
+                    <a:solidFill>
+                      <a:schemeClr val="bg1"/>
+                    </a:solidFill>
+                  </a:tcPr>
+                </a:tc>
+                <a:tc>
+                  <a:txBody>
+                    <a:bodyPr/>
+                    <a:lstStyle/>
+                    <a:p>
+                      <a:pPr algn="ctr" latinLnBrk="1"/>
+                      <a:r>
+                        <a:rPr lang="en-US" altLang="ko-KR" dirty="0"/>
+                        <a:t>10</a:t>
+                      </a:r>
+                      <a:endParaRPr lang="ko-KR" altLang="en-US" dirty="0"/>
+                    </a:p>
+                  </a:txBody>
+                  <a:tcPr>
+                    <a:lnL w="12700" cmpd="sng">
+                      <a:noFill/>
+                    </a:lnL>
+                    <a:lnR w="12700" cmpd="sng">
+                      <a:noFill/>
+                    </a:lnR>
+                    <a:lnT w="12700" cap="flat" cmpd="sng" algn="ctr">
+                      <a:solidFill>
+                        <a:schemeClr val="tx1"/>
+                      </a:solidFill>
+                      <a:prstDash val="solid"/>
+                      <a:round/>
+                      <a:headEnd type="none" w="med" len="med"/>
+                      <a:tailEnd type="none" w="med" len="med"/>
+                    </a:lnT>
+                    <a:lnB w="12700" cap="flat" cmpd="sng" algn="ctr">
+                      <a:solidFill>
+                        <a:schemeClr val="tx1"/>
+                      </a:solidFill>
+                      <a:prstDash val="solid"/>
+                      <a:round/>
+                      <a:headEnd type="none" w="med" len="med"/>
+                      <a:tailEnd type="none" w="med" len="med"/>
+                    </a:lnB>
+                    <a:lnTlToBr w="12700" cmpd="sng">
+                      <a:noFill/>
+                      <a:prstDash val="solid"/>
+                    </a:lnTlToBr>
+                    <a:lnBlToTr w="12700" cmpd="sng">
+                      <a:noFill/>
+                      <a:prstDash val="solid"/>
+                    </a:lnBlToTr>
+                    <a:solidFill>
+                      <a:schemeClr val="bg1"/>
+                    </a:solidFill>
+                  </a:tcPr>
+                </a:tc>
+                <a:extLst>
+                  <a:ext uri="{0D108BD9-81ED-4DB2-BD59-A6C34878D82A}">
+                    <a16:rowId xmlns:a16="http://schemas.microsoft.com/office/drawing/2014/main" val="2820451505"/>
+                  </a:ext>
+                </a:extLst>
+              </a:tr>
+              <a:tr h="415925">
+                <a:tc>
+                  <a:txBody>
+                    <a:bodyPr/>
+                    <a:lstStyle/>
+                    <a:p>
+                      <a:pPr algn="ctr" latinLnBrk="1"/>
+                      <a:r>
+                        <a:rPr lang="en-US" altLang="ko-KR" b="1" dirty="0"/>
+                        <a:t>24-25</a:t>
+                      </a:r>
+                      <a:endParaRPr lang="ko-KR" altLang="en-US" b="1" dirty="0"/>
+                    </a:p>
+                  </a:txBody>
+                  <a:tcPr>
+                    <a:lnL w="12700" cmpd="sng">
+                      <a:noFill/>
+                    </a:lnL>
+                    <a:lnR w="12700" cmpd="sng">
+                      <a:noFill/>
+                    </a:lnR>
+                    <a:lnT w="12700" cap="flat" cmpd="sng" algn="ctr">
+                      <a:solidFill>
+                        <a:schemeClr val="tx1"/>
+                      </a:solidFill>
+                      <a:prstDash val="solid"/>
+                      <a:round/>
+                      <a:headEnd type="none" w="med" len="med"/>
+                      <a:tailEnd type="none" w="med" len="med"/>
+                    </a:lnT>
+                    <a:lnB w="12700" cap="flat" cmpd="sng" algn="ctr">
+                      <a:solidFill>
+                        <a:schemeClr val="tx1"/>
+                      </a:solidFill>
+                      <a:prstDash val="solid"/>
+                      <a:round/>
+                      <a:headEnd type="none" w="med" len="med"/>
+                      <a:tailEnd type="none" w="med" len="med"/>
+                    </a:lnB>
+                    <a:lnTlToBr w="12700" cmpd="sng">
+                      <a:noFill/>
+                      <a:prstDash val="solid"/>
+                    </a:lnTlToBr>
+                    <a:lnBlToTr w="12700" cmpd="sng">
+                      <a:noFill/>
+                      <a:prstDash val="solid"/>
+                    </a:lnBlToTr>
+                    <a:solidFill>
+                      <a:schemeClr val="bg1"/>
+                    </a:solidFill>
+                  </a:tcPr>
+                </a:tc>
+                <a:tc>
+                  <a:txBody>
+                    <a:bodyPr/>
+                    <a:lstStyle/>
+                    <a:p>
+                      <a:pPr algn="ctr" latinLnBrk="1"/>
+                      <a:r>
+                        <a:rPr lang="en-US" altLang="ko-KR" dirty="0"/>
+                        <a:t>270</a:t>
+                      </a:r>
+                      <a:endParaRPr lang="ko-KR" altLang="en-US" dirty="0"/>
+                    </a:p>
+                  </a:txBody>
+                  <a:tcPr>
+                    <a:lnL w="12700" cmpd="sng">
+                      <a:noFill/>
+                    </a:lnL>
+                    <a:lnR w="12700" cmpd="sng">
+                      <a:noFill/>
+                    </a:lnR>
+                    <a:lnT w="12700" cap="flat" cmpd="sng" algn="ctr">
+                      <a:solidFill>
+                        <a:schemeClr val="tx1"/>
+                      </a:solidFill>
+                      <a:prstDash val="solid"/>
+                      <a:round/>
+                      <a:headEnd type="none" w="med" len="med"/>
+                      <a:tailEnd type="none" w="med" len="med"/>
+                    </a:lnT>
+                    <a:lnB w="12700" cap="flat" cmpd="sng" algn="ctr">
+                      <a:solidFill>
+                        <a:schemeClr val="tx1"/>
+                      </a:solidFill>
+                      <a:prstDash val="solid"/>
+                      <a:round/>
+                      <a:headEnd type="none" w="med" len="med"/>
+                      <a:tailEnd type="none" w="med" len="med"/>
+                    </a:lnB>
+                    <a:lnTlToBr w="12700" cmpd="sng">
+                      <a:noFill/>
+                      <a:prstDash val="solid"/>
+                    </a:lnTlToBr>
+                    <a:lnBlToTr w="12700" cmpd="sng">
+                      <a:noFill/>
+                      <a:prstDash val="solid"/>
+                    </a:lnBlToTr>
+                    <a:solidFill>
+                      <a:schemeClr val="bg1"/>
+                    </a:solidFill>
+                  </a:tcPr>
+                </a:tc>
+                <a:tc>
+                  <a:txBody>
+                    <a:bodyPr/>
+                    <a:lstStyle/>
+                    <a:p>
+                      <a:pPr algn="ctr" latinLnBrk="1"/>
+                      <a:r>
+                        <a:rPr lang="en-US" altLang="ko-KR" dirty="0"/>
+                        <a:t>10</a:t>
+                      </a:r>
+                      <a:endParaRPr lang="ko-KR" altLang="en-US" dirty="0"/>
+                    </a:p>
+                  </a:txBody>
+                  <a:tcPr>
+                    <a:lnL w="12700" cmpd="sng">
+                      <a:noFill/>
+                    </a:lnL>
+                    <a:lnR w="12700" cmpd="sng">
+                      <a:noFill/>
+                    </a:lnR>
+                    <a:lnT w="12700" cap="flat" cmpd="sng" algn="ctr">
+                      <a:solidFill>
+                        <a:schemeClr val="tx1"/>
+                      </a:solidFill>
+                      <a:prstDash val="solid"/>
+                      <a:round/>
+                      <a:headEnd type="none" w="med" len="med"/>
+                      <a:tailEnd type="none" w="med" len="med"/>
+                    </a:lnT>
+                    <a:lnB w="12700" cap="flat" cmpd="sng" algn="ctr">
+                      <a:solidFill>
+                        <a:schemeClr val="tx1"/>
+                      </a:solidFill>
+                      <a:prstDash val="solid"/>
+                      <a:round/>
+                      <a:headEnd type="none" w="med" len="med"/>
+                      <a:tailEnd type="none" w="med" len="med"/>
+                    </a:lnB>
+                    <a:lnTlToBr w="12700" cmpd="sng">
+                      <a:noFill/>
+                      <a:prstDash val="solid"/>
+                    </a:lnTlToBr>
+                    <a:lnBlToTr w="12700" cmpd="sng">
+                      <a:noFill/>
+                      <a:prstDash val="solid"/>
+                    </a:lnBlToTr>
+                    <a:solidFill>
+                      <a:schemeClr val="bg1"/>
+                    </a:solidFill>
+                  </a:tcPr>
+                </a:tc>
+                <a:extLst>
+                  <a:ext uri="{0D108BD9-81ED-4DB2-BD59-A6C34878D82A}">
+                    <a16:rowId xmlns:a16="http://schemas.microsoft.com/office/drawing/2014/main" val="2909078307"/>
+                  </a:ext>
+                </a:extLst>
+              </a:tr>
+              <a:tr h="415925">
+                <a:tc>
+                  <a:txBody>
+                    <a:bodyPr/>
+                    <a:lstStyle/>
+                    <a:p>
+                      <a:pPr algn="ctr" latinLnBrk="1"/>
+                      <a:r>
+                        <a:rPr lang="ko-KR" altLang="en-US" b="1" dirty="0"/>
+                        <a:t>합계</a:t>
+                      </a:r>
+                    </a:p>
+                  </a:txBody>
+                  <a:tcPr>
+                    <a:lnL w="12700" cmpd="sng">
+                      <a:noFill/>
+                    </a:lnL>
+                    <a:lnR w="12700" cmpd="sng">
+                      <a:noFill/>
+                    </a:lnR>
+                    <a:lnT w="12700" cap="flat" cmpd="sng" algn="ctr">
+                      <a:solidFill>
+                        <a:schemeClr val="tx1"/>
+                      </a:solidFill>
+                      <a:prstDash val="solid"/>
+                      <a:round/>
+                      <a:headEnd type="none" w="med" len="med"/>
+                      <a:tailEnd type="none" w="med" len="med"/>
+                    </a:lnT>
+                    <a:lnB w="28575" cap="flat" cmpd="sng" algn="ctr">
+                      <a:solidFill>
+                        <a:schemeClr val="tx1"/>
+                      </a:solidFill>
+                      <a:prstDash val="solid"/>
+                      <a:round/>
+                      <a:headEnd type="none" w="med" len="med"/>
+                      <a:tailEnd type="none" w="med" len="med"/>
+                    </a:lnB>
+                    <a:lnTlToBr w="12700" cmpd="sng">
+                      <a:noFill/>
+                      <a:prstDash val="solid"/>
+                    </a:lnTlToBr>
+                    <a:lnBlToTr w="12700" cmpd="sng">
+                      <a:noFill/>
+                      <a:prstDash val="solid"/>
+                    </a:lnBlToTr>
+                    <a:solidFill>
+                      <a:schemeClr val="bg1"/>
+                    </a:solidFill>
+                  </a:tcPr>
+                </a:tc>
+                <a:tc>
+                  <a:txBody>
+                    <a:bodyPr/>
+                    <a:lstStyle/>
+                    <a:p>
+                      <a:pPr algn="ctr" latinLnBrk="1"/>
+                      <a:r>
+                        <a:rPr lang="en-US" altLang="ko-KR" dirty="0"/>
+                        <a:t>1080</a:t>
+                      </a:r>
+                      <a:endParaRPr lang="ko-KR" altLang="en-US" dirty="0"/>
+                    </a:p>
+                  </a:txBody>
+                  <a:tcPr>
+                    <a:lnL w="12700" cmpd="sng">
+                      <a:noFill/>
+                    </a:lnL>
+                    <a:lnR w="12700" cmpd="sng">
+                      <a:noFill/>
+                    </a:lnR>
+                    <a:lnT w="12700" cap="flat" cmpd="sng" algn="ctr">
+                      <a:solidFill>
+                        <a:schemeClr val="tx1"/>
+                      </a:solidFill>
+                      <a:prstDash val="solid"/>
+                      <a:round/>
+                      <a:headEnd type="none" w="med" len="med"/>
+                      <a:tailEnd type="none" w="med" len="med"/>
+                    </a:lnT>
+                    <a:lnB w="28575" cap="flat" cmpd="sng" algn="ctr">
+                      <a:solidFill>
+                        <a:schemeClr val="tx1"/>
+                      </a:solidFill>
+                      <a:prstDash val="solid"/>
+                      <a:round/>
+                      <a:headEnd type="none" w="med" len="med"/>
+                      <a:tailEnd type="none" w="med" len="med"/>
+                    </a:lnB>
+                    <a:lnTlToBr w="12700" cmpd="sng">
+                      <a:noFill/>
+                      <a:prstDash val="solid"/>
+                    </a:lnTlToBr>
+                    <a:lnBlToTr w="12700" cmpd="sng">
+                      <a:noFill/>
+                      <a:prstDash val="solid"/>
+                    </a:lnBlToTr>
+                    <a:solidFill>
+                      <a:schemeClr val="bg1"/>
+                    </a:solidFill>
+                  </a:tcPr>
+                </a:tc>
+                <a:tc>
+                  <a:txBody>
+                    <a:bodyPr/>
+                    <a:lstStyle/>
+                    <a:p>
+                      <a:pPr algn="ctr" latinLnBrk="1"/>
+                      <a:r>
+                        <a:rPr lang="en-US" altLang="ko-KR" dirty="0"/>
+                        <a:t>10</a:t>
+                      </a:r>
+                      <a:endParaRPr lang="ko-KR" altLang="en-US" dirty="0"/>
+                    </a:p>
+                  </a:txBody>
+                  <a:tcPr>
+                    <a:lnL w="12700" cmpd="sng">
+                      <a:noFill/>
+                    </a:lnL>
+                    <a:lnR w="12700" cmpd="sng">
+                      <a:noFill/>
+                    </a:lnR>
+                    <a:lnT w="12700" cap="flat" cmpd="sng" algn="ctr">
+                      <a:solidFill>
+                        <a:schemeClr val="tx1"/>
+                      </a:solidFill>
+                      <a:prstDash val="solid"/>
+                      <a:round/>
+                      <a:headEnd type="none" w="med" len="med"/>
+                      <a:tailEnd type="none" w="med" len="med"/>
+                    </a:lnT>
+                    <a:lnB w="28575" cap="flat" cmpd="sng" algn="ctr">
+                      <a:solidFill>
+                        <a:schemeClr val="tx1"/>
+                      </a:solidFill>
+                      <a:prstDash val="solid"/>
+                      <a:round/>
+                      <a:headEnd type="none" w="med" len="med"/>
+                      <a:tailEnd type="none" w="med" len="med"/>
+                    </a:lnB>
+                    <a:lnTlToBr w="12700" cmpd="sng">
+                      <a:noFill/>
+                      <a:prstDash val="solid"/>
+                    </a:lnTlToBr>
+                    <a:lnBlToTr w="12700" cmpd="sng">
+                      <a:noFill/>
+                      <a:prstDash val="solid"/>
+                    </a:lnBlToTr>
+                    <a:solidFill>
+                      <a:schemeClr val="bg1"/>
+                    </a:solidFill>
+                  </a:tcPr>
+                </a:tc>
+                <a:extLst>
+                  <a:ext uri="{0D108BD9-81ED-4DB2-BD59-A6C34878D82A}">
+                    <a16:rowId xmlns:a16="http://schemas.microsoft.com/office/drawing/2014/main" val="1335086954"/>
+                  </a:ext>
+                </a:extLst>
+              </a:tr>
+            </a:tbl>
+          </a:graphicData>
+        </a:graphic>
+      </p:graphicFrame>
+    </p:spTree>
+    <p:extLst>
+      <p:ext uri="{BB962C8B-B14F-4D97-AF65-F5344CB8AC3E}">
+        <p14:creationId xmlns:p14="http://schemas.microsoft.com/office/powerpoint/2010/main" val="554216528"/>
+      </p:ext>
+    </p:extLst>
+  </p:cSld>
+  <p:clrMapOvr>
+    <a:masterClrMapping/>
+  </p:clrMapOvr>
+</p:sld>
+</file>
+
+<file path=ppt/slides/slide18.xml><?xml version="1.0" encoding="utf-8"?>
+<p:sld xmlns:a="http://schemas.openxmlformats.org/drawingml/2006/main" xmlns:r="http://schemas.openxmlformats.org/officeDocument/2006/relationships" xmlns:p="http://schemas.openxmlformats.org/presentationml/2006/main">
+  <p:cSld>
+    <p:spTree>
+      <p:nvGrpSpPr>
+        <p:cNvPr id="1" name=""/>
+        <p:cNvGrpSpPr/>
+        <p:nvPr/>
+      </p:nvGrpSpPr>
+      <p:grpSpPr>
+        <a:xfrm>
+          <a:off x="0" y="0"/>
+          <a:ext cx="0" cy="0"/>
+          <a:chOff x="0" y="0"/>
+          <a:chExt cx="0" cy="0"/>
+        </a:xfrm>
+      </p:grpSpPr>
+      <p:sp>
+        <p:nvSpPr>
+          <p:cNvPr id="2" name="제목 1">
+            <a:extLst>
+              <a:ext uri="{FF2B5EF4-FFF2-40B4-BE49-F238E27FC236}">
+                <a16:creationId xmlns:a16="http://schemas.microsoft.com/office/drawing/2014/main" id="{11663755-CD50-8B9B-0838-270611CC1DD4}"/>
+              </a:ext>
+            </a:extLst>
+          </p:cNvPr>
+          <p:cNvSpPr>
+            <a:spLocks noGrp="1"/>
+          </p:cNvSpPr>
+          <p:nvPr>
+            <p:ph type="title"/>
+          </p:nvPr>
+        </p:nvSpPr>
+        <p:spPr>
+          <a:xfrm>
+            <a:off x="349758" y="0"/>
+            <a:ext cx="10954512" cy="795528"/>
+          </a:xfrm>
+        </p:spPr>
+        <p:txBody>
+          <a:bodyPr/>
+          <a:lstStyle/>
+          <a:p>
+            <a:endParaRPr lang="ko-KR" altLang="en-US" dirty="0"/>
+          </a:p>
+        </p:txBody>
+      </p:sp>
+      <p:graphicFrame>
+        <p:nvGraphicFramePr>
+          <p:cNvPr id="5" name="표 4">
+            <a:extLst>
+              <a:ext uri="{FF2B5EF4-FFF2-40B4-BE49-F238E27FC236}">
+                <a16:creationId xmlns:a16="http://schemas.microsoft.com/office/drawing/2014/main" id="{40B0A105-528E-3790-B4B2-BF90B378FDAF}"/>
+              </a:ext>
+            </a:extLst>
+          </p:cNvPr>
+          <p:cNvGraphicFramePr>
+            <a:graphicFrameLocks noGrp="1"/>
+          </p:cNvGraphicFramePr>
+          <p:nvPr>
+            <p:extLst>
+              <p:ext uri="{D42A27DB-BD31-4B8C-83A1-F6EECF244321}">
+                <p14:modId xmlns:p14="http://schemas.microsoft.com/office/powerpoint/2010/main" val="1998958389"/>
+              </p:ext>
+            </p:extLst>
+          </p:nvPr>
+        </p:nvGraphicFramePr>
+        <p:xfrm>
+          <a:off x="349758" y="122294"/>
+          <a:ext cx="5340352" cy="7315200"/>
+        </p:xfrm>
+        <a:graphic>
+          <a:graphicData uri="http://schemas.openxmlformats.org/drawingml/2006/table">
+            <a:tbl>
+              <a:tblPr firstRow="1" bandRow="1">
+                <a:tableStyleId>{5C22544A-7EE6-4342-B048-85BDC9FD1C3A}</a:tableStyleId>
+              </a:tblPr>
+              <a:tblGrid>
+                <a:gridCol w="1335088">
+                  <a:extLst>
+                    <a:ext uri="{9D8B030D-6E8A-4147-A177-3AD203B41FA5}">
+                      <a16:colId xmlns:a16="http://schemas.microsoft.com/office/drawing/2014/main" val="1763830344"/>
+                    </a:ext>
+                  </a:extLst>
+                </a:gridCol>
+                <a:gridCol w="1335088">
+                  <a:extLst>
+                    <a:ext uri="{9D8B030D-6E8A-4147-A177-3AD203B41FA5}">
+                      <a16:colId xmlns:a16="http://schemas.microsoft.com/office/drawing/2014/main" val="1767494672"/>
+                    </a:ext>
+                  </a:extLst>
+                </a:gridCol>
+                <a:gridCol w="1335088">
+                  <a:extLst>
+                    <a:ext uri="{9D8B030D-6E8A-4147-A177-3AD203B41FA5}">
+                      <a16:colId xmlns:a16="http://schemas.microsoft.com/office/drawing/2014/main" val="357478341"/>
+                    </a:ext>
+                  </a:extLst>
+                </a:gridCol>
+                <a:gridCol w="1335088">
+                  <a:extLst>
+                    <a:ext uri="{9D8B030D-6E8A-4147-A177-3AD203B41FA5}">
+                      <a16:colId xmlns:a16="http://schemas.microsoft.com/office/drawing/2014/main" val="189392360"/>
+                    </a:ext>
+                  </a:extLst>
+                </a:gridCol>
+              </a:tblGrid>
+              <a:tr h="0">
+                <a:tc>
+                  <a:txBody>
+                    <a:bodyPr/>
+                    <a:lstStyle/>
+                    <a:p>
+                      <a:pPr algn="ctr" latinLnBrk="1"/>
+                      <a:r>
+                        <a:rPr lang="en-US" altLang="ko-KR" dirty="0">
+                          <a:solidFill>
+                            <a:schemeClr val="tx1"/>
+                          </a:solidFill>
+                        </a:rPr>
+                        <a:t>NO.</a:t>
+                      </a:r>
+                      <a:endParaRPr lang="ko-KR" altLang="en-US" dirty="0">
+                        <a:solidFill>
+                          <a:schemeClr val="tx1"/>
+                        </a:solidFill>
+                      </a:endParaRPr>
+                    </a:p>
+                  </a:txBody>
+                  <a:tcPr>
+                    <a:lnL w="6350" cap="flat" cmpd="sng" algn="ctr">
+                      <a:noFill/>
+                      <a:prstDash val="solid"/>
+                      <a:round/>
+                      <a:headEnd type="none" w="med" len="med"/>
+                      <a:tailEnd type="none" w="med" len="med"/>
+                    </a:lnL>
+                    <a:lnR w="6350" cap="flat" cmpd="sng" algn="ctr">
+                      <a:noFill/>
+                      <a:prstDash val="solid"/>
+                      <a:round/>
+                      <a:headEnd type="none" w="med" len="med"/>
+                      <a:tailEnd type="none" w="med" len="med"/>
+                    </a:lnR>
+                    <a:lnT w="6350" cap="flat" cmpd="sng" algn="ctr">
+                      <a:solidFill>
+                        <a:schemeClr val="tx1"/>
+                      </a:solidFill>
+                      <a:prstDash val="solid"/>
+                      <a:round/>
+                      <a:headEnd type="none" w="med" len="med"/>
+                      <a:tailEnd type="none" w="med" len="med"/>
+                    </a:lnT>
+                    <a:lnB w="6350" cap="flat" cmpd="sng" algn="ctr">
+                      <a:solidFill>
+                        <a:schemeClr val="tx1"/>
+                      </a:solidFill>
+                      <a:prstDash val="solid"/>
+                      <a:round/>
+                      <a:headEnd type="none" w="med" len="med"/>
+                      <a:tailEnd type="none" w="med" len="med"/>
+                    </a:lnB>
+                    <a:lnTlToBr w="12700" cmpd="sng">
+                      <a:noFill/>
+                      <a:prstDash val="solid"/>
+                    </a:lnTlToBr>
+                    <a:lnBlToTr w="12700" cmpd="sng">
+                      <a:noFill/>
+                      <a:prstDash val="solid"/>
+                    </a:lnBlToTr>
+                    <a:solidFill>
+                      <a:schemeClr val="bg1"/>
+                    </a:solidFill>
+                  </a:tcPr>
+                </a:tc>
+                <a:tc>
+                  <a:txBody>
+                    <a:bodyPr/>
+                    <a:lstStyle/>
+                    <a:p>
+                      <a:pPr algn="ctr" latinLnBrk="1"/>
+                      <a:r>
+                        <a:rPr lang="ko-KR" altLang="en-US" dirty="0">
+                          <a:solidFill>
+                            <a:schemeClr val="tx1"/>
+                          </a:solidFill>
+                        </a:rPr>
+                        <a:t>변수</a:t>
+                      </a:r>
+                    </a:p>
+                  </a:txBody>
+                  <a:tcPr>
+                    <a:lnL w="6350" cap="flat" cmpd="sng" algn="ctr">
+                      <a:noFill/>
+                      <a:prstDash val="solid"/>
+                      <a:round/>
+                      <a:headEnd type="none" w="med" len="med"/>
+                      <a:tailEnd type="none" w="med" len="med"/>
+                    </a:lnL>
+                    <a:lnR w="6350" cap="flat" cmpd="sng" algn="ctr">
+                      <a:noFill/>
+                      <a:prstDash val="solid"/>
+                      <a:round/>
+                      <a:headEnd type="none" w="med" len="med"/>
+                      <a:tailEnd type="none" w="med" len="med"/>
+                    </a:lnR>
+                    <a:lnT w="6350" cap="flat" cmpd="sng" algn="ctr">
+                      <a:solidFill>
+                        <a:schemeClr val="tx1"/>
+                      </a:solidFill>
+                      <a:prstDash val="solid"/>
+                      <a:round/>
+                      <a:headEnd type="none" w="med" len="med"/>
+                      <a:tailEnd type="none" w="med" len="med"/>
+                    </a:lnT>
+                    <a:lnB w="6350" cap="flat" cmpd="sng" algn="ctr">
+                      <a:solidFill>
+                        <a:schemeClr val="tx1"/>
+                      </a:solidFill>
+                      <a:prstDash val="solid"/>
+                      <a:round/>
+                      <a:headEnd type="none" w="med" len="med"/>
+                      <a:tailEnd type="none" w="med" len="med"/>
+                    </a:lnB>
+                    <a:lnTlToBr w="12700" cmpd="sng">
+                      <a:noFill/>
+                      <a:prstDash val="solid"/>
+                    </a:lnTlToBr>
+                    <a:lnBlToTr w="12700" cmpd="sng">
+                      <a:noFill/>
+                      <a:prstDash val="solid"/>
+                    </a:lnBlToTr>
+                    <a:solidFill>
+                      <a:schemeClr val="bg1"/>
+                    </a:solidFill>
+                  </a:tcPr>
+                </a:tc>
+                <a:tc>
+                  <a:txBody>
+                    <a:bodyPr/>
+                    <a:lstStyle/>
+                    <a:p>
+                      <a:pPr algn="ctr" latinLnBrk="1"/>
+                      <a:r>
+                        <a:rPr lang="en-US" altLang="ko-KR" dirty="0">
+                          <a:solidFill>
+                            <a:schemeClr val="tx1"/>
+                          </a:solidFill>
+                        </a:rPr>
+                        <a:t>NO.</a:t>
+                      </a:r>
+                      <a:endParaRPr lang="ko-KR" altLang="en-US" dirty="0">
+                        <a:solidFill>
+                          <a:schemeClr val="tx1"/>
+                        </a:solidFill>
+                      </a:endParaRPr>
+                    </a:p>
+                  </a:txBody>
+                  <a:tcPr>
+                    <a:lnL w="6350" cap="flat" cmpd="sng" algn="ctr">
+                      <a:noFill/>
+                      <a:prstDash val="solid"/>
+                      <a:round/>
+                      <a:headEnd type="none" w="med" len="med"/>
+                      <a:tailEnd type="none" w="med" len="med"/>
+                    </a:lnL>
+                    <a:lnR w="6350" cap="flat" cmpd="sng" algn="ctr">
+                      <a:noFill/>
+                      <a:prstDash val="solid"/>
+                      <a:round/>
+                      <a:headEnd type="none" w="med" len="med"/>
+                      <a:tailEnd type="none" w="med" len="med"/>
+                    </a:lnR>
+                    <a:lnT w="6350" cap="flat" cmpd="sng" algn="ctr">
+                      <a:solidFill>
+                        <a:schemeClr val="tx1"/>
+                      </a:solidFill>
+                      <a:prstDash val="solid"/>
+                      <a:round/>
+                      <a:headEnd type="none" w="med" len="med"/>
+                      <a:tailEnd type="none" w="med" len="med"/>
+                    </a:lnT>
+                    <a:lnB w="6350" cap="flat" cmpd="sng" algn="ctr">
+                      <a:solidFill>
+                        <a:schemeClr val="tx1"/>
+                      </a:solidFill>
+                      <a:prstDash val="solid"/>
+                      <a:round/>
+                      <a:headEnd type="none" w="med" len="med"/>
+                      <a:tailEnd type="none" w="med" len="med"/>
+                    </a:lnB>
+                    <a:lnTlToBr w="12700" cmpd="sng">
+                      <a:noFill/>
+                      <a:prstDash val="solid"/>
+                    </a:lnTlToBr>
+                    <a:lnBlToTr w="12700" cmpd="sng">
+                      <a:noFill/>
+                      <a:prstDash val="solid"/>
+                    </a:lnBlToTr>
+                    <a:solidFill>
+                      <a:schemeClr val="bg1"/>
+                    </a:solidFill>
+                  </a:tcPr>
+                </a:tc>
+                <a:tc>
+                  <a:txBody>
+                    <a:bodyPr/>
+                    <a:lstStyle/>
+                    <a:p>
+                      <a:pPr algn="ctr" latinLnBrk="1"/>
+                      <a:r>
+                        <a:rPr lang="ko-KR" altLang="en-US" dirty="0">
+                          <a:solidFill>
+                            <a:schemeClr val="tx1"/>
+                          </a:solidFill>
+                        </a:rPr>
+                        <a:t>변수</a:t>
+                      </a:r>
+                    </a:p>
+                  </a:txBody>
+                  <a:tcPr>
+                    <a:lnL w="6350" cap="flat" cmpd="sng" algn="ctr">
+                      <a:noFill/>
+                      <a:prstDash val="solid"/>
+                      <a:round/>
+                      <a:headEnd type="none" w="med" len="med"/>
+                      <a:tailEnd type="none" w="med" len="med"/>
+                    </a:lnL>
+                    <a:lnR w="6350" cap="flat" cmpd="sng" algn="ctr">
+                      <a:noFill/>
+                      <a:prstDash val="solid"/>
+                      <a:round/>
+                      <a:headEnd type="none" w="med" len="med"/>
+                      <a:tailEnd type="none" w="med" len="med"/>
+                    </a:lnR>
+                    <a:lnT w="6350" cap="flat" cmpd="sng" algn="ctr">
+                      <a:solidFill>
+                        <a:schemeClr val="tx1"/>
+                      </a:solidFill>
+                      <a:prstDash val="solid"/>
+                      <a:round/>
+                      <a:headEnd type="none" w="med" len="med"/>
+                      <a:tailEnd type="none" w="med" len="med"/>
+                    </a:lnT>
+                    <a:lnB w="6350" cap="flat" cmpd="sng" algn="ctr">
+                      <a:solidFill>
+                        <a:schemeClr val="tx1"/>
+                      </a:solidFill>
+                      <a:prstDash val="solid"/>
+                      <a:round/>
+                      <a:headEnd type="none" w="med" len="med"/>
+                      <a:tailEnd type="none" w="med" len="med"/>
+                    </a:lnB>
+                    <a:lnTlToBr w="12700" cmpd="sng">
+                      <a:noFill/>
+                      <a:prstDash val="solid"/>
+                    </a:lnTlToBr>
+                    <a:lnBlToTr w="12700" cmpd="sng">
+                      <a:noFill/>
+                      <a:prstDash val="solid"/>
+                    </a:lnBlToTr>
+                    <a:solidFill>
+                      <a:schemeClr val="bg1"/>
+                    </a:solidFill>
+                  </a:tcPr>
+                </a:tc>
+                <a:extLst>
+                  <a:ext uri="{0D108BD9-81ED-4DB2-BD59-A6C34878D82A}">
+                    <a16:rowId xmlns:a16="http://schemas.microsoft.com/office/drawing/2014/main" val="638209008"/>
+                  </a:ext>
+                </a:extLst>
+              </a:tr>
+              <a:tr h="316671">
+                <a:tc>
+                  <a:txBody>
+                    <a:bodyPr/>
+                    <a:lstStyle/>
+                    <a:p>
+                      <a:pPr algn="ctr" latinLnBrk="1"/>
+                      <a:r>
+                        <a:rPr lang="en-US" altLang="ko-KR" dirty="0"/>
+                        <a:t>1</a:t>
+                      </a:r>
+                      <a:endParaRPr lang="ko-KR" altLang="en-US" dirty="0"/>
+                    </a:p>
+                  </a:txBody>
+                  <a:tcPr>
+                    <a:lnL w="6350" cap="flat" cmpd="sng" algn="ctr">
+                      <a:noFill/>
+                      <a:prstDash val="solid"/>
+                      <a:round/>
+                      <a:headEnd type="none" w="med" len="med"/>
+                      <a:tailEnd type="none" w="med" len="med"/>
+                    </a:lnL>
+                    <a:lnR w="6350" cap="flat" cmpd="sng" algn="ctr">
+                      <a:noFill/>
+                      <a:prstDash val="solid"/>
+                      <a:round/>
+                      <a:headEnd type="none" w="med" len="med"/>
+                      <a:tailEnd type="none" w="med" len="med"/>
+                    </a:lnR>
+                    <a:lnT w="6350" cap="flat" cmpd="sng" algn="ctr">
+                      <a:solidFill>
+                        <a:schemeClr val="tx1"/>
+                      </a:solidFill>
+                      <a:prstDash val="solid"/>
+                      <a:round/>
+                      <a:headEnd type="none" w="med" len="med"/>
+                      <a:tailEnd type="none" w="med" len="med"/>
+                    </a:lnT>
+                    <a:lnB w="6350" cap="flat" cmpd="sng" algn="ctr">
+                      <a:solidFill>
+                        <a:schemeClr val="tx1"/>
+                      </a:solidFill>
+                      <a:prstDash val="solid"/>
+                      <a:round/>
+                      <a:headEnd type="none" w="med" len="med"/>
+                      <a:tailEnd type="none" w="med" len="med"/>
+                    </a:lnB>
+                    <a:lnTlToBr w="12700" cmpd="sng">
+                      <a:noFill/>
+                      <a:prstDash val="solid"/>
+                    </a:lnTlToBr>
+                    <a:lnBlToTr w="12700" cmpd="sng">
+                      <a:noFill/>
+                      <a:prstDash val="solid"/>
+                    </a:lnBlToTr>
+                    <a:solidFill>
+                      <a:schemeClr val="bg1"/>
+                    </a:solidFill>
+                  </a:tcPr>
+                </a:tc>
+                <a:tc>
+                  <a:txBody>
+                    <a:bodyPr/>
+                    <a:lstStyle/>
+                    <a:p>
+                      <a:pPr algn="ctr" latinLnBrk="1"/>
+                      <a:endParaRPr lang="ko-KR" altLang="en-US" dirty="0"/>
+                    </a:p>
+                  </a:txBody>
+                  <a:tcPr>
+                    <a:lnL w="6350" cap="flat" cmpd="sng" algn="ctr">
+                      <a:noFill/>
+                      <a:prstDash val="solid"/>
+                      <a:round/>
+                      <a:headEnd type="none" w="med" len="med"/>
+                      <a:tailEnd type="none" w="med" len="med"/>
+                    </a:lnL>
+                    <a:lnR w="6350" cap="flat" cmpd="sng" algn="ctr">
+                      <a:noFill/>
+                      <a:prstDash val="solid"/>
+                      <a:round/>
+                      <a:headEnd type="none" w="med" len="med"/>
+                      <a:tailEnd type="none" w="med" len="med"/>
+                    </a:lnR>
+                    <a:lnT w="6350" cap="flat" cmpd="sng" algn="ctr">
+                      <a:solidFill>
+                        <a:schemeClr val="tx1"/>
+                      </a:solidFill>
+                      <a:prstDash val="solid"/>
+                      <a:round/>
+                      <a:headEnd type="none" w="med" len="med"/>
+                      <a:tailEnd type="none" w="med" len="med"/>
+                    </a:lnT>
+                    <a:lnB w="6350" cap="flat" cmpd="sng" algn="ctr">
+                      <a:solidFill>
+                        <a:schemeClr val="tx1"/>
+                      </a:solidFill>
+                      <a:prstDash val="solid"/>
+                      <a:round/>
+                      <a:headEnd type="none" w="med" len="med"/>
+                      <a:tailEnd type="none" w="med" len="med"/>
+                    </a:lnB>
+                    <a:lnTlToBr w="12700" cmpd="sng">
+                      <a:noFill/>
+                      <a:prstDash val="solid"/>
+                    </a:lnTlToBr>
+                    <a:lnBlToTr w="12700" cmpd="sng">
+                      <a:noFill/>
+                      <a:prstDash val="solid"/>
+                    </a:lnBlToTr>
+                    <a:solidFill>
+                      <a:schemeClr val="bg1"/>
+                    </a:solidFill>
+                  </a:tcPr>
+                </a:tc>
+                <a:tc>
+                  <a:txBody>
+                    <a:bodyPr/>
+                    <a:lstStyle/>
+                    <a:p>
+                      <a:pPr algn="ctr" latinLnBrk="1"/>
+                      <a:endParaRPr lang="ko-KR" altLang="en-US" dirty="0"/>
+                    </a:p>
+                  </a:txBody>
+                  <a:tcPr>
+                    <a:lnL w="6350" cap="flat" cmpd="sng" algn="ctr">
+                      <a:noFill/>
+                      <a:prstDash val="solid"/>
+                      <a:round/>
+                      <a:headEnd type="none" w="med" len="med"/>
+                      <a:tailEnd type="none" w="med" len="med"/>
+                    </a:lnL>
+                    <a:lnR w="6350" cap="flat" cmpd="sng" algn="ctr">
+                      <a:noFill/>
+                      <a:prstDash val="solid"/>
+                      <a:round/>
+                      <a:headEnd type="none" w="med" len="med"/>
+                      <a:tailEnd type="none" w="med" len="med"/>
+                    </a:lnR>
+                    <a:lnT w="6350" cap="flat" cmpd="sng" algn="ctr">
+                      <a:solidFill>
+                        <a:schemeClr val="tx1"/>
+                      </a:solidFill>
+                      <a:prstDash val="solid"/>
+                      <a:round/>
+                      <a:headEnd type="none" w="med" len="med"/>
+                      <a:tailEnd type="none" w="med" len="med"/>
+                    </a:lnT>
+                    <a:lnB w="6350" cap="flat" cmpd="sng" algn="ctr">
+                      <a:solidFill>
+                        <a:schemeClr val="tx1"/>
+                      </a:solidFill>
+                      <a:prstDash val="solid"/>
+                      <a:round/>
+                      <a:headEnd type="none" w="med" len="med"/>
+                      <a:tailEnd type="none" w="med" len="med"/>
+                    </a:lnB>
+                    <a:lnTlToBr w="12700" cmpd="sng">
+                      <a:noFill/>
+                      <a:prstDash val="solid"/>
+                    </a:lnTlToBr>
+                    <a:lnBlToTr w="12700" cmpd="sng">
+                      <a:noFill/>
+                      <a:prstDash val="solid"/>
+                    </a:lnBlToTr>
+                    <a:solidFill>
+                      <a:schemeClr val="bg1"/>
+                    </a:solidFill>
+                  </a:tcPr>
+                </a:tc>
+                <a:tc>
+                  <a:txBody>
+                    <a:bodyPr/>
+                    <a:lstStyle/>
+                    <a:p>
+                      <a:pPr algn="ctr" latinLnBrk="1"/>
+                      <a:endParaRPr lang="ko-KR" altLang="en-US" dirty="0"/>
+                    </a:p>
+                  </a:txBody>
+                  <a:tcPr>
+                    <a:lnL w="6350" cap="flat" cmpd="sng" algn="ctr">
+                      <a:noFill/>
+                      <a:prstDash val="solid"/>
+                      <a:round/>
+                      <a:headEnd type="none" w="med" len="med"/>
+                      <a:tailEnd type="none" w="med" len="med"/>
+                    </a:lnL>
+                    <a:lnR w="6350" cap="flat" cmpd="sng" algn="ctr">
+                      <a:noFill/>
+                      <a:prstDash val="solid"/>
+                      <a:round/>
+                      <a:headEnd type="none" w="med" len="med"/>
+                      <a:tailEnd type="none" w="med" len="med"/>
+                    </a:lnR>
+                    <a:lnT w="6350" cap="flat" cmpd="sng" algn="ctr">
+                      <a:solidFill>
+                        <a:schemeClr val="tx1"/>
+                      </a:solidFill>
+                      <a:prstDash val="solid"/>
+                      <a:round/>
+                      <a:headEnd type="none" w="med" len="med"/>
+                      <a:tailEnd type="none" w="med" len="med"/>
+                    </a:lnT>
+                    <a:lnB w="6350" cap="flat" cmpd="sng" algn="ctr">
+                      <a:solidFill>
+                        <a:schemeClr val="tx1"/>
+                      </a:solidFill>
+                      <a:prstDash val="solid"/>
+                      <a:round/>
+                      <a:headEnd type="none" w="med" len="med"/>
+                      <a:tailEnd type="none" w="med" len="med"/>
+                    </a:lnB>
+                    <a:lnTlToBr w="12700" cmpd="sng">
+                      <a:noFill/>
+                      <a:prstDash val="solid"/>
+                    </a:lnTlToBr>
+                    <a:lnBlToTr w="12700" cmpd="sng">
+                      <a:noFill/>
+                      <a:prstDash val="solid"/>
+                    </a:lnBlToTr>
+                    <a:solidFill>
+                      <a:schemeClr val="bg1"/>
+                    </a:solidFill>
+                  </a:tcPr>
+                </a:tc>
+                <a:extLst>
+                  <a:ext uri="{0D108BD9-81ED-4DB2-BD59-A6C34878D82A}">
+                    <a16:rowId xmlns:a16="http://schemas.microsoft.com/office/drawing/2014/main" val="621618138"/>
+                  </a:ext>
+                </a:extLst>
+              </a:tr>
+              <a:tr h="316671">
+                <a:tc>
+                  <a:txBody>
+                    <a:bodyPr/>
+                    <a:lstStyle/>
+                    <a:p>
+                      <a:pPr algn="ctr" latinLnBrk="1"/>
+                      <a:r>
+                        <a:rPr lang="en-US" altLang="ko-KR" dirty="0"/>
+                        <a:t>2</a:t>
+                      </a:r>
+                      <a:endParaRPr lang="ko-KR" altLang="en-US" dirty="0"/>
+                    </a:p>
+                  </a:txBody>
+                  <a:tcPr>
+                    <a:lnL w="6350" cap="flat" cmpd="sng" algn="ctr">
+                      <a:noFill/>
+                      <a:prstDash val="solid"/>
+                      <a:round/>
+                      <a:headEnd type="none" w="med" len="med"/>
+                      <a:tailEnd type="none" w="med" len="med"/>
+                    </a:lnL>
+                    <a:lnR w="6350" cap="flat" cmpd="sng" algn="ctr">
+                      <a:noFill/>
+                      <a:prstDash val="solid"/>
+                      <a:round/>
+                      <a:headEnd type="none" w="med" len="med"/>
+                      <a:tailEnd type="none" w="med" len="med"/>
+                    </a:lnR>
+                    <a:lnT w="6350" cap="flat" cmpd="sng" algn="ctr">
+                      <a:solidFill>
+                        <a:schemeClr val="tx1"/>
+                      </a:solidFill>
+                      <a:prstDash val="solid"/>
+                      <a:round/>
+                      <a:headEnd type="none" w="med" len="med"/>
+                      <a:tailEnd type="none" w="med" len="med"/>
+                    </a:lnT>
+                    <a:lnB w="6350" cap="flat" cmpd="sng" algn="ctr">
+                      <a:solidFill>
+                        <a:schemeClr val="tx1"/>
+                      </a:solidFill>
+                      <a:prstDash val="solid"/>
+                      <a:round/>
+                      <a:headEnd type="none" w="med" len="med"/>
+                      <a:tailEnd type="none" w="med" len="med"/>
+                    </a:lnB>
+                    <a:lnTlToBr w="12700" cmpd="sng">
+                      <a:noFill/>
+                      <a:prstDash val="solid"/>
+                    </a:lnTlToBr>
+                    <a:lnBlToTr w="12700" cmpd="sng">
+                      <a:noFill/>
+                      <a:prstDash val="solid"/>
+                    </a:lnBlToTr>
+                    <a:solidFill>
+                      <a:schemeClr val="bg1"/>
+                    </a:solidFill>
+                  </a:tcPr>
+                </a:tc>
+                <a:tc>
+                  <a:txBody>
+                    <a:bodyPr/>
+                    <a:lstStyle/>
+                    <a:p>
+                      <a:pPr algn="ctr" latinLnBrk="1"/>
+                      <a:endParaRPr lang="ko-KR" altLang="en-US" dirty="0"/>
+                    </a:p>
+                  </a:txBody>
+                  <a:tcPr>
+                    <a:lnL w="6350" cap="flat" cmpd="sng" algn="ctr">
+                      <a:noFill/>
+                      <a:prstDash val="solid"/>
+                      <a:round/>
+                      <a:headEnd type="none" w="med" len="med"/>
+                      <a:tailEnd type="none" w="med" len="med"/>
+                    </a:lnL>
+                    <a:lnR w="6350" cap="flat" cmpd="sng" algn="ctr">
+                      <a:noFill/>
+                      <a:prstDash val="solid"/>
+                      <a:round/>
+                      <a:headEnd type="none" w="med" len="med"/>
+                      <a:tailEnd type="none" w="med" len="med"/>
+                    </a:lnR>
+                    <a:lnT w="6350" cap="flat" cmpd="sng" algn="ctr">
+                      <a:solidFill>
+                        <a:schemeClr val="tx1"/>
+                      </a:solidFill>
+                      <a:prstDash val="solid"/>
+                      <a:round/>
+                      <a:headEnd type="none" w="med" len="med"/>
+                      <a:tailEnd type="none" w="med" len="med"/>
+                    </a:lnT>
+                    <a:lnB w="6350" cap="flat" cmpd="sng" algn="ctr">
+                      <a:solidFill>
+                        <a:schemeClr val="tx1"/>
+                      </a:solidFill>
+                      <a:prstDash val="solid"/>
+                      <a:round/>
+                      <a:headEnd type="none" w="med" len="med"/>
+                      <a:tailEnd type="none" w="med" len="med"/>
+                    </a:lnB>
+                    <a:lnTlToBr w="12700" cmpd="sng">
+                      <a:noFill/>
+                      <a:prstDash val="solid"/>
+                    </a:lnTlToBr>
+                    <a:lnBlToTr w="12700" cmpd="sng">
+                      <a:noFill/>
+                      <a:prstDash val="solid"/>
+                    </a:lnBlToTr>
+                    <a:solidFill>
+                      <a:schemeClr val="bg1"/>
+                    </a:solidFill>
+                  </a:tcPr>
+                </a:tc>
+                <a:tc>
+                  <a:txBody>
+                    <a:bodyPr/>
+                    <a:lstStyle/>
+                    <a:p>
+                      <a:pPr algn="ctr" latinLnBrk="1"/>
+                      <a:endParaRPr lang="ko-KR" altLang="en-US" dirty="0"/>
+                    </a:p>
+                  </a:txBody>
+                  <a:tcPr>
+                    <a:lnL w="6350" cap="flat" cmpd="sng" algn="ctr">
+                      <a:noFill/>
+                      <a:prstDash val="solid"/>
+                      <a:round/>
+                      <a:headEnd type="none" w="med" len="med"/>
+                      <a:tailEnd type="none" w="med" len="med"/>
+                    </a:lnL>
+                    <a:lnR w="6350" cap="flat" cmpd="sng" algn="ctr">
+                      <a:noFill/>
+                      <a:prstDash val="solid"/>
+                      <a:round/>
+                      <a:headEnd type="none" w="med" len="med"/>
+                      <a:tailEnd type="none" w="med" len="med"/>
+                    </a:lnR>
+                    <a:lnT w="6350" cap="flat" cmpd="sng" algn="ctr">
+                      <a:solidFill>
+                        <a:schemeClr val="tx1"/>
+                      </a:solidFill>
+                      <a:prstDash val="solid"/>
+                      <a:round/>
+                      <a:headEnd type="none" w="med" len="med"/>
+                      <a:tailEnd type="none" w="med" len="med"/>
+                    </a:lnT>
+                    <a:lnB w="6350" cap="flat" cmpd="sng" algn="ctr">
+                      <a:solidFill>
+                        <a:schemeClr val="tx1"/>
+                      </a:solidFill>
+                      <a:prstDash val="solid"/>
+                      <a:round/>
+                      <a:headEnd type="none" w="med" len="med"/>
+                      <a:tailEnd type="none" w="med" len="med"/>
+                    </a:lnB>
+                    <a:lnTlToBr w="12700" cmpd="sng">
+                      <a:noFill/>
+                      <a:prstDash val="solid"/>
+                    </a:lnTlToBr>
+                    <a:lnBlToTr w="12700" cmpd="sng">
+                      <a:noFill/>
+                      <a:prstDash val="solid"/>
+                    </a:lnBlToTr>
+                    <a:solidFill>
+                      <a:schemeClr val="bg1"/>
+                    </a:solidFill>
+                  </a:tcPr>
+                </a:tc>
+                <a:tc>
+                  <a:txBody>
+                    <a:bodyPr/>
+                    <a:lstStyle/>
+                    <a:p>
+                      <a:pPr algn="ctr" latinLnBrk="1"/>
+                      <a:endParaRPr lang="ko-KR" altLang="en-US" dirty="0"/>
+                    </a:p>
+                  </a:txBody>
+                  <a:tcPr>
+                    <a:lnL w="6350" cap="flat" cmpd="sng" algn="ctr">
+                      <a:noFill/>
+                      <a:prstDash val="solid"/>
+                      <a:round/>
+                      <a:headEnd type="none" w="med" len="med"/>
+                      <a:tailEnd type="none" w="med" len="med"/>
+                    </a:lnL>
+                    <a:lnR w="6350" cap="flat" cmpd="sng" algn="ctr">
+                      <a:noFill/>
+                      <a:prstDash val="solid"/>
+                      <a:round/>
+                      <a:headEnd type="none" w="med" len="med"/>
+                      <a:tailEnd type="none" w="med" len="med"/>
+                    </a:lnR>
+                    <a:lnT w="6350" cap="flat" cmpd="sng" algn="ctr">
+                      <a:solidFill>
+                        <a:schemeClr val="tx1"/>
+                      </a:solidFill>
+                      <a:prstDash val="solid"/>
+                      <a:round/>
+                      <a:headEnd type="none" w="med" len="med"/>
+                      <a:tailEnd type="none" w="med" len="med"/>
+                    </a:lnT>
+                    <a:lnB w="6350" cap="flat" cmpd="sng" algn="ctr">
+                      <a:solidFill>
+                        <a:schemeClr val="tx1"/>
+                      </a:solidFill>
+                      <a:prstDash val="solid"/>
+                      <a:round/>
+                      <a:headEnd type="none" w="med" len="med"/>
+                      <a:tailEnd type="none" w="med" len="med"/>
+                    </a:lnB>
+                    <a:lnTlToBr w="12700" cmpd="sng">
+                      <a:noFill/>
+                      <a:prstDash val="solid"/>
+                    </a:lnTlToBr>
+                    <a:lnBlToTr w="12700" cmpd="sng">
+                      <a:noFill/>
+                      <a:prstDash val="solid"/>
+                    </a:lnBlToTr>
+                    <a:solidFill>
+                      <a:schemeClr val="bg1"/>
+                    </a:solidFill>
+                  </a:tcPr>
+                </a:tc>
+                <a:extLst>
+                  <a:ext uri="{0D108BD9-81ED-4DB2-BD59-A6C34878D82A}">
+                    <a16:rowId xmlns:a16="http://schemas.microsoft.com/office/drawing/2014/main" val="2434023288"/>
+                  </a:ext>
+                </a:extLst>
+              </a:tr>
+              <a:tr h="316671">
+                <a:tc>
+                  <a:txBody>
+                    <a:bodyPr/>
+                    <a:lstStyle/>
+                    <a:p>
+                      <a:pPr algn="ctr" latinLnBrk="1"/>
+                      <a:r>
+                        <a:rPr lang="en-US" altLang="ko-KR" dirty="0"/>
+                        <a:t>3</a:t>
+                      </a:r>
+                      <a:endParaRPr lang="ko-KR" altLang="en-US" dirty="0"/>
+                    </a:p>
+                  </a:txBody>
+                  <a:tcPr>
+                    <a:lnL w="6350" cap="flat" cmpd="sng" algn="ctr">
+                      <a:noFill/>
+                      <a:prstDash val="solid"/>
+                      <a:round/>
+                      <a:headEnd type="none" w="med" len="med"/>
+                      <a:tailEnd type="none" w="med" len="med"/>
+                    </a:lnL>
+                    <a:lnR w="6350" cap="flat" cmpd="sng" algn="ctr">
+                      <a:noFill/>
+                      <a:prstDash val="solid"/>
+                      <a:round/>
+                      <a:headEnd type="none" w="med" len="med"/>
+                      <a:tailEnd type="none" w="med" len="med"/>
+                    </a:lnR>
+                    <a:lnT w="6350" cap="flat" cmpd="sng" algn="ctr">
+                      <a:solidFill>
+                        <a:schemeClr val="tx1"/>
+                      </a:solidFill>
+                      <a:prstDash val="solid"/>
+                      <a:round/>
+                      <a:headEnd type="none" w="med" len="med"/>
+                      <a:tailEnd type="none" w="med" len="med"/>
+                    </a:lnT>
+                    <a:lnB w="6350" cap="flat" cmpd="sng" algn="ctr">
+                      <a:solidFill>
+                        <a:schemeClr val="tx1"/>
+                      </a:solidFill>
+                      <a:prstDash val="solid"/>
+                      <a:round/>
+                      <a:headEnd type="none" w="med" len="med"/>
+                      <a:tailEnd type="none" w="med" len="med"/>
+                    </a:lnB>
+                    <a:lnTlToBr w="12700" cmpd="sng">
+                      <a:noFill/>
+                      <a:prstDash val="solid"/>
+                    </a:lnTlToBr>
+                    <a:lnBlToTr w="12700" cmpd="sng">
+                      <a:noFill/>
+                      <a:prstDash val="solid"/>
+                    </a:lnBlToTr>
+                    <a:solidFill>
+                      <a:schemeClr val="bg1"/>
+                    </a:solidFill>
+                  </a:tcPr>
+                </a:tc>
+                <a:tc>
+                  <a:txBody>
+                    <a:bodyPr/>
+                    <a:lstStyle/>
+                    <a:p>
+                      <a:pPr algn="ctr" latinLnBrk="1"/>
+                      <a:endParaRPr lang="ko-KR" altLang="en-US" dirty="0"/>
+                    </a:p>
+                  </a:txBody>
+                  <a:tcPr>
+                    <a:lnL w="6350" cap="flat" cmpd="sng" algn="ctr">
+                      <a:noFill/>
+                      <a:prstDash val="solid"/>
+                      <a:round/>
+                      <a:headEnd type="none" w="med" len="med"/>
+                      <a:tailEnd type="none" w="med" len="med"/>
+                    </a:lnL>
+                    <a:lnR w="6350" cap="flat" cmpd="sng" algn="ctr">
+                      <a:noFill/>
+                      <a:prstDash val="solid"/>
+                      <a:round/>
+                      <a:headEnd type="none" w="med" len="med"/>
+                      <a:tailEnd type="none" w="med" len="med"/>
+                    </a:lnR>
+                    <a:lnT w="6350" cap="flat" cmpd="sng" algn="ctr">
+                      <a:solidFill>
+                        <a:schemeClr val="tx1"/>
+                      </a:solidFill>
+                      <a:prstDash val="solid"/>
+                      <a:round/>
+                      <a:headEnd type="none" w="med" len="med"/>
+                      <a:tailEnd type="none" w="med" len="med"/>
+                    </a:lnT>
+                    <a:lnB w="6350" cap="flat" cmpd="sng" algn="ctr">
+                      <a:solidFill>
+                        <a:schemeClr val="tx1"/>
+                      </a:solidFill>
+                      <a:prstDash val="solid"/>
+                      <a:round/>
+                      <a:headEnd type="none" w="med" len="med"/>
+                      <a:tailEnd type="none" w="med" len="med"/>
+                    </a:lnB>
+                    <a:lnTlToBr w="12700" cmpd="sng">
+                      <a:noFill/>
+                      <a:prstDash val="solid"/>
+                    </a:lnTlToBr>
+                    <a:lnBlToTr w="12700" cmpd="sng">
+                      <a:noFill/>
+                      <a:prstDash val="solid"/>
+                    </a:lnBlToTr>
+                    <a:solidFill>
+                      <a:schemeClr val="bg1"/>
+                    </a:solidFill>
+                  </a:tcPr>
+                </a:tc>
+                <a:tc>
+                  <a:txBody>
+                    <a:bodyPr/>
+                    <a:lstStyle/>
+                    <a:p>
+                      <a:pPr algn="ctr" latinLnBrk="1"/>
+                      <a:endParaRPr lang="ko-KR" altLang="en-US" dirty="0"/>
+                    </a:p>
+                  </a:txBody>
+                  <a:tcPr>
+                    <a:lnL w="6350" cap="flat" cmpd="sng" algn="ctr">
+                      <a:noFill/>
+                      <a:prstDash val="solid"/>
+                      <a:round/>
+                      <a:headEnd type="none" w="med" len="med"/>
+                      <a:tailEnd type="none" w="med" len="med"/>
+                    </a:lnL>
+                    <a:lnR w="6350" cap="flat" cmpd="sng" algn="ctr">
+                      <a:noFill/>
+                      <a:prstDash val="solid"/>
+                      <a:round/>
+                      <a:headEnd type="none" w="med" len="med"/>
+                      <a:tailEnd type="none" w="med" len="med"/>
+                    </a:lnR>
+                    <a:lnT w="6350" cap="flat" cmpd="sng" algn="ctr">
+                      <a:solidFill>
+                        <a:schemeClr val="tx1"/>
+                      </a:solidFill>
+                      <a:prstDash val="solid"/>
+                      <a:round/>
+                      <a:headEnd type="none" w="med" len="med"/>
+                      <a:tailEnd type="none" w="med" len="med"/>
+                    </a:lnT>
+                    <a:lnB w="6350" cap="flat" cmpd="sng" algn="ctr">
+                      <a:solidFill>
+                        <a:schemeClr val="tx1"/>
+                      </a:solidFill>
+                      <a:prstDash val="solid"/>
+                      <a:round/>
+                      <a:headEnd type="none" w="med" len="med"/>
+                      <a:tailEnd type="none" w="med" len="med"/>
+                    </a:lnB>
+                    <a:lnTlToBr w="12700" cmpd="sng">
+                      <a:noFill/>
+                      <a:prstDash val="solid"/>
+                    </a:lnTlToBr>
+                    <a:lnBlToTr w="12700" cmpd="sng">
+                      <a:noFill/>
+                      <a:prstDash val="solid"/>
+                    </a:lnBlToTr>
+                    <a:solidFill>
+                      <a:schemeClr val="bg1"/>
+                    </a:solidFill>
+                  </a:tcPr>
+                </a:tc>
+                <a:tc>
+                  <a:txBody>
+                    <a:bodyPr/>
+                    <a:lstStyle/>
+                    <a:p>
+                      <a:pPr algn="ctr" latinLnBrk="1"/>
+                      <a:endParaRPr lang="ko-KR" altLang="en-US" dirty="0"/>
+                    </a:p>
+                  </a:txBody>
+                  <a:tcPr>
+                    <a:lnL w="6350" cap="flat" cmpd="sng" algn="ctr">
+                      <a:noFill/>
+                      <a:prstDash val="solid"/>
+                      <a:round/>
+                      <a:headEnd type="none" w="med" len="med"/>
+                      <a:tailEnd type="none" w="med" len="med"/>
+                    </a:lnL>
+                    <a:lnR w="6350" cap="flat" cmpd="sng" algn="ctr">
+                      <a:noFill/>
+                      <a:prstDash val="solid"/>
+                      <a:round/>
+                      <a:headEnd type="none" w="med" len="med"/>
+                      <a:tailEnd type="none" w="med" len="med"/>
+                    </a:lnR>
+                    <a:lnT w="6350" cap="flat" cmpd="sng" algn="ctr">
+                      <a:solidFill>
+                        <a:schemeClr val="tx1"/>
+                      </a:solidFill>
+                      <a:prstDash val="solid"/>
+                      <a:round/>
+                      <a:headEnd type="none" w="med" len="med"/>
+                      <a:tailEnd type="none" w="med" len="med"/>
+                    </a:lnT>
+                    <a:lnB w="6350" cap="flat" cmpd="sng" algn="ctr">
+                      <a:solidFill>
+                        <a:schemeClr val="tx1"/>
+                      </a:solidFill>
+                      <a:prstDash val="solid"/>
+                      <a:round/>
+                      <a:headEnd type="none" w="med" len="med"/>
+                      <a:tailEnd type="none" w="med" len="med"/>
+                    </a:lnB>
+                    <a:lnTlToBr w="12700" cmpd="sng">
+                      <a:noFill/>
+                      <a:prstDash val="solid"/>
+                    </a:lnTlToBr>
+                    <a:lnBlToTr w="12700" cmpd="sng">
+                      <a:noFill/>
+                      <a:prstDash val="solid"/>
+                    </a:lnBlToTr>
+                    <a:solidFill>
+                      <a:schemeClr val="bg1"/>
+                    </a:solidFill>
+                  </a:tcPr>
+                </a:tc>
+                <a:extLst>
+                  <a:ext uri="{0D108BD9-81ED-4DB2-BD59-A6C34878D82A}">
+                    <a16:rowId xmlns:a16="http://schemas.microsoft.com/office/drawing/2014/main" val="2166662826"/>
+                  </a:ext>
+                </a:extLst>
+              </a:tr>
+              <a:tr h="316671">
+                <a:tc>
+                  <a:txBody>
+                    <a:bodyPr/>
+                    <a:lstStyle/>
+                    <a:p>
+                      <a:pPr algn="ctr" latinLnBrk="1"/>
+                      <a:r>
+                        <a:rPr lang="en-US" altLang="ko-KR" dirty="0"/>
+                        <a:t>4</a:t>
+                      </a:r>
+                      <a:endParaRPr lang="ko-KR" altLang="en-US" dirty="0"/>
+                    </a:p>
+                  </a:txBody>
+                  <a:tcPr>
+                    <a:lnL w="6350" cap="flat" cmpd="sng" algn="ctr">
+                      <a:noFill/>
+                      <a:prstDash val="solid"/>
+                      <a:round/>
+                      <a:headEnd type="none" w="med" len="med"/>
+                      <a:tailEnd type="none" w="med" len="med"/>
+                    </a:lnL>
+                    <a:lnR w="6350" cap="flat" cmpd="sng" algn="ctr">
+                      <a:noFill/>
+                      <a:prstDash val="solid"/>
+                      <a:round/>
+                      <a:headEnd type="none" w="med" len="med"/>
+                      <a:tailEnd type="none" w="med" len="med"/>
+                    </a:lnR>
+                    <a:lnT w="6350" cap="flat" cmpd="sng" algn="ctr">
+                      <a:solidFill>
+                        <a:schemeClr val="tx1"/>
+                      </a:solidFill>
+                      <a:prstDash val="solid"/>
+                      <a:round/>
+                      <a:headEnd type="none" w="med" len="med"/>
+                      <a:tailEnd type="none" w="med" len="med"/>
+                    </a:lnT>
+                    <a:lnB w="6350" cap="flat" cmpd="sng" algn="ctr">
+                      <a:solidFill>
+                        <a:schemeClr val="tx1"/>
+                      </a:solidFill>
+                      <a:prstDash val="solid"/>
+                      <a:round/>
+                      <a:headEnd type="none" w="med" len="med"/>
+                      <a:tailEnd type="none" w="med" len="med"/>
+                    </a:lnB>
+                    <a:lnTlToBr w="12700" cmpd="sng">
+                      <a:noFill/>
+                      <a:prstDash val="solid"/>
+                    </a:lnTlToBr>
+                    <a:lnBlToTr w="12700" cmpd="sng">
+                      <a:noFill/>
+                      <a:prstDash val="solid"/>
+                    </a:lnBlToTr>
+                    <a:solidFill>
+                      <a:schemeClr val="bg1"/>
+                    </a:solidFill>
+                  </a:tcPr>
+                </a:tc>
+                <a:tc>
+                  <a:txBody>
+                    <a:bodyPr/>
+                    <a:lstStyle/>
+                    <a:p>
+                      <a:pPr algn="ctr" latinLnBrk="1"/>
+                      <a:endParaRPr lang="ko-KR" altLang="en-US" dirty="0"/>
+                    </a:p>
+                  </a:txBody>
+                  <a:tcPr>
+                    <a:lnL w="6350" cap="flat" cmpd="sng" algn="ctr">
+                      <a:noFill/>
+                      <a:prstDash val="solid"/>
+                      <a:round/>
+                      <a:headEnd type="none" w="med" len="med"/>
+                      <a:tailEnd type="none" w="med" len="med"/>
+                    </a:lnL>
+                    <a:lnR w="6350" cap="flat" cmpd="sng" algn="ctr">
+                      <a:noFill/>
+                      <a:prstDash val="solid"/>
+                      <a:round/>
+                      <a:headEnd type="none" w="med" len="med"/>
+                      <a:tailEnd type="none" w="med" len="med"/>
+                    </a:lnR>
+                    <a:lnT w="6350" cap="flat" cmpd="sng" algn="ctr">
+                      <a:solidFill>
+                        <a:schemeClr val="tx1"/>
+                      </a:solidFill>
+                      <a:prstDash val="solid"/>
+                      <a:round/>
+                      <a:headEnd type="none" w="med" len="med"/>
+                      <a:tailEnd type="none" w="med" len="med"/>
+                    </a:lnT>
+                    <a:lnB w="6350" cap="flat" cmpd="sng" algn="ctr">
+                      <a:solidFill>
+                        <a:schemeClr val="tx1"/>
+                      </a:solidFill>
+                      <a:prstDash val="solid"/>
+                      <a:round/>
+                      <a:headEnd type="none" w="med" len="med"/>
+                      <a:tailEnd type="none" w="med" len="med"/>
+                    </a:lnB>
+                    <a:lnTlToBr w="12700" cmpd="sng">
+                      <a:noFill/>
+                      <a:prstDash val="solid"/>
+                    </a:lnTlToBr>
+                    <a:lnBlToTr w="12700" cmpd="sng">
+                      <a:noFill/>
+                      <a:prstDash val="solid"/>
+                    </a:lnBlToTr>
+                    <a:solidFill>
+                      <a:schemeClr val="bg1"/>
+                    </a:solidFill>
+                  </a:tcPr>
+                </a:tc>
+                <a:tc>
+                  <a:txBody>
+                    <a:bodyPr/>
+                    <a:lstStyle/>
+                    <a:p>
+                      <a:pPr algn="ctr" latinLnBrk="1"/>
+                      <a:endParaRPr lang="ko-KR" altLang="en-US" dirty="0"/>
+                    </a:p>
+                  </a:txBody>
+                  <a:tcPr>
+                    <a:lnL w="6350" cap="flat" cmpd="sng" algn="ctr">
+                      <a:noFill/>
+                      <a:prstDash val="solid"/>
+                      <a:round/>
+                      <a:headEnd type="none" w="med" len="med"/>
+                      <a:tailEnd type="none" w="med" len="med"/>
+                    </a:lnL>
+                    <a:lnR w="6350" cap="flat" cmpd="sng" algn="ctr">
+                      <a:noFill/>
+                      <a:prstDash val="solid"/>
+                      <a:round/>
+                      <a:headEnd type="none" w="med" len="med"/>
+                      <a:tailEnd type="none" w="med" len="med"/>
+                    </a:lnR>
+                    <a:lnT w="6350" cap="flat" cmpd="sng" algn="ctr">
+                      <a:solidFill>
+                        <a:schemeClr val="tx1"/>
+                      </a:solidFill>
+                      <a:prstDash val="solid"/>
+                      <a:round/>
+                      <a:headEnd type="none" w="med" len="med"/>
+                      <a:tailEnd type="none" w="med" len="med"/>
+                    </a:lnT>
+                    <a:lnB w="6350" cap="flat" cmpd="sng" algn="ctr">
+                      <a:solidFill>
+                        <a:schemeClr val="tx1"/>
+                      </a:solidFill>
+                      <a:prstDash val="solid"/>
+                      <a:round/>
+                      <a:headEnd type="none" w="med" len="med"/>
+                      <a:tailEnd type="none" w="med" len="med"/>
+                    </a:lnB>
+                    <a:lnTlToBr w="12700" cmpd="sng">
+                      <a:noFill/>
+                      <a:prstDash val="solid"/>
+                    </a:lnTlToBr>
+                    <a:lnBlToTr w="12700" cmpd="sng">
+                      <a:noFill/>
+                      <a:prstDash val="solid"/>
+                    </a:lnBlToTr>
+                    <a:solidFill>
+                      <a:schemeClr val="bg1"/>
+                    </a:solidFill>
+                  </a:tcPr>
+                </a:tc>
+                <a:tc>
+                  <a:txBody>
+                    <a:bodyPr/>
+                    <a:lstStyle/>
+                    <a:p>
+                      <a:pPr algn="ctr" latinLnBrk="1"/>
+                      <a:endParaRPr lang="ko-KR" altLang="en-US"/>
+                    </a:p>
+                  </a:txBody>
+                  <a:tcPr>
+                    <a:lnL w="6350" cap="flat" cmpd="sng" algn="ctr">
+                      <a:noFill/>
+                      <a:prstDash val="solid"/>
+                      <a:round/>
+                      <a:headEnd type="none" w="med" len="med"/>
+                      <a:tailEnd type="none" w="med" len="med"/>
+                    </a:lnL>
+                    <a:lnR w="6350" cap="flat" cmpd="sng" algn="ctr">
+                      <a:noFill/>
+                      <a:prstDash val="solid"/>
+                      <a:round/>
+                      <a:headEnd type="none" w="med" len="med"/>
+                      <a:tailEnd type="none" w="med" len="med"/>
+                    </a:lnR>
+                    <a:lnT w="6350" cap="flat" cmpd="sng" algn="ctr">
+                      <a:solidFill>
+                        <a:schemeClr val="tx1"/>
+                      </a:solidFill>
+                      <a:prstDash val="solid"/>
+                      <a:round/>
+                      <a:headEnd type="none" w="med" len="med"/>
+                      <a:tailEnd type="none" w="med" len="med"/>
+                    </a:lnT>
+                    <a:lnB w="6350" cap="flat" cmpd="sng" algn="ctr">
+                      <a:solidFill>
+                        <a:schemeClr val="tx1"/>
+                      </a:solidFill>
+                      <a:prstDash val="solid"/>
+                      <a:round/>
+                      <a:headEnd type="none" w="med" len="med"/>
+                      <a:tailEnd type="none" w="med" len="med"/>
+                    </a:lnB>
+                    <a:lnTlToBr w="12700" cmpd="sng">
+                      <a:noFill/>
+                      <a:prstDash val="solid"/>
+                    </a:lnTlToBr>
+                    <a:lnBlToTr w="12700" cmpd="sng">
+                      <a:noFill/>
+                      <a:prstDash val="solid"/>
+                    </a:lnBlToTr>
+                    <a:solidFill>
+                      <a:schemeClr val="bg1"/>
+                    </a:solidFill>
+                  </a:tcPr>
+                </a:tc>
+                <a:extLst>
+                  <a:ext uri="{0D108BD9-81ED-4DB2-BD59-A6C34878D82A}">
+                    <a16:rowId xmlns:a16="http://schemas.microsoft.com/office/drawing/2014/main" val="2288906620"/>
+                  </a:ext>
+                </a:extLst>
+              </a:tr>
+              <a:tr h="316671">
+                <a:tc>
+                  <a:txBody>
+                    <a:bodyPr/>
+                    <a:lstStyle/>
+                    <a:p>
+                      <a:pPr algn="ctr" latinLnBrk="1"/>
+                      <a:r>
+                        <a:rPr lang="en-US" altLang="ko-KR" dirty="0"/>
+                        <a:t>5</a:t>
+                      </a:r>
+                      <a:endParaRPr lang="ko-KR" altLang="en-US" dirty="0"/>
+                    </a:p>
+                  </a:txBody>
+                  <a:tcPr>
+                    <a:lnL w="6350" cap="flat" cmpd="sng" algn="ctr">
+                      <a:noFill/>
+                      <a:prstDash val="solid"/>
+                      <a:round/>
+                      <a:headEnd type="none" w="med" len="med"/>
+                      <a:tailEnd type="none" w="med" len="med"/>
+                    </a:lnL>
+                    <a:lnR w="6350" cap="flat" cmpd="sng" algn="ctr">
+                      <a:noFill/>
+                      <a:prstDash val="solid"/>
+                      <a:round/>
+                      <a:headEnd type="none" w="med" len="med"/>
+                      <a:tailEnd type="none" w="med" len="med"/>
+                    </a:lnR>
+                    <a:lnT w="6350" cap="flat" cmpd="sng" algn="ctr">
+                      <a:solidFill>
+                        <a:schemeClr val="tx1"/>
+                      </a:solidFill>
+                      <a:prstDash val="solid"/>
+                      <a:round/>
+                      <a:headEnd type="none" w="med" len="med"/>
+                      <a:tailEnd type="none" w="med" len="med"/>
+                    </a:lnT>
+                    <a:lnB w="6350" cap="flat" cmpd="sng" algn="ctr">
+                      <a:solidFill>
+                        <a:schemeClr val="tx1"/>
+                      </a:solidFill>
+                      <a:prstDash val="solid"/>
+                      <a:round/>
+                      <a:headEnd type="none" w="med" len="med"/>
+                      <a:tailEnd type="none" w="med" len="med"/>
+                    </a:lnB>
+                    <a:lnTlToBr w="12700" cmpd="sng">
+                      <a:noFill/>
+                      <a:prstDash val="solid"/>
+                    </a:lnTlToBr>
+                    <a:lnBlToTr w="12700" cmpd="sng">
+                      <a:noFill/>
+                      <a:prstDash val="solid"/>
+                    </a:lnBlToTr>
+                    <a:solidFill>
+                      <a:schemeClr val="bg1"/>
+                    </a:solidFill>
+                  </a:tcPr>
+                </a:tc>
+                <a:tc>
+                  <a:txBody>
+                    <a:bodyPr/>
+                    <a:lstStyle/>
+                    <a:p>
+                      <a:pPr algn="ctr" latinLnBrk="1"/>
+                      <a:endParaRPr lang="ko-KR" altLang="en-US" dirty="0"/>
+                    </a:p>
+                  </a:txBody>
+                  <a:tcPr>
+                    <a:lnL w="6350" cap="flat" cmpd="sng" algn="ctr">
+                      <a:noFill/>
+                      <a:prstDash val="solid"/>
+                      <a:round/>
+                      <a:headEnd type="none" w="med" len="med"/>
+                      <a:tailEnd type="none" w="med" len="med"/>
+                    </a:lnL>
+                    <a:lnR w="6350" cap="flat" cmpd="sng" algn="ctr">
+                      <a:noFill/>
+                      <a:prstDash val="solid"/>
+                      <a:round/>
+                      <a:headEnd type="none" w="med" len="med"/>
+                      <a:tailEnd type="none" w="med" len="med"/>
+                    </a:lnR>
+                    <a:lnT w="6350" cap="flat" cmpd="sng" algn="ctr">
+                      <a:solidFill>
+                        <a:schemeClr val="tx1"/>
+                      </a:solidFill>
+                      <a:prstDash val="solid"/>
+                      <a:round/>
+                      <a:headEnd type="none" w="med" len="med"/>
+                      <a:tailEnd type="none" w="med" len="med"/>
+                    </a:lnT>
+                    <a:lnB w="6350" cap="flat" cmpd="sng" algn="ctr">
+                      <a:solidFill>
+                        <a:schemeClr val="tx1"/>
+                      </a:solidFill>
+                      <a:prstDash val="solid"/>
+                      <a:round/>
+                      <a:headEnd type="none" w="med" len="med"/>
+                      <a:tailEnd type="none" w="med" len="med"/>
+                    </a:lnB>
+                    <a:lnTlToBr w="12700" cmpd="sng">
+                      <a:noFill/>
+                      <a:prstDash val="solid"/>
+                    </a:lnTlToBr>
+                    <a:lnBlToTr w="12700" cmpd="sng">
+                      <a:noFill/>
+                      <a:prstDash val="solid"/>
+                    </a:lnBlToTr>
+                    <a:solidFill>
+                      <a:schemeClr val="bg1"/>
+                    </a:solidFill>
+                  </a:tcPr>
+                </a:tc>
+                <a:tc>
+                  <a:txBody>
+                    <a:bodyPr/>
+                    <a:lstStyle/>
+                    <a:p>
+                      <a:pPr algn="ctr" latinLnBrk="1"/>
+                      <a:endParaRPr lang="ko-KR" altLang="en-US" dirty="0"/>
+                    </a:p>
+                  </a:txBody>
+                  <a:tcPr>
+                    <a:lnL w="6350" cap="flat" cmpd="sng" algn="ctr">
+                      <a:noFill/>
+                      <a:prstDash val="solid"/>
+                      <a:round/>
+                      <a:headEnd type="none" w="med" len="med"/>
+                      <a:tailEnd type="none" w="med" len="med"/>
+                    </a:lnL>
+                    <a:lnR w="6350" cap="flat" cmpd="sng" algn="ctr">
+                      <a:noFill/>
+                      <a:prstDash val="solid"/>
+                      <a:round/>
+                      <a:headEnd type="none" w="med" len="med"/>
+                      <a:tailEnd type="none" w="med" len="med"/>
+                    </a:lnR>
+                    <a:lnT w="6350" cap="flat" cmpd="sng" algn="ctr">
+                      <a:solidFill>
+                        <a:schemeClr val="tx1"/>
+                      </a:solidFill>
+                      <a:prstDash val="solid"/>
+                      <a:round/>
+                      <a:headEnd type="none" w="med" len="med"/>
+                      <a:tailEnd type="none" w="med" len="med"/>
+                    </a:lnT>
+                    <a:lnB w="6350" cap="flat" cmpd="sng" algn="ctr">
+                      <a:solidFill>
+                        <a:schemeClr val="tx1"/>
+                      </a:solidFill>
+                      <a:prstDash val="solid"/>
+                      <a:round/>
+                      <a:headEnd type="none" w="med" len="med"/>
+                      <a:tailEnd type="none" w="med" len="med"/>
+                    </a:lnB>
+                    <a:lnTlToBr w="12700" cmpd="sng">
+                      <a:noFill/>
+                      <a:prstDash val="solid"/>
+                    </a:lnTlToBr>
+                    <a:lnBlToTr w="12700" cmpd="sng">
+                      <a:noFill/>
+                      <a:prstDash val="solid"/>
+                    </a:lnBlToTr>
+                    <a:solidFill>
+                      <a:schemeClr val="bg1"/>
+                    </a:solidFill>
+                  </a:tcPr>
+                </a:tc>
+                <a:tc>
+                  <a:txBody>
+                    <a:bodyPr/>
+                    <a:lstStyle/>
+                    <a:p>
+                      <a:pPr algn="ctr" latinLnBrk="1"/>
+                      <a:endParaRPr lang="ko-KR" altLang="en-US" dirty="0"/>
+                    </a:p>
+                  </a:txBody>
+                  <a:tcPr>
+                    <a:lnL w="6350" cap="flat" cmpd="sng" algn="ctr">
+                      <a:noFill/>
+                      <a:prstDash val="solid"/>
+                      <a:round/>
+                      <a:headEnd type="none" w="med" len="med"/>
+                      <a:tailEnd type="none" w="med" len="med"/>
+                    </a:lnL>
+                    <a:lnR w="6350" cap="flat" cmpd="sng" algn="ctr">
+                      <a:noFill/>
+                      <a:prstDash val="solid"/>
+                      <a:round/>
+                      <a:headEnd type="none" w="med" len="med"/>
+                      <a:tailEnd type="none" w="med" len="med"/>
+                    </a:lnR>
+                    <a:lnT w="6350" cap="flat" cmpd="sng" algn="ctr">
+                      <a:solidFill>
+                        <a:schemeClr val="tx1"/>
+                      </a:solidFill>
+                      <a:prstDash val="solid"/>
+                      <a:round/>
+                      <a:headEnd type="none" w="med" len="med"/>
+                      <a:tailEnd type="none" w="med" len="med"/>
+                    </a:lnT>
+                    <a:lnB w="6350" cap="flat" cmpd="sng" algn="ctr">
+                      <a:solidFill>
+                        <a:schemeClr val="tx1"/>
+                      </a:solidFill>
+                      <a:prstDash val="solid"/>
+                      <a:round/>
+                      <a:headEnd type="none" w="med" len="med"/>
+                      <a:tailEnd type="none" w="med" len="med"/>
+                    </a:lnB>
+                    <a:lnTlToBr w="12700" cmpd="sng">
+                      <a:noFill/>
+                      <a:prstDash val="solid"/>
+                    </a:lnTlToBr>
+                    <a:lnBlToTr w="12700" cmpd="sng">
+                      <a:noFill/>
+                      <a:prstDash val="solid"/>
+                    </a:lnBlToTr>
+                    <a:solidFill>
+                      <a:schemeClr val="bg1"/>
+                    </a:solidFill>
+                  </a:tcPr>
+                </a:tc>
+                <a:extLst>
+                  <a:ext uri="{0D108BD9-81ED-4DB2-BD59-A6C34878D82A}">
+                    <a16:rowId xmlns:a16="http://schemas.microsoft.com/office/drawing/2014/main" val="3194612988"/>
+                  </a:ext>
+                </a:extLst>
+              </a:tr>
+              <a:tr h="316671">
+                <a:tc>
+                  <a:txBody>
+                    <a:bodyPr/>
+                    <a:lstStyle/>
+                    <a:p>
+                      <a:pPr algn="ctr" latinLnBrk="1"/>
+                      <a:r>
+                        <a:rPr lang="en-US" altLang="ko-KR" dirty="0"/>
+                        <a:t>6</a:t>
+                      </a:r>
+                      <a:endParaRPr lang="ko-KR" altLang="en-US" dirty="0"/>
+                    </a:p>
+                  </a:txBody>
+                  <a:tcPr>
+                    <a:lnL w="6350" cap="flat" cmpd="sng" algn="ctr">
+                      <a:noFill/>
+                      <a:prstDash val="solid"/>
+                      <a:round/>
+                      <a:headEnd type="none" w="med" len="med"/>
+                      <a:tailEnd type="none" w="med" len="med"/>
+                    </a:lnL>
+                    <a:lnR w="6350" cap="flat" cmpd="sng" algn="ctr">
+                      <a:noFill/>
+                      <a:prstDash val="solid"/>
+                      <a:round/>
+                      <a:headEnd type="none" w="med" len="med"/>
+                      <a:tailEnd type="none" w="med" len="med"/>
+                    </a:lnR>
+                    <a:lnT w="6350" cap="flat" cmpd="sng" algn="ctr">
+                      <a:solidFill>
+                        <a:schemeClr val="tx1"/>
+                      </a:solidFill>
+                      <a:prstDash val="solid"/>
+                      <a:round/>
+                      <a:headEnd type="none" w="med" len="med"/>
+                      <a:tailEnd type="none" w="med" len="med"/>
+                    </a:lnT>
+                    <a:lnB w="6350" cap="flat" cmpd="sng" algn="ctr">
+                      <a:solidFill>
+                        <a:schemeClr val="tx1"/>
+                      </a:solidFill>
+                      <a:prstDash val="solid"/>
+                      <a:round/>
+                      <a:headEnd type="none" w="med" len="med"/>
+                      <a:tailEnd type="none" w="med" len="med"/>
+                    </a:lnB>
+                    <a:lnTlToBr w="12700" cmpd="sng">
+                      <a:noFill/>
+                      <a:prstDash val="solid"/>
+                    </a:lnTlToBr>
+                    <a:lnBlToTr w="12700" cmpd="sng">
+                      <a:noFill/>
+                      <a:prstDash val="solid"/>
+                    </a:lnBlToTr>
+                    <a:solidFill>
+                      <a:schemeClr val="bg1"/>
+                    </a:solidFill>
+                  </a:tcPr>
+                </a:tc>
+                <a:tc>
+                  <a:txBody>
+                    <a:bodyPr/>
+                    <a:lstStyle/>
+                    <a:p>
+                      <a:pPr algn="ctr" latinLnBrk="1"/>
+                      <a:endParaRPr lang="ko-KR" altLang="en-US" dirty="0"/>
+                    </a:p>
+                  </a:txBody>
+                  <a:tcPr>
+                    <a:lnL w="6350" cap="flat" cmpd="sng" algn="ctr">
+                      <a:noFill/>
+                      <a:prstDash val="solid"/>
+                      <a:round/>
+                      <a:headEnd type="none" w="med" len="med"/>
+                      <a:tailEnd type="none" w="med" len="med"/>
+                    </a:lnL>
+                    <a:lnR w="6350" cap="flat" cmpd="sng" algn="ctr">
+                      <a:noFill/>
+                      <a:prstDash val="solid"/>
+                      <a:round/>
+                      <a:headEnd type="none" w="med" len="med"/>
+                      <a:tailEnd type="none" w="med" len="med"/>
+                    </a:lnR>
+                    <a:lnT w="6350" cap="flat" cmpd="sng" algn="ctr">
+                      <a:solidFill>
+                        <a:schemeClr val="tx1"/>
+                      </a:solidFill>
+                      <a:prstDash val="solid"/>
+                      <a:round/>
+                      <a:headEnd type="none" w="med" len="med"/>
+                      <a:tailEnd type="none" w="med" len="med"/>
+                    </a:lnT>
+                    <a:lnB w="6350" cap="flat" cmpd="sng" algn="ctr">
+                      <a:solidFill>
+                        <a:schemeClr val="tx1"/>
+                      </a:solidFill>
+                      <a:prstDash val="solid"/>
+                      <a:round/>
+                      <a:headEnd type="none" w="med" len="med"/>
+                      <a:tailEnd type="none" w="med" len="med"/>
+                    </a:lnB>
+                    <a:lnTlToBr w="12700" cmpd="sng">
+                      <a:noFill/>
+                      <a:prstDash val="solid"/>
+                    </a:lnTlToBr>
+                    <a:lnBlToTr w="12700" cmpd="sng">
+                      <a:noFill/>
+                      <a:prstDash val="solid"/>
+                    </a:lnBlToTr>
+                    <a:solidFill>
+                      <a:schemeClr val="bg1"/>
+                    </a:solidFill>
+                  </a:tcPr>
+                </a:tc>
+                <a:tc>
+                  <a:txBody>
+                    <a:bodyPr/>
+                    <a:lstStyle/>
+                    <a:p>
+                      <a:pPr algn="ctr" latinLnBrk="1"/>
+                      <a:endParaRPr lang="ko-KR" altLang="en-US" dirty="0"/>
+                    </a:p>
+                  </a:txBody>
+                  <a:tcPr>
+                    <a:lnL w="6350" cap="flat" cmpd="sng" algn="ctr">
+                      <a:noFill/>
+                      <a:prstDash val="solid"/>
+                      <a:round/>
+                      <a:headEnd type="none" w="med" len="med"/>
+                      <a:tailEnd type="none" w="med" len="med"/>
+                    </a:lnL>
+                    <a:lnR w="6350" cap="flat" cmpd="sng" algn="ctr">
+                      <a:noFill/>
+                      <a:prstDash val="solid"/>
+                      <a:round/>
+                      <a:headEnd type="none" w="med" len="med"/>
+                      <a:tailEnd type="none" w="med" len="med"/>
+                    </a:lnR>
+                    <a:lnT w="6350" cap="flat" cmpd="sng" algn="ctr">
+                      <a:solidFill>
+                        <a:schemeClr val="tx1"/>
+                      </a:solidFill>
+                      <a:prstDash val="solid"/>
+                      <a:round/>
+                      <a:headEnd type="none" w="med" len="med"/>
+                      <a:tailEnd type="none" w="med" len="med"/>
+                    </a:lnT>
+                    <a:lnB w="6350" cap="flat" cmpd="sng" algn="ctr">
+                      <a:solidFill>
+                        <a:schemeClr val="tx1"/>
+                      </a:solidFill>
+                      <a:prstDash val="solid"/>
+                      <a:round/>
+                      <a:headEnd type="none" w="med" len="med"/>
+                      <a:tailEnd type="none" w="med" len="med"/>
+                    </a:lnB>
+                    <a:lnTlToBr w="12700" cmpd="sng">
+                      <a:noFill/>
+                      <a:prstDash val="solid"/>
+                    </a:lnTlToBr>
+                    <a:lnBlToTr w="12700" cmpd="sng">
+                      <a:noFill/>
+                      <a:prstDash val="solid"/>
+                    </a:lnBlToTr>
+                    <a:solidFill>
+                      <a:schemeClr val="bg1"/>
+                    </a:solidFill>
+                  </a:tcPr>
+                </a:tc>
+                <a:tc>
+                  <a:txBody>
+                    <a:bodyPr/>
+                    <a:lstStyle/>
+                    <a:p>
+                      <a:pPr algn="ctr" latinLnBrk="1"/>
+                      <a:endParaRPr lang="ko-KR" altLang="en-US" dirty="0"/>
+                    </a:p>
+                  </a:txBody>
+                  <a:tcPr>
+                    <a:lnL w="6350" cap="flat" cmpd="sng" algn="ctr">
+                      <a:noFill/>
+                      <a:prstDash val="solid"/>
+                      <a:round/>
+                      <a:headEnd type="none" w="med" len="med"/>
+                      <a:tailEnd type="none" w="med" len="med"/>
+                    </a:lnL>
+                    <a:lnR w="6350" cap="flat" cmpd="sng" algn="ctr">
+                      <a:noFill/>
+                      <a:prstDash val="solid"/>
+                      <a:round/>
+                      <a:headEnd type="none" w="med" len="med"/>
+                      <a:tailEnd type="none" w="med" len="med"/>
+                    </a:lnR>
+                    <a:lnT w="6350" cap="flat" cmpd="sng" algn="ctr">
+                      <a:solidFill>
+                        <a:schemeClr val="tx1"/>
+                      </a:solidFill>
+                      <a:prstDash val="solid"/>
+                      <a:round/>
+                      <a:headEnd type="none" w="med" len="med"/>
+                      <a:tailEnd type="none" w="med" len="med"/>
+                    </a:lnT>
+                    <a:lnB w="6350" cap="flat" cmpd="sng" algn="ctr">
+                      <a:solidFill>
+                        <a:schemeClr val="tx1"/>
+                      </a:solidFill>
+                      <a:prstDash val="solid"/>
+                      <a:round/>
+                      <a:headEnd type="none" w="med" len="med"/>
+                      <a:tailEnd type="none" w="med" len="med"/>
+                    </a:lnB>
+                    <a:lnTlToBr w="12700" cmpd="sng">
+                      <a:noFill/>
+                      <a:prstDash val="solid"/>
+                    </a:lnTlToBr>
+                    <a:lnBlToTr w="12700" cmpd="sng">
+                      <a:noFill/>
+                      <a:prstDash val="solid"/>
+                    </a:lnBlToTr>
+                    <a:solidFill>
+                      <a:schemeClr val="bg1"/>
+                    </a:solidFill>
+                  </a:tcPr>
+                </a:tc>
+                <a:extLst>
+                  <a:ext uri="{0D108BD9-81ED-4DB2-BD59-A6C34878D82A}">
+                    <a16:rowId xmlns:a16="http://schemas.microsoft.com/office/drawing/2014/main" val="3098647490"/>
+                  </a:ext>
+                </a:extLst>
+              </a:tr>
+              <a:tr h="0">
+                <a:tc>
+                  <a:txBody>
+                    <a:bodyPr/>
+                    <a:lstStyle/>
+                    <a:p>
+                      <a:pPr algn="ctr" latinLnBrk="1"/>
+                      <a:r>
+                        <a:rPr lang="en-US" altLang="ko-KR" dirty="0"/>
+                        <a:t>7</a:t>
+                      </a:r>
+                      <a:endParaRPr lang="ko-KR" altLang="en-US" dirty="0"/>
+                    </a:p>
+                  </a:txBody>
+                  <a:tcPr>
+                    <a:lnL w="6350" cap="flat" cmpd="sng" algn="ctr">
+                      <a:noFill/>
+                      <a:prstDash val="solid"/>
+                      <a:round/>
+                      <a:headEnd type="none" w="med" len="med"/>
+                      <a:tailEnd type="none" w="med" len="med"/>
+                    </a:lnL>
+                    <a:lnR w="6350" cap="flat" cmpd="sng" algn="ctr">
+                      <a:noFill/>
+                      <a:prstDash val="solid"/>
+                      <a:round/>
+                      <a:headEnd type="none" w="med" len="med"/>
+                      <a:tailEnd type="none" w="med" len="med"/>
+                    </a:lnR>
+                    <a:lnT w="6350" cap="flat" cmpd="sng" algn="ctr">
+                      <a:solidFill>
+                        <a:schemeClr val="tx1"/>
+                      </a:solidFill>
+                      <a:prstDash val="solid"/>
+                      <a:round/>
+                      <a:headEnd type="none" w="med" len="med"/>
+                      <a:tailEnd type="none" w="med" len="med"/>
+                    </a:lnT>
+                    <a:lnB w="6350" cap="flat" cmpd="sng" algn="ctr">
+                      <a:solidFill>
+                        <a:schemeClr val="tx1"/>
+                      </a:solidFill>
+                      <a:prstDash val="solid"/>
+                      <a:round/>
+                      <a:headEnd type="none" w="med" len="med"/>
+                      <a:tailEnd type="none" w="med" len="med"/>
+                    </a:lnB>
+                    <a:lnTlToBr w="12700" cmpd="sng">
+                      <a:noFill/>
+                      <a:prstDash val="solid"/>
+                    </a:lnTlToBr>
+                    <a:lnBlToTr w="12700" cmpd="sng">
+                      <a:noFill/>
+                      <a:prstDash val="solid"/>
+                    </a:lnBlToTr>
+                    <a:solidFill>
+                      <a:schemeClr val="bg1"/>
+                    </a:solidFill>
+                  </a:tcPr>
+                </a:tc>
+                <a:tc>
+                  <a:txBody>
+                    <a:bodyPr/>
+                    <a:lstStyle/>
+                    <a:p>
+                      <a:pPr algn="ctr" latinLnBrk="1"/>
+                      <a:endParaRPr lang="ko-KR" altLang="en-US" dirty="0"/>
+                    </a:p>
+                  </a:txBody>
+                  <a:tcPr>
+                    <a:lnL w="6350" cap="flat" cmpd="sng" algn="ctr">
+                      <a:noFill/>
+                      <a:prstDash val="solid"/>
+                      <a:round/>
+                      <a:headEnd type="none" w="med" len="med"/>
+                      <a:tailEnd type="none" w="med" len="med"/>
+                    </a:lnL>
+                    <a:lnR w="6350" cap="flat" cmpd="sng" algn="ctr">
+                      <a:noFill/>
+                      <a:prstDash val="solid"/>
+                      <a:round/>
+                      <a:headEnd type="none" w="med" len="med"/>
+                      <a:tailEnd type="none" w="med" len="med"/>
+                    </a:lnR>
+                    <a:lnT w="6350" cap="flat" cmpd="sng" algn="ctr">
+                      <a:solidFill>
+                        <a:schemeClr val="tx1"/>
+                      </a:solidFill>
+                      <a:prstDash val="solid"/>
+                      <a:round/>
+                      <a:headEnd type="none" w="med" len="med"/>
+                      <a:tailEnd type="none" w="med" len="med"/>
+                    </a:lnT>
+                    <a:lnB w="6350" cap="flat" cmpd="sng" algn="ctr">
+                      <a:solidFill>
+                        <a:schemeClr val="tx1"/>
+                      </a:solidFill>
+                      <a:prstDash val="solid"/>
+                      <a:round/>
+                      <a:headEnd type="none" w="med" len="med"/>
+                      <a:tailEnd type="none" w="med" len="med"/>
+                    </a:lnB>
+                    <a:lnTlToBr w="12700" cmpd="sng">
+                      <a:noFill/>
+                      <a:prstDash val="solid"/>
+                    </a:lnTlToBr>
+                    <a:lnBlToTr w="12700" cmpd="sng">
+                      <a:noFill/>
+                      <a:prstDash val="solid"/>
+                    </a:lnBlToTr>
+                    <a:solidFill>
+                      <a:schemeClr val="bg1"/>
+                    </a:solidFill>
+                  </a:tcPr>
+                </a:tc>
+                <a:tc>
+                  <a:txBody>
+                    <a:bodyPr/>
+                    <a:lstStyle/>
+                    <a:p>
+                      <a:pPr algn="ctr" latinLnBrk="1"/>
+                      <a:endParaRPr lang="ko-KR" altLang="en-US" dirty="0"/>
+                    </a:p>
+                  </a:txBody>
+                  <a:tcPr>
+                    <a:lnL w="6350" cap="flat" cmpd="sng" algn="ctr">
+                      <a:noFill/>
+                      <a:prstDash val="solid"/>
+                      <a:round/>
+                      <a:headEnd type="none" w="med" len="med"/>
+                      <a:tailEnd type="none" w="med" len="med"/>
+                    </a:lnL>
+                    <a:lnR w="6350" cap="flat" cmpd="sng" algn="ctr">
+                      <a:noFill/>
+                      <a:prstDash val="solid"/>
+                      <a:round/>
+                      <a:headEnd type="none" w="med" len="med"/>
+                      <a:tailEnd type="none" w="med" len="med"/>
+                    </a:lnR>
+                    <a:lnT w="6350" cap="flat" cmpd="sng" algn="ctr">
+                      <a:solidFill>
+                        <a:schemeClr val="tx1"/>
+                      </a:solidFill>
+                      <a:prstDash val="solid"/>
+                      <a:round/>
+                      <a:headEnd type="none" w="med" len="med"/>
+                      <a:tailEnd type="none" w="med" len="med"/>
+                    </a:lnT>
+                    <a:lnB w="6350" cap="flat" cmpd="sng" algn="ctr">
+                      <a:solidFill>
+                        <a:schemeClr val="tx1"/>
+                      </a:solidFill>
+                      <a:prstDash val="solid"/>
+                      <a:round/>
+                      <a:headEnd type="none" w="med" len="med"/>
+                      <a:tailEnd type="none" w="med" len="med"/>
+                    </a:lnB>
+                    <a:lnTlToBr w="12700" cmpd="sng">
+                      <a:noFill/>
+                      <a:prstDash val="solid"/>
+                    </a:lnTlToBr>
+                    <a:lnBlToTr w="12700" cmpd="sng">
+                      <a:noFill/>
+                      <a:prstDash val="solid"/>
+                    </a:lnBlToTr>
+                    <a:solidFill>
+                      <a:schemeClr val="bg1"/>
+                    </a:solidFill>
+                  </a:tcPr>
+                </a:tc>
+                <a:tc>
+                  <a:txBody>
+                    <a:bodyPr/>
+                    <a:lstStyle/>
+                    <a:p>
+                      <a:pPr algn="ctr" latinLnBrk="1"/>
+                      <a:endParaRPr lang="ko-KR" altLang="en-US" dirty="0"/>
+                    </a:p>
+                  </a:txBody>
+                  <a:tcPr>
+                    <a:lnL w="6350" cap="flat" cmpd="sng" algn="ctr">
+                      <a:noFill/>
+                      <a:prstDash val="solid"/>
+                      <a:round/>
+                      <a:headEnd type="none" w="med" len="med"/>
+                      <a:tailEnd type="none" w="med" len="med"/>
+                    </a:lnL>
+                    <a:lnR w="6350" cap="flat" cmpd="sng" algn="ctr">
+                      <a:noFill/>
+                      <a:prstDash val="solid"/>
+                      <a:round/>
+                      <a:headEnd type="none" w="med" len="med"/>
+                      <a:tailEnd type="none" w="med" len="med"/>
+                    </a:lnR>
+                    <a:lnT w="6350" cap="flat" cmpd="sng" algn="ctr">
+                      <a:solidFill>
+                        <a:schemeClr val="tx1"/>
+                      </a:solidFill>
+                      <a:prstDash val="solid"/>
+                      <a:round/>
+                      <a:headEnd type="none" w="med" len="med"/>
+                      <a:tailEnd type="none" w="med" len="med"/>
+                    </a:lnT>
+                    <a:lnB w="6350" cap="flat" cmpd="sng" algn="ctr">
+                      <a:solidFill>
+                        <a:schemeClr val="tx1"/>
+                      </a:solidFill>
+                      <a:prstDash val="solid"/>
+                      <a:round/>
+                      <a:headEnd type="none" w="med" len="med"/>
+                      <a:tailEnd type="none" w="med" len="med"/>
+                    </a:lnB>
+                    <a:lnTlToBr w="12700" cmpd="sng">
+                      <a:noFill/>
+                      <a:prstDash val="solid"/>
+                    </a:lnTlToBr>
+                    <a:lnBlToTr w="12700" cmpd="sng">
+                      <a:noFill/>
+                      <a:prstDash val="solid"/>
+                    </a:lnBlToTr>
+                    <a:solidFill>
+                      <a:schemeClr val="bg1"/>
+                    </a:solidFill>
+                  </a:tcPr>
+                </a:tc>
+                <a:extLst>
+                  <a:ext uri="{0D108BD9-81ED-4DB2-BD59-A6C34878D82A}">
+                    <a16:rowId xmlns:a16="http://schemas.microsoft.com/office/drawing/2014/main" val="2564281786"/>
+                  </a:ext>
+                </a:extLst>
+              </a:tr>
+              <a:tr h="316671">
+                <a:tc>
+                  <a:txBody>
+                    <a:bodyPr/>
+                    <a:lstStyle/>
+                    <a:p>
+                      <a:pPr algn="ctr" latinLnBrk="1"/>
+                      <a:r>
+                        <a:rPr lang="en-US" altLang="ko-KR" dirty="0"/>
+                        <a:t>8</a:t>
+                      </a:r>
+                      <a:endParaRPr lang="ko-KR" altLang="en-US" dirty="0"/>
+                    </a:p>
+                  </a:txBody>
+                  <a:tcPr>
+                    <a:lnL w="6350" cap="flat" cmpd="sng" algn="ctr">
+                      <a:noFill/>
+                      <a:prstDash val="solid"/>
+                      <a:round/>
+                      <a:headEnd type="none" w="med" len="med"/>
+                      <a:tailEnd type="none" w="med" len="med"/>
+                    </a:lnL>
+                    <a:lnR w="6350" cap="flat" cmpd="sng" algn="ctr">
+                      <a:noFill/>
+                      <a:prstDash val="solid"/>
+                      <a:round/>
+                      <a:headEnd type="none" w="med" len="med"/>
+                      <a:tailEnd type="none" w="med" len="med"/>
+                    </a:lnR>
+                    <a:lnT w="6350" cap="flat" cmpd="sng" algn="ctr">
+                      <a:solidFill>
+                        <a:schemeClr val="tx1"/>
+                      </a:solidFill>
+                      <a:prstDash val="solid"/>
+                      <a:round/>
+                      <a:headEnd type="none" w="med" len="med"/>
+                      <a:tailEnd type="none" w="med" len="med"/>
+                    </a:lnT>
+                    <a:lnB w="6350" cap="flat" cmpd="sng" algn="ctr">
+                      <a:solidFill>
+                        <a:schemeClr val="tx1"/>
+                      </a:solidFill>
+                      <a:prstDash val="solid"/>
+                      <a:round/>
+                      <a:headEnd type="none" w="med" len="med"/>
+                      <a:tailEnd type="none" w="med" len="med"/>
+                    </a:lnB>
+                    <a:lnTlToBr w="12700" cmpd="sng">
+                      <a:noFill/>
+                      <a:prstDash val="solid"/>
+                    </a:lnTlToBr>
+                    <a:lnBlToTr w="12700" cmpd="sng">
+                      <a:noFill/>
+                      <a:prstDash val="solid"/>
+                    </a:lnBlToTr>
+                    <a:solidFill>
+                      <a:schemeClr val="bg1"/>
+                    </a:solidFill>
+                  </a:tcPr>
+                </a:tc>
+                <a:tc>
+                  <a:txBody>
+                    <a:bodyPr/>
+                    <a:lstStyle/>
+                    <a:p>
+                      <a:pPr algn="ctr" latinLnBrk="1"/>
+                      <a:endParaRPr lang="ko-KR" altLang="en-US" dirty="0"/>
+                    </a:p>
+                  </a:txBody>
+                  <a:tcPr>
+                    <a:lnL w="6350" cap="flat" cmpd="sng" algn="ctr">
+                      <a:noFill/>
+                      <a:prstDash val="solid"/>
+                      <a:round/>
+                      <a:headEnd type="none" w="med" len="med"/>
+                      <a:tailEnd type="none" w="med" len="med"/>
+                    </a:lnL>
+                    <a:lnR w="6350" cap="flat" cmpd="sng" algn="ctr">
+                      <a:noFill/>
+                      <a:prstDash val="solid"/>
+                      <a:round/>
+                      <a:headEnd type="none" w="med" len="med"/>
+                      <a:tailEnd type="none" w="med" len="med"/>
+                    </a:lnR>
+                    <a:lnT w="6350" cap="flat" cmpd="sng" algn="ctr">
+                      <a:solidFill>
+                        <a:schemeClr val="tx1"/>
+                      </a:solidFill>
+                      <a:prstDash val="solid"/>
+                      <a:round/>
+                      <a:headEnd type="none" w="med" len="med"/>
+                      <a:tailEnd type="none" w="med" len="med"/>
+                    </a:lnT>
+                    <a:lnB w="6350" cap="flat" cmpd="sng" algn="ctr">
+                      <a:solidFill>
+                        <a:schemeClr val="tx1"/>
+                      </a:solidFill>
+                      <a:prstDash val="solid"/>
+                      <a:round/>
+                      <a:headEnd type="none" w="med" len="med"/>
+                      <a:tailEnd type="none" w="med" len="med"/>
+                    </a:lnB>
+                    <a:lnTlToBr w="12700" cmpd="sng">
+                      <a:noFill/>
+                      <a:prstDash val="solid"/>
+                    </a:lnTlToBr>
+                    <a:lnBlToTr w="12700" cmpd="sng">
+                      <a:noFill/>
+                      <a:prstDash val="solid"/>
+                    </a:lnBlToTr>
+                    <a:solidFill>
+                      <a:schemeClr val="bg1"/>
+                    </a:solidFill>
+                  </a:tcPr>
+                </a:tc>
+                <a:tc>
+                  <a:txBody>
+                    <a:bodyPr/>
+                    <a:lstStyle/>
+                    <a:p>
+                      <a:pPr algn="ctr" latinLnBrk="1"/>
+                      <a:endParaRPr lang="ko-KR" altLang="en-US" dirty="0"/>
+                    </a:p>
+                  </a:txBody>
+                  <a:tcPr>
+                    <a:lnL w="6350" cap="flat" cmpd="sng" algn="ctr">
+                      <a:noFill/>
+                      <a:prstDash val="solid"/>
+                      <a:round/>
+                      <a:headEnd type="none" w="med" len="med"/>
+                      <a:tailEnd type="none" w="med" len="med"/>
+                    </a:lnL>
+                    <a:lnR w="6350" cap="flat" cmpd="sng" algn="ctr">
+                      <a:noFill/>
+                      <a:prstDash val="solid"/>
+                      <a:round/>
+                      <a:headEnd type="none" w="med" len="med"/>
+                      <a:tailEnd type="none" w="med" len="med"/>
+                    </a:lnR>
+                    <a:lnT w="6350" cap="flat" cmpd="sng" algn="ctr">
+                      <a:solidFill>
+                        <a:schemeClr val="tx1"/>
+                      </a:solidFill>
+                      <a:prstDash val="solid"/>
+                      <a:round/>
+                      <a:headEnd type="none" w="med" len="med"/>
+                      <a:tailEnd type="none" w="med" len="med"/>
+                    </a:lnT>
+                    <a:lnB w="6350" cap="flat" cmpd="sng" algn="ctr">
+                      <a:solidFill>
+                        <a:schemeClr val="tx1"/>
+                      </a:solidFill>
+                      <a:prstDash val="solid"/>
+                      <a:round/>
+                      <a:headEnd type="none" w="med" len="med"/>
+                      <a:tailEnd type="none" w="med" len="med"/>
+                    </a:lnB>
+                    <a:lnTlToBr w="12700" cmpd="sng">
+                      <a:noFill/>
+                      <a:prstDash val="solid"/>
+                    </a:lnTlToBr>
+                    <a:lnBlToTr w="12700" cmpd="sng">
+                      <a:noFill/>
+                      <a:prstDash val="solid"/>
+                    </a:lnBlToTr>
+                    <a:solidFill>
+                      <a:schemeClr val="bg1"/>
+                    </a:solidFill>
+                  </a:tcPr>
+                </a:tc>
+                <a:tc>
+                  <a:txBody>
+                    <a:bodyPr/>
+                    <a:lstStyle/>
+                    <a:p>
+                      <a:pPr algn="ctr" latinLnBrk="1"/>
+                      <a:endParaRPr lang="ko-KR" altLang="en-US" dirty="0"/>
+                    </a:p>
+                  </a:txBody>
+                  <a:tcPr>
+                    <a:lnL w="6350" cap="flat" cmpd="sng" algn="ctr">
+                      <a:noFill/>
+                      <a:prstDash val="solid"/>
+                      <a:round/>
+                      <a:headEnd type="none" w="med" len="med"/>
+                      <a:tailEnd type="none" w="med" len="med"/>
+                    </a:lnL>
+                    <a:lnR w="6350" cap="flat" cmpd="sng" algn="ctr">
+                      <a:noFill/>
+                      <a:prstDash val="solid"/>
+                      <a:round/>
+                      <a:headEnd type="none" w="med" len="med"/>
+                      <a:tailEnd type="none" w="med" len="med"/>
+                    </a:lnR>
+                    <a:lnT w="6350" cap="flat" cmpd="sng" algn="ctr">
+                      <a:solidFill>
+                        <a:schemeClr val="tx1"/>
+                      </a:solidFill>
+                      <a:prstDash val="solid"/>
+                      <a:round/>
+                      <a:headEnd type="none" w="med" len="med"/>
+                      <a:tailEnd type="none" w="med" len="med"/>
+                    </a:lnT>
+                    <a:lnB w="6350" cap="flat" cmpd="sng" algn="ctr">
+                      <a:solidFill>
+                        <a:schemeClr val="tx1"/>
+                      </a:solidFill>
+                      <a:prstDash val="solid"/>
+                      <a:round/>
+                      <a:headEnd type="none" w="med" len="med"/>
+                      <a:tailEnd type="none" w="med" len="med"/>
+                    </a:lnB>
+                    <a:lnTlToBr w="12700" cmpd="sng">
+                      <a:noFill/>
+                      <a:prstDash val="solid"/>
+                    </a:lnTlToBr>
+                    <a:lnBlToTr w="12700" cmpd="sng">
+                      <a:noFill/>
+                      <a:prstDash val="solid"/>
+                    </a:lnBlToTr>
+                    <a:solidFill>
+                      <a:schemeClr val="bg1"/>
+                    </a:solidFill>
+                  </a:tcPr>
+                </a:tc>
+                <a:extLst>
+                  <a:ext uri="{0D108BD9-81ED-4DB2-BD59-A6C34878D82A}">
+                    <a16:rowId xmlns:a16="http://schemas.microsoft.com/office/drawing/2014/main" val="2360298859"/>
+                  </a:ext>
+                </a:extLst>
+              </a:tr>
+              <a:tr h="316671">
+                <a:tc>
+                  <a:txBody>
+                    <a:bodyPr/>
+                    <a:lstStyle/>
+                    <a:p>
+                      <a:pPr algn="ctr" latinLnBrk="1"/>
+                      <a:r>
+                        <a:rPr lang="en-US" altLang="ko-KR" dirty="0"/>
+                        <a:t>9</a:t>
+                      </a:r>
+                      <a:endParaRPr lang="ko-KR" altLang="en-US" dirty="0"/>
+                    </a:p>
+                  </a:txBody>
+                  <a:tcPr>
+                    <a:lnL w="6350" cap="flat" cmpd="sng" algn="ctr">
+                      <a:noFill/>
+                      <a:prstDash val="solid"/>
+                      <a:round/>
+                      <a:headEnd type="none" w="med" len="med"/>
+                      <a:tailEnd type="none" w="med" len="med"/>
+                    </a:lnL>
+                    <a:lnR w="6350" cap="flat" cmpd="sng" algn="ctr">
+                      <a:noFill/>
+                      <a:prstDash val="solid"/>
+                      <a:round/>
+                      <a:headEnd type="none" w="med" len="med"/>
+                      <a:tailEnd type="none" w="med" len="med"/>
+                    </a:lnR>
+                    <a:lnT w="6350" cap="flat" cmpd="sng" algn="ctr">
+                      <a:solidFill>
+                        <a:schemeClr val="tx1"/>
+                      </a:solidFill>
+                      <a:prstDash val="solid"/>
+                      <a:round/>
+                      <a:headEnd type="none" w="med" len="med"/>
+                      <a:tailEnd type="none" w="med" len="med"/>
+                    </a:lnT>
+                    <a:lnB w="6350" cap="flat" cmpd="sng" algn="ctr">
+                      <a:solidFill>
+                        <a:schemeClr val="tx1"/>
+                      </a:solidFill>
+                      <a:prstDash val="solid"/>
+                      <a:round/>
+                      <a:headEnd type="none" w="med" len="med"/>
+                      <a:tailEnd type="none" w="med" len="med"/>
+                    </a:lnB>
+                    <a:lnTlToBr w="12700" cmpd="sng">
+                      <a:noFill/>
+                      <a:prstDash val="solid"/>
+                    </a:lnTlToBr>
+                    <a:lnBlToTr w="12700" cmpd="sng">
+                      <a:noFill/>
+                      <a:prstDash val="solid"/>
+                    </a:lnBlToTr>
+                    <a:solidFill>
+                      <a:schemeClr val="bg1"/>
+                    </a:solidFill>
+                  </a:tcPr>
+                </a:tc>
+                <a:tc>
+                  <a:txBody>
+                    <a:bodyPr/>
+                    <a:lstStyle/>
+                    <a:p>
+                      <a:pPr algn="ctr" latinLnBrk="1"/>
+                      <a:endParaRPr lang="ko-KR" altLang="en-US" dirty="0"/>
+                    </a:p>
+                  </a:txBody>
+                  <a:tcPr>
+                    <a:lnL w="6350" cap="flat" cmpd="sng" algn="ctr">
+                      <a:noFill/>
+                      <a:prstDash val="solid"/>
+                      <a:round/>
+                      <a:headEnd type="none" w="med" len="med"/>
+                      <a:tailEnd type="none" w="med" len="med"/>
+                    </a:lnL>
+                    <a:lnR w="6350" cap="flat" cmpd="sng" algn="ctr">
+                      <a:noFill/>
+                      <a:prstDash val="solid"/>
+                      <a:round/>
+                      <a:headEnd type="none" w="med" len="med"/>
+                      <a:tailEnd type="none" w="med" len="med"/>
+                    </a:lnR>
+                    <a:lnT w="6350" cap="flat" cmpd="sng" algn="ctr">
+                      <a:solidFill>
+                        <a:schemeClr val="tx1"/>
+                      </a:solidFill>
+                      <a:prstDash val="solid"/>
+                      <a:round/>
+                      <a:headEnd type="none" w="med" len="med"/>
+                      <a:tailEnd type="none" w="med" len="med"/>
+                    </a:lnT>
+                    <a:lnB w="6350" cap="flat" cmpd="sng" algn="ctr">
+                      <a:solidFill>
+                        <a:schemeClr val="tx1"/>
+                      </a:solidFill>
+                      <a:prstDash val="solid"/>
+                      <a:round/>
+                      <a:headEnd type="none" w="med" len="med"/>
+                      <a:tailEnd type="none" w="med" len="med"/>
+                    </a:lnB>
+                    <a:lnTlToBr w="12700" cmpd="sng">
+                      <a:noFill/>
+                      <a:prstDash val="solid"/>
+                    </a:lnTlToBr>
+                    <a:lnBlToTr w="12700" cmpd="sng">
+                      <a:noFill/>
+                      <a:prstDash val="solid"/>
+                    </a:lnBlToTr>
+                    <a:solidFill>
+                      <a:schemeClr val="bg1"/>
+                    </a:solidFill>
+                  </a:tcPr>
+                </a:tc>
+                <a:tc>
+                  <a:txBody>
+                    <a:bodyPr/>
+                    <a:lstStyle/>
+                    <a:p>
+                      <a:pPr algn="ctr" latinLnBrk="1"/>
+                      <a:endParaRPr lang="ko-KR" altLang="en-US" dirty="0"/>
+                    </a:p>
+                  </a:txBody>
+                  <a:tcPr>
+                    <a:lnL w="6350" cap="flat" cmpd="sng" algn="ctr">
+                      <a:noFill/>
+                      <a:prstDash val="solid"/>
+                      <a:round/>
+                      <a:headEnd type="none" w="med" len="med"/>
+                      <a:tailEnd type="none" w="med" len="med"/>
+                    </a:lnL>
+                    <a:lnR w="6350" cap="flat" cmpd="sng" algn="ctr">
+                      <a:noFill/>
+                      <a:prstDash val="solid"/>
+                      <a:round/>
+                      <a:headEnd type="none" w="med" len="med"/>
+                      <a:tailEnd type="none" w="med" len="med"/>
+                    </a:lnR>
+                    <a:lnT w="6350" cap="flat" cmpd="sng" algn="ctr">
+                      <a:solidFill>
+                        <a:schemeClr val="tx1"/>
+                      </a:solidFill>
+                      <a:prstDash val="solid"/>
+                      <a:round/>
+                      <a:headEnd type="none" w="med" len="med"/>
+                      <a:tailEnd type="none" w="med" len="med"/>
+                    </a:lnT>
+                    <a:lnB w="6350" cap="flat" cmpd="sng" algn="ctr">
+                      <a:solidFill>
+                        <a:schemeClr val="tx1"/>
+                      </a:solidFill>
+                      <a:prstDash val="solid"/>
+                      <a:round/>
+                      <a:headEnd type="none" w="med" len="med"/>
+                      <a:tailEnd type="none" w="med" len="med"/>
+                    </a:lnB>
+                    <a:lnTlToBr w="12700" cmpd="sng">
+                      <a:noFill/>
+                      <a:prstDash val="solid"/>
+                    </a:lnTlToBr>
+                    <a:lnBlToTr w="12700" cmpd="sng">
+                      <a:noFill/>
+                      <a:prstDash val="solid"/>
+                    </a:lnBlToTr>
+                    <a:solidFill>
+                      <a:schemeClr val="bg1"/>
+                    </a:solidFill>
+                  </a:tcPr>
+                </a:tc>
+                <a:tc>
+                  <a:txBody>
+                    <a:bodyPr/>
+                    <a:lstStyle/>
+                    <a:p>
+                      <a:pPr algn="ctr" latinLnBrk="1"/>
+                      <a:endParaRPr lang="ko-KR" altLang="en-US" dirty="0"/>
+                    </a:p>
+                  </a:txBody>
+                  <a:tcPr>
+                    <a:lnL w="6350" cap="flat" cmpd="sng" algn="ctr">
+                      <a:noFill/>
+                      <a:prstDash val="solid"/>
+                      <a:round/>
+                      <a:headEnd type="none" w="med" len="med"/>
+                      <a:tailEnd type="none" w="med" len="med"/>
+                    </a:lnL>
+                    <a:lnR w="6350" cap="flat" cmpd="sng" algn="ctr">
+                      <a:noFill/>
+                      <a:prstDash val="solid"/>
+                      <a:round/>
+                      <a:headEnd type="none" w="med" len="med"/>
+                      <a:tailEnd type="none" w="med" len="med"/>
+                    </a:lnR>
+                    <a:lnT w="6350" cap="flat" cmpd="sng" algn="ctr">
+                      <a:solidFill>
+                        <a:schemeClr val="tx1"/>
+                      </a:solidFill>
+                      <a:prstDash val="solid"/>
+                      <a:round/>
+                      <a:headEnd type="none" w="med" len="med"/>
+                      <a:tailEnd type="none" w="med" len="med"/>
+                    </a:lnT>
+                    <a:lnB w="6350" cap="flat" cmpd="sng" algn="ctr">
+                      <a:solidFill>
+                        <a:schemeClr val="tx1"/>
+                      </a:solidFill>
+                      <a:prstDash val="solid"/>
+                      <a:round/>
+                      <a:headEnd type="none" w="med" len="med"/>
+                      <a:tailEnd type="none" w="med" len="med"/>
+                    </a:lnB>
+                    <a:lnTlToBr w="12700" cmpd="sng">
+                      <a:noFill/>
+                      <a:prstDash val="solid"/>
+                    </a:lnTlToBr>
+                    <a:lnBlToTr w="12700" cmpd="sng">
+                      <a:noFill/>
+                      <a:prstDash val="solid"/>
+                    </a:lnBlToTr>
+                    <a:solidFill>
+                      <a:schemeClr val="bg1"/>
+                    </a:solidFill>
+                  </a:tcPr>
+                </a:tc>
+                <a:extLst>
+                  <a:ext uri="{0D108BD9-81ED-4DB2-BD59-A6C34878D82A}">
+                    <a16:rowId xmlns:a16="http://schemas.microsoft.com/office/drawing/2014/main" val="1683712197"/>
+                  </a:ext>
+                </a:extLst>
+              </a:tr>
+              <a:tr h="316671">
+                <a:tc>
+                  <a:txBody>
+                    <a:bodyPr/>
+                    <a:lstStyle/>
+                    <a:p>
+                      <a:pPr algn="ctr" latinLnBrk="1"/>
+                      <a:r>
+                        <a:rPr lang="en-US" altLang="ko-KR" dirty="0"/>
+                        <a:t>10</a:t>
+                      </a:r>
+                      <a:endParaRPr lang="ko-KR" altLang="en-US" dirty="0"/>
+                    </a:p>
+                  </a:txBody>
+                  <a:tcPr>
+                    <a:lnL w="6350" cap="flat" cmpd="sng" algn="ctr">
+                      <a:noFill/>
+                      <a:prstDash val="solid"/>
+                      <a:round/>
+                      <a:headEnd type="none" w="med" len="med"/>
+                      <a:tailEnd type="none" w="med" len="med"/>
+                    </a:lnL>
+                    <a:lnR w="6350" cap="flat" cmpd="sng" algn="ctr">
+                      <a:noFill/>
+                      <a:prstDash val="solid"/>
+                      <a:round/>
+                      <a:headEnd type="none" w="med" len="med"/>
+                      <a:tailEnd type="none" w="med" len="med"/>
+                    </a:lnR>
+                    <a:lnT w="6350" cap="flat" cmpd="sng" algn="ctr">
+                      <a:solidFill>
+                        <a:schemeClr val="tx1"/>
+                      </a:solidFill>
+                      <a:prstDash val="solid"/>
+                      <a:round/>
+                      <a:headEnd type="none" w="med" len="med"/>
+                      <a:tailEnd type="none" w="med" len="med"/>
+                    </a:lnT>
+                    <a:lnB w="6350" cap="flat" cmpd="sng" algn="ctr">
+                      <a:solidFill>
+                        <a:schemeClr val="tx1"/>
+                      </a:solidFill>
+                      <a:prstDash val="solid"/>
+                      <a:round/>
+                      <a:headEnd type="none" w="med" len="med"/>
+                      <a:tailEnd type="none" w="med" len="med"/>
+                    </a:lnB>
+                    <a:lnTlToBr w="12700" cmpd="sng">
+                      <a:noFill/>
+                      <a:prstDash val="solid"/>
+                    </a:lnTlToBr>
+                    <a:lnBlToTr w="12700" cmpd="sng">
+                      <a:noFill/>
+                      <a:prstDash val="solid"/>
+                    </a:lnBlToTr>
+                    <a:solidFill>
+                      <a:schemeClr val="bg1"/>
+                    </a:solidFill>
+                  </a:tcPr>
+                </a:tc>
+                <a:tc>
+                  <a:txBody>
+                    <a:bodyPr/>
+                    <a:lstStyle/>
+                    <a:p>
+                      <a:pPr algn="ctr" latinLnBrk="1"/>
+                      <a:endParaRPr lang="ko-KR" altLang="en-US" dirty="0"/>
+                    </a:p>
+                  </a:txBody>
+                  <a:tcPr>
+                    <a:lnL w="6350" cap="flat" cmpd="sng" algn="ctr">
+                      <a:noFill/>
+                      <a:prstDash val="solid"/>
+                      <a:round/>
+                      <a:headEnd type="none" w="med" len="med"/>
+                      <a:tailEnd type="none" w="med" len="med"/>
+                    </a:lnL>
+                    <a:lnR w="6350" cap="flat" cmpd="sng" algn="ctr">
+                      <a:noFill/>
+                      <a:prstDash val="solid"/>
+                      <a:round/>
+                      <a:headEnd type="none" w="med" len="med"/>
+                      <a:tailEnd type="none" w="med" len="med"/>
+                    </a:lnR>
+                    <a:lnT w="6350" cap="flat" cmpd="sng" algn="ctr">
+                      <a:solidFill>
+                        <a:schemeClr val="tx1"/>
+                      </a:solidFill>
+                      <a:prstDash val="solid"/>
+                      <a:round/>
+                      <a:headEnd type="none" w="med" len="med"/>
+                      <a:tailEnd type="none" w="med" len="med"/>
+                    </a:lnT>
+                    <a:lnB w="6350" cap="flat" cmpd="sng" algn="ctr">
+                      <a:solidFill>
+                        <a:schemeClr val="tx1"/>
+                      </a:solidFill>
+                      <a:prstDash val="solid"/>
+                      <a:round/>
+                      <a:headEnd type="none" w="med" len="med"/>
+                      <a:tailEnd type="none" w="med" len="med"/>
+                    </a:lnB>
+                    <a:lnTlToBr w="12700" cmpd="sng">
+                      <a:noFill/>
+                      <a:prstDash val="solid"/>
+                    </a:lnTlToBr>
+                    <a:lnBlToTr w="12700" cmpd="sng">
+                      <a:noFill/>
+                      <a:prstDash val="solid"/>
+                    </a:lnBlToTr>
+                    <a:solidFill>
+                      <a:schemeClr val="bg1"/>
+                    </a:solidFill>
+                  </a:tcPr>
+                </a:tc>
+                <a:tc>
+                  <a:txBody>
+                    <a:bodyPr/>
+                    <a:lstStyle/>
+                    <a:p>
+                      <a:pPr algn="ctr" latinLnBrk="1"/>
+                      <a:endParaRPr lang="ko-KR" altLang="en-US" dirty="0"/>
+                    </a:p>
+                  </a:txBody>
+                  <a:tcPr>
+                    <a:lnL w="6350" cap="flat" cmpd="sng" algn="ctr">
+                      <a:noFill/>
+                      <a:prstDash val="solid"/>
+                      <a:round/>
+                      <a:headEnd type="none" w="med" len="med"/>
+                      <a:tailEnd type="none" w="med" len="med"/>
+                    </a:lnL>
+                    <a:lnR w="6350" cap="flat" cmpd="sng" algn="ctr">
+                      <a:noFill/>
+                      <a:prstDash val="solid"/>
+                      <a:round/>
+                      <a:headEnd type="none" w="med" len="med"/>
+                      <a:tailEnd type="none" w="med" len="med"/>
+                    </a:lnR>
+                    <a:lnT w="6350" cap="flat" cmpd="sng" algn="ctr">
+                      <a:solidFill>
+                        <a:schemeClr val="tx1"/>
+                      </a:solidFill>
+                      <a:prstDash val="solid"/>
+                      <a:round/>
+                      <a:headEnd type="none" w="med" len="med"/>
+                      <a:tailEnd type="none" w="med" len="med"/>
+                    </a:lnT>
+                    <a:lnB w="6350" cap="flat" cmpd="sng" algn="ctr">
+                      <a:solidFill>
+                        <a:schemeClr val="tx1"/>
+                      </a:solidFill>
+                      <a:prstDash val="solid"/>
+                      <a:round/>
+                      <a:headEnd type="none" w="med" len="med"/>
+                      <a:tailEnd type="none" w="med" len="med"/>
+                    </a:lnB>
+                    <a:lnTlToBr w="12700" cmpd="sng">
+                      <a:noFill/>
+                      <a:prstDash val="solid"/>
+                    </a:lnTlToBr>
+                    <a:lnBlToTr w="12700" cmpd="sng">
+                      <a:noFill/>
+                      <a:prstDash val="solid"/>
+                    </a:lnBlToTr>
+                    <a:solidFill>
+                      <a:schemeClr val="bg1"/>
+                    </a:solidFill>
+                  </a:tcPr>
+                </a:tc>
+                <a:tc>
+                  <a:txBody>
+                    <a:bodyPr/>
+                    <a:lstStyle/>
+                    <a:p>
+                      <a:pPr algn="ctr" latinLnBrk="1"/>
+                      <a:endParaRPr lang="ko-KR" altLang="en-US" dirty="0"/>
+                    </a:p>
+                  </a:txBody>
+                  <a:tcPr>
+                    <a:lnL w="6350" cap="flat" cmpd="sng" algn="ctr">
+                      <a:noFill/>
+                      <a:prstDash val="solid"/>
+                      <a:round/>
+                      <a:headEnd type="none" w="med" len="med"/>
+                      <a:tailEnd type="none" w="med" len="med"/>
+                    </a:lnL>
+                    <a:lnR w="6350" cap="flat" cmpd="sng" algn="ctr">
+                      <a:noFill/>
+                      <a:prstDash val="solid"/>
+                      <a:round/>
+                      <a:headEnd type="none" w="med" len="med"/>
+                      <a:tailEnd type="none" w="med" len="med"/>
+                    </a:lnR>
+                    <a:lnT w="6350" cap="flat" cmpd="sng" algn="ctr">
+                      <a:solidFill>
+                        <a:schemeClr val="tx1"/>
+                      </a:solidFill>
+                      <a:prstDash val="solid"/>
+                      <a:round/>
+                      <a:headEnd type="none" w="med" len="med"/>
+                      <a:tailEnd type="none" w="med" len="med"/>
+                    </a:lnT>
+                    <a:lnB w="6350" cap="flat" cmpd="sng" algn="ctr">
+                      <a:solidFill>
+                        <a:schemeClr val="tx1"/>
+                      </a:solidFill>
+                      <a:prstDash val="solid"/>
+                      <a:round/>
+                      <a:headEnd type="none" w="med" len="med"/>
+                      <a:tailEnd type="none" w="med" len="med"/>
+                    </a:lnB>
+                    <a:lnTlToBr w="12700" cmpd="sng">
+                      <a:noFill/>
+                      <a:prstDash val="solid"/>
+                    </a:lnTlToBr>
+                    <a:lnBlToTr w="12700" cmpd="sng">
+                      <a:noFill/>
+                      <a:prstDash val="solid"/>
+                    </a:lnBlToTr>
+                    <a:solidFill>
+                      <a:schemeClr val="bg1"/>
+                    </a:solidFill>
+                  </a:tcPr>
+                </a:tc>
+                <a:extLst>
+                  <a:ext uri="{0D108BD9-81ED-4DB2-BD59-A6C34878D82A}">
+                    <a16:rowId xmlns:a16="http://schemas.microsoft.com/office/drawing/2014/main" val="526310468"/>
+                  </a:ext>
+                </a:extLst>
+              </a:tr>
+              <a:tr h="316671">
+                <a:tc>
+                  <a:txBody>
+                    <a:bodyPr/>
+                    <a:lstStyle/>
+                    <a:p>
+                      <a:pPr algn="ctr" latinLnBrk="1"/>
+                      <a:r>
+                        <a:rPr lang="en-US" altLang="ko-KR" dirty="0"/>
+                        <a:t>11</a:t>
+                      </a:r>
+                      <a:endParaRPr lang="ko-KR" altLang="en-US" dirty="0"/>
+                    </a:p>
+                  </a:txBody>
+                  <a:tcPr>
+                    <a:lnL w="6350" cap="flat" cmpd="sng" algn="ctr">
+                      <a:noFill/>
+                      <a:prstDash val="solid"/>
+                      <a:round/>
+                      <a:headEnd type="none" w="med" len="med"/>
+                      <a:tailEnd type="none" w="med" len="med"/>
+                    </a:lnL>
+                    <a:lnR w="6350" cap="flat" cmpd="sng" algn="ctr">
+                      <a:noFill/>
+                      <a:prstDash val="solid"/>
+                      <a:round/>
+                      <a:headEnd type="none" w="med" len="med"/>
+                      <a:tailEnd type="none" w="med" len="med"/>
+                    </a:lnR>
+                    <a:lnT w="6350" cap="flat" cmpd="sng" algn="ctr">
+                      <a:solidFill>
+                        <a:schemeClr val="tx1"/>
+                      </a:solidFill>
+                      <a:prstDash val="solid"/>
+                      <a:round/>
+                      <a:headEnd type="none" w="med" len="med"/>
+                      <a:tailEnd type="none" w="med" len="med"/>
+                    </a:lnT>
+                    <a:lnB w="6350" cap="flat" cmpd="sng" algn="ctr">
+                      <a:solidFill>
+                        <a:schemeClr val="tx1"/>
+                      </a:solidFill>
+                      <a:prstDash val="solid"/>
+                      <a:round/>
+                      <a:headEnd type="none" w="med" len="med"/>
+                      <a:tailEnd type="none" w="med" len="med"/>
+                    </a:lnB>
+                    <a:lnTlToBr w="12700" cmpd="sng">
+                      <a:noFill/>
+                      <a:prstDash val="solid"/>
+                    </a:lnTlToBr>
+                    <a:lnBlToTr w="12700" cmpd="sng">
+                      <a:noFill/>
+                      <a:prstDash val="solid"/>
+                    </a:lnBlToTr>
+                    <a:solidFill>
+                      <a:schemeClr val="bg1"/>
+                    </a:solidFill>
+                  </a:tcPr>
+                </a:tc>
+                <a:tc>
+                  <a:txBody>
+                    <a:bodyPr/>
+                    <a:lstStyle/>
+                    <a:p>
+                      <a:pPr algn="ctr" latinLnBrk="1"/>
+                      <a:endParaRPr lang="ko-KR" altLang="en-US" dirty="0"/>
+                    </a:p>
+                  </a:txBody>
+                  <a:tcPr>
+                    <a:lnL w="6350" cap="flat" cmpd="sng" algn="ctr">
+                      <a:noFill/>
+                      <a:prstDash val="solid"/>
+                      <a:round/>
+                      <a:headEnd type="none" w="med" len="med"/>
+                      <a:tailEnd type="none" w="med" len="med"/>
+                    </a:lnL>
+                    <a:lnR w="6350" cap="flat" cmpd="sng" algn="ctr">
+                      <a:noFill/>
+                      <a:prstDash val="solid"/>
+                      <a:round/>
+                      <a:headEnd type="none" w="med" len="med"/>
+                      <a:tailEnd type="none" w="med" len="med"/>
+                    </a:lnR>
+                    <a:lnT w="6350" cap="flat" cmpd="sng" algn="ctr">
+                      <a:solidFill>
+                        <a:schemeClr val="tx1"/>
+                      </a:solidFill>
+                      <a:prstDash val="solid"/>
+                      <a:round/>
+                      <a:headEnd type="none" w="med" len="med"/>
+                      <a:tailEnd type="none" w="med" len="med"/>
+                    </a:lnT>
+                    <a:lnB w="6350" cap="flat" cmpd="sng" algn="ctr">
+                      <a:solidFill>
+                        <a:schemeClr val="tx1"/>
+                      </a:solidFill>
+                      <a:prstDash val="solid"/>
+                      <a:round/>
+                      <a:headEnd type="none" w="med" len="med"/>
+                      <a:tailEnd type="none" w="med" len="med"/>
+                    </a:lnB>
+                    <a:lnTlToBr w="12700" cmpd="sng">
+                      <a:noFill/>
+                      <a:prstDash val="solid"/>
+                    </a:lnTlToBr>
+                    <a:lnBlToTr w="12700" cmpd="sng">
+                      <a:noFill/>
+                      <a:prstDash val="solid"/>
+                    </a:lnBlToTr>
+                    <a:solidFill>
+                      <a:schemeClr val="bg1"/>
+                    </a:solidFill>
+                  </a:tcPr>
+                </a:tc>
+                <a:tc>
+                  <a:txBody>
+                    <a:bodyPr/>
+                    <a:lstStyle/>
+                    <a:p>
+                      <a:pPr algn="ctr" latinLnBrk="1"/>
+                      <a:endParaRPr lang="ko-KR" altLang="en-US" dirty="0"/>
+                    </a:p>
+                  </a:txBody>
+                  <a:tcPr>
+                    <a:lnL w="6350" cap="flat" cmpd="sng" algn="ctr">
+                      <a:noFill/>
+                      <a:prstDash val="solid"/>
+                      <a:round/>
+                      <a:headEnd type="none" w="med" len="med"/>
+                      <a:tailEnd type="none" w="med" len="med"/>
+                    </a:lnL>
+                    <a:lnR w="6350" cap="flat" cmpd="sng" algn="ctr">
+                      <a:noFill/>
+                      <a:prstDash val="solid"/>
+                      <a:round/>
+                      <a:headEnd type="none" w="med" len="med"/>
+                      <a:tailEnd type="none" w="med" len="med"/>
+                    </a:lnR>
+                    <a:lnT w="6350" cap="flat" cmpd="sng" algn="ctr">
+                      <a:solidFill>
+                        <a:schemeClr val="tx1"/>
+                      </a:solidFill>
+                      <a:prstDash val="solid"/>
+                      <a:round/>
+                      <a:headEnd type="none" w="med" len="med"/>
+                      <a:tailEnd type="none" w="med" len="med"/>
+                    </a:lnT>
+                    <a:lnB w="6350" cap="flat" cmpd="sng" algn="ctr">
+                      <a:solidFill>
+                        <a:schemeClr val="tx1"/>
+                      </a:solidFill>
+                      <a:prstDash val="solid"/>
+                      <a:round/>
+                      <a:headEnd type="none" w="med" len="med"/>
+                      <a:tailEnd type="none" w="med" len="med"/>
+                    </a:lnB>
+                    <a:lnTlToBr w="12700" cmpd="sng">
+                      <a:noFill/>
+                      <a:prstDash val="solid"/>
+                    </a:lnTlToBr>
+                    <a:lnBlToTr w="12700" cmpd="sng">
+                      <a:noFill/>
+                      <a:prstDash val="solid"/>
+                    </a:lnBlToTr>
+                    <a:solidFill>
+                      <a:schemeClr val="bg1"/>
+                    </a:solidFill>
+                  </a:tcPr>
+                </a:tc>
+                <a:tc>
+                  <a:txBody>
+                    <a:bodyPr/>
+                    <a:lstStyle/>
+                    <a:p>
+                      <a:pPr algn="ctr" latinLnBrk="1"/>
+                      <a:endParaRPr lang="ko-KR" altLang="en-US" dirty="0"/>
+                    </a:p>
+                  </a:txBody>
+                  <a:tcPr>
+                    <a:lnL w="6350" cap="flat" cmpd="sng" algn="ctr">
+                      <a:noFill/>
+                      <a:prstDash val="solid"/>
+                      <a:round/>
+                      <a:headEnd type="none" w="med" len="med"/>
+                      <a:tailEnd type="none" w="med" len="med"/>
+                    </a:lnL>
+                    <a:lnR w="6350" cap="flat" cmpd="sng" algn="ctr">
+                      <a:noFill/>
+                      <a:prstDash val="solid"/>
+                      <a:round/>
+                      <a:headEnd type="none" w="med" len="med"/>
+                      <a:tailEnd type="none" w="med" len="med"/>
+                    </a:lnR>
+                    <a:lnT w="6350" cap="flat" cmpd="sng" algn="ctr">
+                      <a:solidFill>
+                        <a:schemeClr val="tx1"/>
+                      </a:solidFill>
+                      <a:prstDash val="solid"/>
+                      <a:round/>
+                      <a:headEnd type="none" w="med" len="med"/>
+                      <a:tailEnd type="none" w="med" len="med"/>
+                    </a:lnT>
+                    <a:lnB w="6350" cap="flat" cmpd="sng" algn="ctr">
+                      <a:solidFill>
+                        <a:schemeClr val="tx1"/>
+                      </a:solidFill>
+                      <a:prstDash val="solid"/>
+                      <a:round/>
+                      <a:headEnd type="none" w="med" len="med"/>
+                      <a:tailEnd type="none" w="med" len="med"/>
+                    </a:lnB>
+                    <a:lnTlToBr w="12700" cmpd="sng">
+                      <a:noFill/>
+                      <a:prstDash val="solid"/>
+                    </a:lnTlToBr>
+                    <a:lnBlToTr w="12700" cmpd="sng">
+                      <a:noFill/>
+                      <a:prstDash val="solid"/>
+                    </a:lnBlToTr>
+                    <a:solidFill>
+                      <a:schemeClr val="bg1"/>
+                    </a:solidFill>
+                  </a:tcPr>
+                </a:tc>
+                <a:extLst>
+                  <a:ext uri="{0D108BD9-81ED-4DB2-BD59-A6C34878D82A}">
+                    <a16:rowId xmlns:a16="http://schemas.microsoft.com/office/drawing/2014/main" val="3505383422"/>
+                  </a:ext>
+                </a:extLst>
+              </a:tr>
+              <a:tr h="316671">
+                <a:tc>
+                  <a:txBody>
+                    <a:bodyPr/>
+                    <a:lstStyle/>
+                    <a:p>
+                      <a:pPr algn="ctr" latinLnBrk="1"/>
+                      <a:r>
+                        <a:rPr lang="en-US" altLang="ko-KR" dirty="0"/>
+                        <a:t>12</a:t>
+                      </a:r>
+                      <a:endParaRPr lang="ko-KR" altLang="en-US" dirty="0"/>
+                    </a:p>
+                  </a:txBody>
+                  <a:tcPr>
+                    <a:lnL w="6350" cap="flat" cmpd="sng" algn="ctr">
+                      <a:noFill/>
+                      <a:prstDash val="solid"/>
+                      <a:round/>
+                      <a:headEnd type="none" w="med" len="med"/>
+                      <a:tailEnd type="none" w="med" len="med"/>
+                    </a:lnL>
+                    <a:lnR w="6350" cap="flat" cmpd="sng" algn="ctr">
+                      <a:noFill/>
+                      <a:prstDash val="solid"/>
+                      <a:round/>
+                      <a:headEnd type="none" w="med" len="med"/>
+                      <a:tailEnd type="none" w="med" len="med"/>
+                    </a:lnR>
+                    <a:lnT w="6350" cap="flat" cmpd="sng" algn="ctr">
+                      <a:solidFill>
+                        <a:schemeClr val="tx1"/>
+                      </a:solidFill>
+                      <a:prstDash val="solid"/>
+                      <a:round/>
+                      <a:headEnd type="none" w="med" len="med"/>
+                      <a:tailEnd type="none" w="med" len="med"/>
+                    </a:lnT>
+                    <a:lnB w="6350" cap="flat" cmpd="sng" algn="ctr">
+                      <a:solidFill>
+                        <a:schemeClr val="tx1"/>
+                      </a:solidFill>
+                      <a:prstDash val="solid"/>
+                      <a:round/>
+                      <a:headEnd type="none" w="med" len="med"/>
+                      <a:tailEnd type="none" w="med" len="med"/>
+                    </a:lnB>
+                    <a:lnTlToBr w="12700" cmpd="sng">
+                      <a:noFill/>
+                      <a:prstDash val="solid"/>
+                    </a:lnTlToBr>
+                    <a:lnBlToTr w="12700" cmpd="sng">
+                      <a:noFill/>
+                      <a:prstDash val="solid"/>
+                    </a:lnBlToTr>
+                    <a:solidFill>
+                      <a:schemeClr val="bg1"/>
+                    </a:solidFill>
+                  </a:tcPr>
+                </a:tc>
+                <a:tc>
+                  <a:txBody>
+                    <a:bodyPr/>
+                    <a:lstStyle/>
+                    <a:p>
+                      <a:pPr algn="ctr" latinLnBrk="1"/>
+                      <a:endParaRPr lang="ko-KR" altLang="en-US" dirty="0"/>
+                    </a:p>
+                  </a:txBody>
+                  <a:tcPr>
+                    <a:lnL w="6350" cap="flat" cmpd="sng" algn="ctr">
+                      <a:noFill/>
+                      <a:prstDash val="solid"/>
+                      <a:round/>
+                      <a:headEnd type="none" w="med" len="med"/>
+                      <a:tailEnd type="none" w="med" len="med"/>
+                    </a:lnL>
+                    <a:lnR w="6350" cap="flat" cmpd="sng" algn="ctr">
+                      <a:noFill/>
+                      <a:prstDash val="solid"/>
+                      <a:round/>
+                      <a:headEnd type="none" w="med" len="med"/>
+                      <a:tailEnd type="none" w="med" len="med"/>
+                    </a:lnR>
+                    <a:lnT w="6350" cap="flat" cmpd="sng" algn="ctr">
+                      <a:solidFill>
+                        <a:schemeClr val="tx1"/>
+                      </a:solidFill>
+                      <a:prstDash val="solid"/>
+                      <a:round/>
+                      <a:headEnd type="none" w="med" len="med"/>
+                      <a:tailEnd type="none" w="med" len="med"/>
+                    </a:lnT>
+                    <a:lnB w="6350" cap="flat" cmpd="sng" algn="ctr">
+                      <a:solidFill>
+                        <a:schemeClr val="tx1"/>
+                      </a:solidFill>
+                      <a:prstDash val="solid"/>
+                      <a:round/>
+                      <a:headEnd type="none" w="med" len="med"/>
+                      <a:tailEnd type="none" w="med" len="med"/>
+                    </a:lnB>
+                    <a:lnTlToBr w="12700" cmpd="sng">
+                      <a:noFill/>
+                      <a:prstDash val="solid"/>
+                    </a:lnTlToBr>
+                    <a:lnBlToTr w="12700" cmpd="sng">
+                      <a:noFill/>
+                      <a:prstDash val="solid"/>
+                    </a:lnBlToTr>
+                    <a:solidFill>
+                      <a:schemeClr val="bg1"/>
+                    </a:solidFill>
+                  </a:tcPr>
+                </a:tc>
+                <a:tc>
+                  <a:txBody>
+                    <a:bodyPr/>
+                    <a:lstStyle/>
+                    <a:p>
+                      <a:pPr algn="ctr" latinLnBrk="1"/>
+                      <a:endParaRPr lang="ko-KR" altLang="en-US" dirty="0"/>
+                    </a:p>
+                  </a:txBody>
+                  <a:tcPr>
+                    <a:lnL w="6350" cap="flat" cmpd="sng" algn="ctr">
+                      <a:noFill/>
+                      <a:prstDash val="solid"/>
+                      <a:round/>
+                      <a:headEnd type="none" w="med" len="med"/>
+                      <a:tailEnd type="none" w="med" len="med"/>
+                    </a:lnL>
+                    <a:lnR w="6350" cap="flat" cmpd="sng" algn="ctr">
+                      <a:noFill/>
+                      <a:prstDash val="solid"/>
+                      <a:round/>
+                      <a:headEnd type="none" w="med" len="med"/>
+                      <a:tailEnd type="none" w="med" len="med"/>
+                    </a:lnR>
+                    <a:lnT w="6350" cap="flat" cmpd="sng" algn="ctr">
+                      <a:solidFill>
+                        <a:schemeClr val="tx1"/>
+                      </a:solidFill>
+                      <a:prstDash val="solid"/>
+                      <a:round/>
+                      <a:headEnd type="none" w="med" len="med"/>
+                      <a:tailEnd type="none" w="med" len="med"/>
+                    </a:lnT>
+                    <a:lnB w="6350" cap="flat" cmpd="sng" algn="ctr">
+                      <a:solidFill>
+                        <a:schemeClr val="tx1"/>
+                      </a:solidFill>
+                      <a:prstDash val="solid"/>
+                      <a:round/>
+                      <a:headEnd type="none" w="med" len="med"/>
+                      <a:tailEnd type="none" w="med" len="med"/>
+                    </a:lnB>
+                    <a:lnTlToBr w="12700" cmpd="sng">
+                      <a:noFill/>
+                      <a:prstDash val="solid"/>
+                    </a:lnTlToBr>
+                    <a:lnBlToTr w="12700" cmpd="sng">
+                      <a:noFill/>
+                      <a:prstDash val="solid"/>
+                    </a:lnBlToTr>
+                    <a:solidFill>
+                      <a:schemeClr val="bg1"/>
+                    </a:solidFill>
+                  </a:tcPr>
+                </a:tc>
+                <a:tc>
+                  <a:txBody>
+                    <a:bodyPr/>
+                    <a:lstStyle/>
+                    <a:p>
+                      <a:pPr algn="ctr" latinLnBrk="1"/>
+                      <a:endParaRPr lang="ko-KR" altLang="en-US" dirty="0"/>
+                    </a:p>
+                  </a:txBody>
+                  <a:tcPr>
+                    <a:lnL w="6350" cap="flat" cmpd="sng" algn="ctr">
+                      <a:noFill/>
+                      <a:prstDash val="solid"/>
+                      <a:round/>
+                      <a:headEnd type="none" w="med" len="med"/>
+                      <a:tailEnd type="none" w="med" len="med"/>
+                    </a:lnL>
+                    <a:lnR w="6350" cap="flat" cmpd="sng" algn="ctr">
+                      <a:noFill/>
+                      <a:prstDash val="solid"/>
+                      <a:round/>
+                      <a:headEnd type="none" w="med" len="med"/>
+                      <a:tailEnd type="none" w="med" len="med"/>
+                    </a:lnR>
+                    <a:lnT w="6350" cap="flat" cmpd="sng" algn="ctr">
+                      <a:solidFill>
+                        <a:schemeClr val="tx1"/>
+                      </a:solidFill>
+                      <a:prstDash val="solid"/>
+                      <a:round/>
+                      <a:headEnd type="none" w="med" len="med"/>
+                      <a:tailEnd type="none" w="med" len="med"/>
+                    </a:lnT>
+                    <a:lnB w="6350" cap="flat" cmpd="sng" algn="ctr">
+                      <a:solidFill>
+                        <a:schemeClr val="tx1"/>
+                      </a:solidFill>
+                      <a:prstDash val="solid"/>
+                      <a:round/>
+                      <a:headEnd type="none" w="med" len="med"/>
+                      <a:tailEnd type="none" w="med" len="med"/>
+                    </a:lnB>
+                    <a:lnTlToBr w="12700" cmpd="sng">
+                      <a:noFill/>
+                      <a:prstDash val="solid"/>
+                    </a:lnTlToBr>
+                    <a:lnBlToTr w="12700" cmpd="sng">
+                      <a:noFill/>
+                      <a:prstDash val="solid"/>
+                    </a:lnBlToTr>
+                    <a:solidFill>
+                      <a:schemeClr val="bg1"/>
+                    </a:solidFill>
+                  </a:tcPr>
+                </a:tc>
+                <a:extLst>
+                  <a:ext uri="{0D108BD9-81ED-4DB2-BD59-A6C34878D82A}">
+                    <a16:rowId xmlns:a16="http://schemas.microsoft.com/office/drawing/2014/main" val="1237867560"/>
+                  </a:ext>
+                </a:extLst>
+              </a:tr>
+              <a:tr h="316671">
+                <a:tc>
+                  <a:txBody>
+                    <a:bodyPr/>
+                    <a:lstStyle/>
+                    <a:p>
+                      <a:pPr algn="ctr" latinLnBrk="1"/>
+                      <a:r>
+                        <a:rPr lang="en-US" altLang="ko-KR" dirty="0"/>
+                        <a:t>13</a:t>
+                      </a:r>
+                      <a:endParaRPr lang="ko-KR" altLang="en-US" dirty="0"/>
+                    </a:p>
+                  </a:txBody>
+                  <a:tcPr>
+                    <a:lnL w="6350" cap="flat" cmpd="sng" algn="ctr">
+                      <a:noFill/>
+                      <a:prstDash val="solid"/>
+                      <a:round/>
+                      <a:headEnd type="none" w="med" len="med"/>
+                      <a:tailEnd type="none" w="med" len="med"/>
+                    </a:lnL>
+                    <a:lnR w="6350" cap="flat" cmpd="sng" algn="ctr">
+                      <a:noFill/>
+                      <a:prstDash val="solid"/>
+                      <a:round/>
+                      <a:headEnd type="none" w="med" len="med"/>
+                      <a:tailEnd type="none" w="med" len="med"/>
+                    </a:lnR>
+                    <a:lnT w="6350" cap="flat" cmpd="sng" algn="ctr">
+                      <a:solidFill>
+                        <a:schemeClr val="tx1"/>
+                      </a:solidFill>
+                      <a:prstDash val="solid"/>
+                      <a:round/>
+                      <a:headEnd type="none" w="med" len="med"/>
+                      <a:tailEnd type="none" w="med" len="med"/>
+                    </a:lnT>
+                    <a:lnB w="6350" cap="flat" cmpd="sng" algn="ctr">
+                      <a:solidFill>
+                        <a:schemeClr val="tx1"/>
+                      </a:solidFill>
+                      <a:prstDash val="solid"/>
+                      <a:round/>
+                      <a:headEnd type="none" w="med" len="med"/>
+                      <a:tailEnd type="none" w="med" len="med"/>
+                    </a:lnB>
+                    <a:lnTlToBr w="12700" cmpd="sng">
+                      <a:noFill/>
+                      <a:prstDash val="solid"/>
+                    </a:lnTlToBr>
+                    <a:lnBlToTr w="12700" cmpd="sng">
+                      <a:noFill/>
+                      <a:prstDash val="solid"/>
+                    </a:lnBlToTr>
+                    <a:solidFill>
+                      <a:schemeClr val="bg1"/>
+                    </a:solidFill>
+                  </a:tcPr>
+                </a:tc>
+                <a:tc>
+                  <a:txBody>
+                    <a:bodyPr/>
+                    <a:lstStyle/>
+                    <a:p>
+                      <a:pPr algn="ctr" latinLnBrk="1"/>
+                      <a:endParaRPr lang="ko-KR" altLang="en-US" dirty="0"/>
+                    </a:p>
+                  </a:txBody>
+                  <a:tcPr>
+                    <a:lnL w="6350" cap="flat" cmpd="sng" algn="ctr">
+                      <a:noFill/>
+                      <a:prstDash val="solid"/>
+                      <a:round/>
+                      <a:headEnd type="none" w="med" len="med"/>
+                      <a:tailEnd type="none" w="med" len="med"/>
+                    </a:lnL>
+                    <a:lnR w="6350" cap="flat" cmpd="sng" algn="ctr">
+                      <a:noFill/>
+                      <a:prstDash val="solid"/>
+                      <a:round/>
+                      <a:headEnd type="none" w="med" len="med"/>
+                      <a:tailEnd type="none" w="med" len="med"/>
+                    </a:lnR>
+                    <a:lnT w="6350" cap="flat" cmpd="sng" algn="ctr">
+                      <a:solidFill>
+                        <a:schemeClr val="tx1"/>
+                      </a:solidFill>
+                      <a:prstDash val="solid"/>
+                      <a:round/>
+                      <a:headEnd type="none" w="med" len="med"/>
+                      <a:tailEnd type="none" w="med" len="med"/>
+                    </a:lnT>
+                    <a:lnB w="6350" cap="flat" cmpd="sng" algn="ctr">
+                      <a:solidFill>
+                        <a:schemeClr val="tx1"/>
+                      </a:solidFill>
+                      <a:prstDash val="solid"/>
+                      <a:round/>
+                      <a:headEnd type="none" w="med" len="med"/>
+                      <a:tailEnd type="none" w="med" len="med"/>
+                    </a:lnB>
+                    <a:lnTlToBr w="12700" cmpd="sng">
+                      <a:noFill/>
+                      <a:prstDash val="solid"/>
+                    </a:lnTlToBr>
+                    <a:lnBlToTr w="12700" cmpd="sng">
+                      <a:noFill/>
+                      <a:prstDash val="solid"/>
+                    </a:lnBlToTr>
+                    <a:solidFill>
+                      <a:schemeClr val="bg1"/>
+                    </a:solidFill>
+                  </a:tcPr>
+                </a:tc>
+                <a:tc>
+                  <a:txBody>
+                    <a:bodyPr/>
+                    <a:lstStyle/>
+                    <a:p>
+                      <a:pPr algn="ctr" latinLnBrk="1"/>
+                      <a:endParaRPr lang="ko-KR" altLang="en-US" dirty="0"/>
+                    </a:p>
+                  </a:txBody>
+                  <a:tcPr>
+                    <a:lnL w="6350" cap="flat" cmpd="sng" algn="ctr">
+                      <a:noFill/>
+                      <a:prstDash val="solid"/>
+                      <a:round/>
+                      <a:headEnd type="none" w="med" len="med"/>
+                      <a:tailEnd type="none" w="med" len="med"/>
+                    </a:lnL>
+                    <a:lnR w="6350" cap="flat" cmpd="sng" algn="ctr">
+                      <a:noFill/>
+                      <a:prstDash val="solid"/>
+                      <a:round/>
+                      <a:headEnd type="none" w="med" len="med"/>
+                      <a:tailEnd type="none" w="med" len="med"/>
+                    </a:lnR>
+                    <a:lnT w="6350" cap="flat" cmpd="sng" algn="ctr">
+                      <a:solidFill>
+                        <a:schemeClr val="tx1"/>
+                      </a:solidFill>
+                      <a:prstDash val="solid"/>
+                      <a:round/>
+                      <a:headEnd type="none" w="med" len="med"/>
+                      <a:tailEnd type="none" w="med" len="med"/>
+                    </a:lnT>
+                    <a:lnB w="6350" cap="flat" cmpd="sng" algn="ctr">
+                      <a:solidFill>
+                        <a:schemeClr val="tx1"/>
+                      </a:solidFill>
+                      <a:prstDash val="solid"/>
+                      <a:round/>
+                      <a:headEnd type="none" w="med" len="med"/>
+                      <a:tailEnd type="none" w="med" len="med"/>
+                    </a:lnB>
+                    <a:lnTlToBr w="12700" cmpd="sng">
+                      <a:noFill/>
+                      <a:prstDash val="solid"/>
+                    </a:lnTlToBr>
+                    <a:lnBlToTr w="12700" cmpd="sng">
+                      <a:noFill/>
+                      <a:prstDash val="solid"/>
+                    </a:lnBlToTr>
+                    <a:solidFill>
+                      <a:schemeClr val="bg1"/>
+                    </a:solidFill>
+                  </a:tcPr>
+                </a:tc>
+                <a:tc>
+                  <a:txBody>
+                    <a:bodyPr/>
+                    <a:lstStyle/>
+                    <a:p>
+                      <a:pPr algn="ctr" latinLnBrk="1"/>
+                      <a:endParaRPr lang="ko-KR" altLang="en-US" dirty="0"/>
+                    </a:p>
+                  </a:txBody>
+                  <a:tcPr>
+                    <a:lnL w="6350" cap="flat" cmpd="sng" algn="ctr">
+                      <a:noFill/>
+                      <a:prstDash val="solid"/>
+                      <a:round/>
+                      <a:headEnd type="none" w="med" len="med"/>
+                      <a:tailEnd type="none" w="med" len="med"/>
+                    </a:lnL>
+                    <a:lnR w="6350" cap="flat" cmpd="sng" algn="ctr">
+                      <a:noFill/>
+                      <a:prstDash val="solid"/>
+                      <a:round/>
+                      <a:headEnd type="none" w="med" len="med"/>
+                      <a:tailEnd type="none" w="med" len="med"/>
+                    </a:lnR>
+                    <a:lnT w="6350" cap="flat" cmpd="sng" algn="ctr">
+                      <a:solidFill>
+                        <a:schemeClr val="tx1"/>
+                      </a:solidFill>
+                      <a:prstDash val="solid"/>
+                      <a:round/>
+                      <a:headEnd type="none" w="med" len="med"/>
+                      <a:tailEnd type="none" w="med" len="med"/>
+                    </a:lnT>
+                    <a:lnB w="6350" cap="flat" cmpd="sng" algn="ctr">
+                      <a:solidFill>
+                        <a:schemeClr val="tx1"/>
+                      </a:solidFill>
+                      <a:prstDash val="solid"/>
+                      <a:round/>
+                      <a:headEnd type="none" w="med" len="med"/>
+                      <a:tailEnd type="none" w="med" len="med"/>
+                    </a:lnB>
+                    <a:lnTlToBr w="12700" cmpd="sng">
+                      <a:noFill/>
+                      <a:prstDash val="solid"/>
+                    </a:lnTlToBr>
+                    <a:lnBlToTr w="12700" cmpd="sng">
+                      <a:noFill/>
+                      <a:prstDash val="solid"/>
+                    </a:lnBlToTr>
+                    <a:solidFill>
+                      <a:schemeClr val="bg1"/>
+                    </a:solidFill>
+                  </a:tcPr>
+                </a:tc>
+                <a:extLst>
+                  <a:ext uri="{0D108BD9-81ED-4DB2-BD59-A6C34878D82A}">
+                    <a16:rowId xmlns:a16="http://schemas.microsoft.com/office/drawing/2014/main" val="4217511681"/>
+                  </a:ext>
+                </a:extLst>
+              </a:tr>
+              <a:tr h="316671">
+                <a:tc>
+                  <a:txBody>
+                    <a:bodyPr/>
+                    <a:lstStyle/>
+                    <a:p>
+                      <a:pPr algn="ctr" latinLnBrk="1"/>
+                      <a:r>
+                        <a:rPr lang="en-US" altLang="ko-KR" dirty="0"/>
+                        <a:t>14</a:t>
+                      </a:r>
+                      <a:endParaRPr lang="ko-KR" altLang="en-US" dirty="0"/>
+                    </a:p>
+                  </a:txBody>
+                  <a:tcPr>
+                    <a:lnL w="6350" cap="flat" cmpd="sng" algn="ctr">
+                      <a:noFill/>
+                      <a:prstDash val="solid"/>
+                      <a:round/>
+                      <a:headEnd type="none" w="med" len="med"/>
+                      <a:tailEnd type="none" w="med" len="med"/>
+                    </a:lnL>
+                    <a:lnR w="6350" cap="flat" cmpd="sng" algn="ctr">
+                      <a:noFill/>
+                      <a:prstDash val="solid"/>
+                      <a:round/>
+                      <a:headEnd type="none" w="med" len="med"/>
+                      <a:tailEnd type="none" w="med" len="med"/>
+                    </a:lnR>
+                    <a:lnT w="6350" cap="flat" cmpd="sng" algn="ctr">
+                      <a:solidFill>
+                        <a:schemeClr val="tx1"/>
+                      </a:solidFill>
+                      <a:prstDash val="solid"/>
+                      <a:round/>
+                      <a:headEnd type="none" w="med" len="med"/>
+                      <a:tailEnd type="none" w="med" len="med"/>
+                    </a:lnT>
+                    <a:lnB w="6350" cap="flat" cmpd="sng" algn="ctr">
+                      <a:solidFill>
+                        <a:schemeClr val="tx1"/>
+                      </a:solidFill>
+                      <a:prstDash val="solid"/>
+                      <a:round/>
+                      <a:headEnd type="none" w="med" len="med"/>
+                      <a:tailEnd type="none" w="med" len="med"/>
+                    </a:lnB>
+                    <a:lnTlToBr w="12700" cmpd="sng">
+                      <a:noFill/>
+                      <a:prstDash val="solid"/>
+                    </a:lnTlToBr>
+                    <a:lnBlToTr w="12700" cmpd="sng">
+                      <a:noFill/>
+                      <a:prstDash val="solid"/>
+                    </a:lnBlToTr>
+                    <a:solidFill>
+                      <a:schemeClr val="bg1"/>
+                    </a:solidFill>
+                  </a:tcPr>
+                </a:tc>
+                <a:tc>
+                  <a:txBody>
+                    <a:bodyPr/>
+                    <a:lstStyle/>
+                    <a:p>
+                      <a:pPr algn="ctr" latinLnBrk="1"/>
+                      <a:endParaRPr lang="ko-KR" altLang="en-US" dirty="0"/>
+                    </a:p>
+                  </a:txBody>
+                  <a:tcPr>
+                    <a:lnL w="6350" cap="flat" cmpd="sng" algn="ctr">
+                      <a:noFill/>
+                      <a:prstDash val="solid"/>
+                      <a:round/>
+                      <a:headEnd type="none" w="med" len="med"/>
+                      <a:tailEnd type="none" w="med" len="med"/>
+                    </a:lnL>
+                    <a:lnR w="6350" cap="flat" cmpd="sng" algn="ctr">
+                      <a:noFill/>
+                      <a:prstDash val="solid"/>
+                      <a:round/>
+                      <a:headEnd type="none" w="med" len="med"/>
+                      <a:tailEnd type="none" w="med" len="med"/>
+                    </a:lnR>
+                    <a:lnT w="6350" cap="flat" cmpd="sng" algn="ctr">
+                      <a:solidFill>
+                        <a:schemeClr val="tx1"/>
+                      </a:solidFill>
+                      <a:prstDash val="solid"/>
+                      <a:round/>
+                      <a:headEnd type="none" w="med" len="med"/>
+                      <a:tailEnd type="none" w="med" len="med"/>
+                    </a:lnT>
+                    <a:lnB w="6350" cap="flat" cmpd="sng" algn="ctr">
+                      <a:solidFill>
+                        <a:schemeClr val="tx1"/>
+                      </a:solidFill>
+                      <a:prstDash val="solid"/>
+                      <a:round/>
+                      <a:headEnd type="none" w="med" len="med"/>
+                      <a:tailEnd type="none" w="med" len="med"/>
+                    </a:lnB>
+                    <a:lnTlToBr w="12700" cmpd="sng">
+                      <a:noFill/>
+                      <a:prstDash val="solid"/>
+                    </a:lnTlToBr>
+                    <a:lnBlToTr w="12700" cmpd="sng">
+                      <a:noFill/>
+                      <a:prstDash val="solid"/>
+                    </a:lnBlToTr>
+                    <a:solidFill>
+                      <a:schemeClr val="bg1"/>
+                    </a:solidFill>
+                  </a:tcPr>
+                </a:tc>
+                <a:tc>
+                  <a:txBody>
+                    <a:bodyPr/>
+                    <a:lstStyle/>
+                    <a:p>
+                      <a:pPr algn="ctr" latinLnBrk="1"/>
+                      <a:endParaRPr lang="ko-KR" altLang="en-US" dirty="0"/>
+                    </a:p>
+                  </a:txBody>
+                  <a:tcPr>
+                    <a:lnL w="6350" cap="flat" cmpd="sng" algn="ctr">
+                      <a:noFill/>
+                      <a:prstDash val="solid"/>
+                      <a:round/>
+                      <a:headEnd type="none" w="med" len="med"/>
+                      <a:tailEnd type="none" w="med" len="med"/>
+                    </a:lnL>
+                    <a:lnR w="6350" cap="flat" cmpd="sng" algn="ctr">
+                      <a:noFill/>
+                      <a:prstDash val="solid"/>
+                      <a:round/>
+                      <a:headEnd type="none" w="med" len="med"/>
+                      <a:tailEnd type="none" w="med" len="med"/>
+                    </a:lnR>
+                    <a:lnT w="6350" cap="flat" cmpd="sng" algn="ctr">
+                      <a:solidFill>
+                        <a:schemeClr val="tx1"/>
+                      </a:solidFill>
+                      <a:prstDash val="solid"/>
+                      <a:round/>
+                      <a:headEnd type="none" w="med" len="med"/>
+                      <a:tailEnd type="none" w="med" len="med"/>
+                    </a:lnT>
+                    <a:lnB w="6350" cap="flat" cmpd="sng" algn="ctr">
+                      <a:solidFill>
+                        <a:schemeClr val="tx1"/>
+                      </a:solidFill>
+                      <a:prstDash val="solid"/>
+                      <a:round/>
+                      <a:headEnd type="none" w="med" len="med"/>
+                      <a:tailEnd type="none" w="med" len="med"/>
+                    </a:lnB>
+                    <a:lnTlToBr w="12700" cmpd="sng">
+                      <a:noFill/>
+                      <a:prstDash val="solid"/>
+                    </a:lnTlToBr>
+                    <a:lnBlToTr w="12700" cmpd="sng">
+                      <a:noFill/>
+                      <a:prstDash val="solid"/>
+                    </a:lnBlToTr>
+                    <a:solidFill>
+                      <a:schemeClr val="bg1"/>
+                    </a:solidFill>
+                  </a:tcPr>
+                </a:tc>
+                <a:tc>
+                  <a:txBody>
+                    <a:bodyPr/>
+                    <a:lstStyle/>
+                    <a:p>
+                      <a:pPr algn="ctr" latinLnBrk="1"/>
+                      <a:endParaRPr lang="ko-KR" altLang="en-US" dirty="0"/>
+                    </a:p>
+                  </a:txBody>
+                  <a:tcPr>
+                    <a:lnL w="6350" cap="flat" cmpd="sng" algn="ctr">
+                      <a:noFill/>
+                      <a:prstDash val="solid"/>
+                      <a:round/>
+                      <a:headEnd type="none" w="med" len="med"/>
+                      <a:tailEnd type="none" w="med" len="med"/>
+                    </a:lnL>
+                    <a:lnR w="6350" cap="flat" cmpd="sng" algn="ctr">
+                      <a:noFill/>
+                      <a:prstDash val="solid"/>
+                      <a:round/>
+                      <a:headEnd type="none" w="med" len="med"/>
+                      <a:tailEnd type="none" w="med" len="med"/>
+                    </a:lnR>
+                    <a:lnT w="6350" cap="flat" cmpd="sng" algn="ctr">
+                      <a:solidFill>
+                        <a:schemeClr val="tx1"/>
+                      </a:solidFill>
+                      <a:prstDash val="solid"/>
+                      <a:round/>
+                      <a:headEnd type="none" w="med" len="med"/>
+                      <a:tailEnd type="none" w="med" len="med"/>
+                    </a:lnT>
+                    <a:lnB w="6350" cap="flat" cmpd="sng" algn="ctr">
+                      <a:solidFill>
+                        <a:schemeClr val="tx1"/>
+                      </a:solidFill>
+                      <a:prstDash val="solid"/>
+                      <a:round/>
+                      <a:headEnd type="none" w="med" len="med"/>
+                      <a:tailEnd type="none" w="med" len="med"/>
+                    </a:lnB>
+                    <a:lnTlToBr w="12700" cmpd="sng">
+                      <a:noFill/>
+                      <a:prstDash val="solid"/>
+                    </a:lnTlToBr>
+                    <a:lnBlToTr w="12700" cmpd="sng">
+                      <a:noFill/>
+                      <a:prstDash val="solid"/>
+                    </a:lnBlToTr>
+                    <a:solidFill>
+                      <a:schemeClr val="bg1"/>
+                    </a:solidFill>
+                  </a:tcPr>
+                </a:tc>
+                <a:extLst>
+                  <a:ext uri="{0D108BD9-81ED-4DB2-BD59-A6C34878D82A}">
+                    <a16:rowId xmlns:a16="http://schemas.microsoft.com/office/drawing/2014/main" val="2032155740"/>
+                  </a:ext>
+                </a:extLst>
+              </a:tr>
+              <a:tr h="316671">
+                <a:tc>
+                  <a:txBody>
+                    <a:bodyPr/>
+                    <a:lstStyle/>
+                    <a:p>
+                      <a:pPr algn="ctr" latinLnBrk="1"/>
+                      <a:r>
+                        <a:rPr lang="en-US" altLang="ko-KR" dirty="0"/>
+                        <a:t>15</a:t>
+                      </a:r>
+                      <a:endParaRPr lang="ko-KR" altLang="en-US" dirty="0"/>
+                    </a:p>
+                  </a:txBody>
+                  <a:tcPr>
+                    <a:lnL w="6350" cap="flat" cmpd="sng" algn="ctr">
+                      <a:noFill/>
+                      <a:prstDash val="solid"/>
+                      <a:round/>
+                      <a:headEnd type="none" w="med" len="med"/>
+                      <a:tailEnd type="none" w="med" len="med"/>
+                    </a:lnL>
+                    <a:lnR w="6350" cap="flat" cmpd="sng" algn="ctr">
+                      <a:noFill/>
+                      <a:prstDash val="solid"/>
+                      <a:round/>
+                      <a:headEnd type="none" w="med" len="med"/>
+                      <a:tailEnd type="none" w="med" len="med"/>
+                    </a:lnR>
+                    <a:lnT w="6350" cap="flat" cmpd="sng" algn="ctr">
+                      <a:solidFill>
+                        <a:schemeClr val="tx1"/>
+                      </a:solidFill>
+                      <a:prstDash val="solid"/>
+                      <a:round/>
+                      <a:headEnd type="none" w="med" len="med"/>
+                      <a:tailEnd type="none" w="med" len="med"/>
+                    </a:lnT>
+                    <a:lnB w="6350" cap="flat" cmpd="sng" algn="ctr">
+                      <a:solidFill>
+                        <a:schemeClr val="tx1"/>
+                      </a:solidFill>
+                      <a:prstDash val="solid"/>
+                      <a:round/>
+                      <a:headEnd type="none" w="med" len="med"/>
+                      <a:tailEnd type="none" w="med" len="med"/>
+                    </a:lnB>
+                    <a:lnTlToBr w="12700" cmpd="sng">
+                      <a:noFill/>
+                      <a:prstDash val="solid"/>
+                    </a:lnTlToBr>
+                    <a:lnBlToTr w="12700" cmpd="sng">
+                      <a:noFill/>
+                      <a:prstDash val="solid"/>
+                    </a:lnBlToTr>
+                    <a:solidFill>
+                      <a:schemeClr val="bg1"/>
+                    </a:solidFill>
+                  </a:tcPr>
+                </a:tc>
+                <a:tc>
+                  <a:txBody>
+                    <a:bodyPr/>
+                    <a:lstStyle/>
+                    <a:p>
+                      <a:pPr algn="ctr" latinLnBrk="1"/>
+                      <a:endParaRPr lang="ko-KR" altLang="en-US" dirty="0"/>
+                    </a:p>
+                  </a:txBody>
+                  <a:tcPr>
+                    <a:lnL w="6350" cap="flat" cmpd="sng" algn="ctr">
+                      <a:noFill/>
+                      <a:prstDash val="solid"/>
+                      <a:round/>
+                      <a:headEnd type="none" w="med" len="med"/>
+                      <a:tailEnd type="none" w="med" len="med"/>
+                    </a:lnL>
+                    <a:lnR w="6350" cap="flat" cmpd="sng" algn="ctr">
+                      <a:noFill/>
+                      <a:prstDash val="solid"/>
+                      <a:round/>
+                      <a:headEnd type="none" w="med" len="med"/>
+                      <a:tailEnd type="none" w="med" len="med"/>
+                    </a:lnR>
+                    <a:lnT w="6350" cap="flat" cmpd="sng" algn="ctr">
+                      <a:solidFill>
+                        <a:schemeClr val="tx1"/>
+                      </a:solidFill>
+                      <a:prstDash val="solid"/>
+                      <a:round/>
+                      <a:headEnd type="none" w="med" len="med"/>
+                      <a:tailEnd type="none" w="med" len="med"/>
+                    </a:lnT>
+                    <a:lnB w="6350" cap="flat" cmpd="sng" algn="ctr">
+                      <a:solidFill>
+                        <a:schemeClr val="tx1"/>
+                      </a:solidFill>
+                      <a:prstDash val="solid"/>
+                      <a:round/>
+                      <a:headEnd type="none" w="med" len="med"/>
+                      <a:tailEnd type="none" w="med" len="med"/>
+                    </a:lnB>
+                    <a:lnTlToBr w="12700" cmpd="sng">
+                      <a:noFill/>
+                      <a:prstDash val="solid"/>
+                    </a:lnTlToBr>
+                    <a:lnBlToTr w="12700" cmpd="sng">
+                      <a:noFill/>
+                      <a:prstDash val="solid"/>
+                    </a:lnBlToTr>
+                    <a:solidFill>
+                      <a:schemeClr val="bg1"/>
+                    </a:solidFill>
+                  </a:tcPr>
+                </a:tc>
+                <a:tc>
+                  <a:txBody>
+                    <a:bodyPr/>
+                    <a:lstStyle/>
+                    <a:p>
+                      <a:pPr algn="ctr" latinLnBrk="1"/>
+                      <a:endParaRPr lang="ko-KR" altLang="en-US" dirty="0"/>
+                    </a:p>
+                  </a:txBody>
+                  <a:tcPr>
+                    <a:lnL w="6350" cap="flat" cmpd="sng" algn="ctr">
+                      <a:noFill/>
+                      <a:prstDash val="solid"/>
+                      <a:round/>
+                      <a:headEnd type="none" w="med" len="med"/>
+                      <a:tailEnd type="none" w="med" len="med"/>
+                    </a:lnL>
+                    <a:lnR w="6350" cap="flat" cmpd="sng" algn="ctr">
+                      <a:noFill/>
+                      <a:prstDash val="solid"/>
+                      <a:round/>
+                      <a:headEnd type="none" w="med" len="med"/>
+                      <a:tailEnd type="none" w="med" len="med"/>
+                    </a:lnR>
+                    <a:lnT w="6350" cap="flat" cmpd="sng" algn="ctr">
+                      <a:solidFill>
+                        <a:schemeClr val="tx1"/>
+                      </a:solidFill>
+                      <a:prstDash val="solid"/>
+                      <a:round/>
+                      <a:headEnd type="none" w="med" len="med"/>
+                      <a:tailEnd type="none" w="med" len="med"/>
+                    </a:lnT>
+                    <a:lnB w="6350" cap="flat" cmpd="sng" algn="ctr">
+                      <a:solidFill>
+                        <a:schemeClr val="tx1"/>
+                      </a:solidFill>
+                      <a:prstDash val="solid"/>
+                      <a:round/>
+                      <a:headEnd type="none" w="med" len="med"/>
+                      <a:tailEnd type="none" w="med" len="med"/>
+                    </a:lnB>
+                    <a:lnTlToBr w="12700" cmpd="sng">
+                      <a:noFill/>
+                      <a:prstDash val="solid"/>
+                    </a:lnTlToBr>
+                    <a:lnBlToTr w="12700" cmpd="sng">
+                      <a:noFill/>
+                      <a:prstDash val="solid"/>
+                    </a:lnBlToTr>
+                    <a:solidFill>
+                      <a:schemeClr val="bg1"/>
+                    </a:solidFill>
+                  </a:tcPr>
+                </a:tc>
+                <a:tc>
+                  <a:txBody>
+                    <a:bodyPr/>
+                    <a:lstStyle/>
+                    <a:p>
+                      <a:pPr algn="ctr" latinLnBrk="1"/>
+                      <a:endParaRPr lang="ko-KR" altLang="en-US" dirty="0"/>
+                    </a:p>
+                  </a:txBody>
+                  <a:tcPr>
+                    <a:lnL w="6350" cap="flat" cmpd="sng" algn="ctr">
+                      <a:noFill/>
+                      <a:prstDash val="solid"/>
+                      <a:round/>
+                      <a:headEnd type="none" w="med" len="med"/>
+                      <a:tailEnd type="none" w="med" len="med"/>
+                    </a:lnL>
+                    <a:lnR w="6350" cap="flat" cmpd="sng" algn="ctr">
+                      <a:noFill/>
+                      <a:prstDash val="solid"/>
+                      <a:round/>
+                      <a:headEnd type="none" w="med" len="med"/>
+                      <a:tailEnd type="none" w="med" len="med"/>
+                    </a:lnR>
+                    <a:lnT w="6350" cap="flat" cmpd="sng" algn="ctr">
+                      <a:solidFill>
+                        <a:schemeClr val="tx1"/>
+                      </a:solidFill>
+                      <a:prstDash val="solid"/>
+                      <a:round/>
+                      <a:headEnd type="none" w="med" len="med"/>
+                      <a:tailEnd type="none" w="med" len="med"/>
+                    </a:lnT>
+                    <a:lnB w="6350" cap="flat" cmpd="sng" algn="ctr">
+                      <a:solidFill>
+                        <a:schemeClr val="tx1"/>
+                      </a:solidFill>
+                      <a:prstDash val="solid"/>
+                      <a:round/>
+                      <a:headEnd type="none" w="med" len="med"/>
+                      <a:tailEnd type="none" w="med" len="med"/>
+                    </a:lnB>
+                    <a:lnTlToBr w="12700" cmpd="sng">
+                      <a:noFill/>
+                      <a:prstDash val="solid"/>
+                    </a:lnTlToBr>
+                    <a:lnBlToTr w="12700" cmpd="sng">
+                      <a:noFill/>
+                      <a:prstDash val="solid"/>
+                    </a:lnBlToTr>
+                    <a:solidFill>
+                      <a:schemeClr val="bg1"/>
+                    </a:solidFill>
+                  </a:tcPr>
+                </a:tc>
+                <a:extLst>
+                  <a:ext uri="{0D108BD9-81ED-4DB2-BD59-A6C34878D82A}">
+                    <a16:rowId xmlns:a16="http://schemas.microsoft.com/office/drawing/2014/main" val="2752205967"/>
+                  </a:ext>
+                </a:extLst>
+              </a:tr>
+              <a:tr h="316671">
+                <a:tc>
+                  <a:txBody>
+                    <a:bodyPr/>
+                    <a:lstStyle/>
+                    <a:p>
+                      <a:pPr algn="ctr" latinLnBrk="1"/>
+                      <a:r>
+                        <a:rPr lang="en-US" altLang="ko-KR" dirty="0"/>
+                        <a:t>16</a:t>
+                      </a:r>
+                      <a:endParaRPr lang="ko-KR" altLang="en-US" dirty="0"/>
+                    </a:p>
+                  </a:txBody>
+                  <a:tcPr>
+                    <a:lnL w="6350" cap="flat" cmpd="sng" algn="ctr">
+                      <a:noFill/>
+                      <a:prstDash val="solid"/>
+                      <a:round/>
+                      <a:headEnd type="none" w="med" len="med"/>
+                      <a:tailEnd type="none" w="med" len="med"/>
+                    </a:lnL>
+                    <a:lnR w="6350" cap="flat" cmpd="sng" algn="ctr">
+                      <a:noFill/>
+                      <a:prstDash val="solid"/>
+                      <a:round/>
+                      <a:headEnd type="none" w="med" len="med"/>
+                      <a:tailEnd type="none" w="med" len="med"/>
+                    </a:lnR>
+                    <a:lnT w="6350" cap="flat" cmpd="sng" algn="ctr">
+                      <a:solidFill>
+                        <a:schemeClr val="tx1"/>
+                      </a:solidFill>
+                      <a:prstDash val="solid"/>
+                      <a:round/>
+                      <a:headEnd type="none" w="med" len="med"/>
+                      <a:tailEnd type="none" w="med" len="med"/>
+                    </a:lnT>
+                    <a:lnB w="6350" cap="flat" cmpd="sng" algn="ctr">
+                      <a:solidFill>
+                        <a:schemeClr val="tx1"/>
+                      </a:solidFill>
+                      <a:prstDash val="solid"/>
+                      <a:round/>
+                      <a:headEnd type="none" w="med" len="med"/>
+                      <a:tailEnd type="none" w="med" len="med"/>
+                    </a:lnB>
+                    <a:lnTlToBr w="12700" cmpd="sng">
+                      <a:noFill/>
+                      <a:prstDash val="solid"/>
+                    </a:lnTlToBr>
+                    <a:lnBlToTr w="12700" cmpd="sng">
+                      <a:noFill/>
+                      <a:prstDash val="solid"/>
+                    </a:lnBlToTr>
+                    <a:solidFill>
+                      <a:schemeClr val="bg1"/>
+                    </a:solidFill>
+                  </a:tcPr>
+                </a:tc>
+                <a:tc>
+                  <a:txBody>
+                    <a:bodyPr/>
+                    <a:lstStyle/>
+                    <a:p>
+                      <a:pPr algn="ctr" latinLnBrk="1"/>
+                      <a:endParaRPr lang="ko-KR" altLang="en-US" dirty="0"/>
+                    </a:p>
+                  </a:txBody>
+                  <a:tcPr>
+                    <a:lnL w="6350" cap="flat" cmpd="sng" algn="ctr">
+                      <a:noFill/>
+                      <a:prstDash val="solid"/>
+                      <a:round/>
+                      <a:headEnd type="none" w="med" len="med"/>
+                      <a:tailEnd type="none" w="med" len="med"/>
+                    </a:lnL>
+                    <a:lnR w="6350" cap="flat" cmpd="sng" algn="ctr">
+                      <a:noFill/>
+                      <a:prstDash val="solid"/>
+                      <a:round/>
+                      <a:headEnd type="none" w="med" len="med"/>
+                      <a:tailEnd type="none" w="med" len="med"/>
+                    </a:lnR>
+                    <a:lnT w="6350" cap="flat" cmpd="sng" algn="ctr">
+                      <a:solidFill>
+                        <a:schemeClr val="tx1"/>
+                      </a:solidFill>
+                      <a:prstDash val="solid"/>
+                      <a:round/>
+                      <a:headEnd type="none" w="med" len="med"/>
+                      <a:tailEnd type="none" w="med" len="med"/>
+                    </a:lnT>
+                    <a:lnB w="6350" cap="flat" cmpd="sng" algn="ctr">
+                      <a:solidFill>
+                        <a:schemeClr val="tx1"/>
+                      </a:solidFill>
+                      <a:prstDash val="solid"/>
+                      <a:round/>
+                      <a:headEnd type="none" w="med" len="med"/>
+                      <a:tailEnd type="none" w="med" len="med"/>
+                    </a:lnB>
+                    <a:lnTlToBr w="12700" cmpd="sng">
+                      <a:noFill/>
+                      <a:prstDash val="solid"/>
+                    </a:lnTlToBr>
+                    <a:lnBlToTr w="12700" cmpd="sng">
+                      <a:noFill/>
+                      <a:prstDash val="solid"/>
+                    </a:lnBlToTr>
+                    <a:solidFill>
+                      <a:schemeClr val="bg1"/>
+                    </a:solidFill>
+                  </a:tcPr>
+                </a:tc>
+                <a:tc>
+                  <a:txBody>
+                    <a:bodyPr/>
+                    <a:lstStyle/>
+                    <a:p>
+                      <a:pPr algn="ctr" latinLnBrk="1"/>
+                      <a:endParaRPr lang="ko-KR" altLang="en-US" dirty="0"/>
+                    </a:p>
+                  </a:txBody>
+                  <a:tcPr>
+                    <a:lnL w="6350" cap="flat" cmpd="sng" algn="ctr">
+                      <a:noFill/>
+                      <a:prstDash val="solid"/>
+                      <a:round/>
+                      <a:headEnd type="none" w="med" len="med"/>
+                      <a:tailEnd type="none" w="med" len="med"/>
+                    </a:lnL>
+                    <a:lnR w="6350" cap="flat" cmpd="sng" algn="ctr">
+                      <a:noFill/>
+                      <a:prstDash val="solid"/>
+                      <a:round/>
+                      <a:headEnd type="none" w="med" len="med"/>
+                      <a:tailEnd type="none" w="med" len="med"/>
+                    </a:lnR>
+                    <a:lnT w="6350" cap="flat" cmpd="sng" algn="ctr">
+                      <a:solidFill>
+                        <a:schemeClr val="tx1"/>
+                      </a:solidFill>
+                      <a:prstDash val="solid"/>
+                      <a:round/>
+                      <a:headEnd type="none" w="med" len="med"/>
+                      <a:tailEnd type="none" w="med" len="med"/>
+                    </a:lnT>
+                    <a:lnB w="6350" cap="flat" cmpd="sng" algn="ctr">
+                      <a:solidFill>
+                        <a:schemeClr val="tx1"/>
+                      </a:solidFill>
+                      <a:prstDash val="solid"/>
+                      <a:round/>
+                      <a:headEnd type="none" w="med" len="med"/>
+                      <a:tailEnd type="none" w="med" len="med"/>
+                    </a:lnB>
+                    <a:lnTlToBr w="12700" cmpd="sng">
+                      <a:noFill/>
+                      <a:prstDash val="solid"/>
+                    </a:lnTlToBr>
+                    <a:lnBlToTr w="12700" cmpd="sng">
+                      <a:noFill/>
+                      <a:prstDash val="solid"/>
+                    </a:lnBlToTr>
+                    <a:solidFill>
+                      <a:schemeClr val="bg1"/>
+                    </a:solidFill>
+                  </a:tcPr>
+                </a:tc>
+                <a:tc>
+                  <a:txBody>
+                    <a:bodyPr/>
+                    <a:lstStyle/>
+                    <a:p>
+                      <a:pPr algn="ctr" latinLnBrk="1"/>
+                      <a:endParaRPr lang="ko-KR" altLang="en-US" dirty="0"/>
+                    </a:p>
+                  </a:txBody>
+                  <a:tcPr>
+                    <a:lnL w="6350" cap="flat" cmpd="sng" algn="ctr">
+                      <a:noFill/>
+                      <a:prstDash val="solid"/>
+                      <a:round/>
+                      <a:headEnd type="none" w="med" len="med"/>
+                      <a:tailEnd type="none" w="med" len="med"/>
+                    </a:lnL>
+                    <a:lnR w="6350" cap="flat" cmpd="sng" algn="ctr">
+                      <a:noFill/>
+                      <a:prstDash val="solid"/>
+                      <a:round/>
+                      <a:headEnd type="none" w="med" len="med"/>
+                      <a:tailEnd type="none" w="med" len="med"/>
+                    </a:lnR>
+                    <a:lnT w="6350" cap="flat" cmpd="sng" algn="ctr">
+                      <a:solidFill>
+                        <a:schemeClr val="tx1"/>
+                      </a:solidFill>
+                      <a:prstDash val="solid"/>
+                      <a:round/>
+                      <a:headEnd type="none" w="med" len="med"/>
+                      <a:tailEnd type="none" w="med" len="med"/>
+                    </a:lnT>
+                    <a:lnB w="6350" cap="flat" cmpd="sng" algn="ctr">
+                      <a:solidFill>
+                        <a:schemeClr val="tx1"/>
+                      </a:solidFill>
+                      <a:prstDash val="solid"/>
+                      <a:round/>
+                      <a:headEnd type="none" w="med" len="med"/>
+                      <a:tailEnd type="none" w="med" len="med"/>
+                    </a:lnB>
+                    <a:lnTlToBr w="12700" cmpd="sng">
+                      <a:noFill/>
+                      <a:prstDash val="solid"/>
+                    </a:lnTlToBr>
+                    <a:lnBlToTr w="12700" cmpd="sng">
+                      <a:noFill/>
+                      <a:prstDash val="solid"/>
+                    </a:lnBlToTr>
+                    <a:solidFill>
+                      <a:schemeClr val="bg1"/>
+                    </a:solidFill>
+                  </a:tcPr>
+                </a:tc>
+                <a:extLst>
+                  <a:ext uri="{0D108BD9-81ED-4DB2-BD59-A6C34878D82A}">
+                    <a16:rowId xmlns:a16="http://schemas.microsoft.com/office/drawing/2014/main" val="4027879704"/>
+                  </a:ext>
+                </a:extLst>
+              </a:tr>
+              <a:tr h="316671">
+                <a:tc>
+                  <a:txBody>
+                    <a:bodyPr/>
+                    <a:lstStyle/>
+                    <a:p>
+                      <a:pPr algn="ctr" latinLnBrk="1"/>
+                      <a:r>
+                        <a:rPr lang="en-US" altLang="ko-KR" dirty="0"/>
+                        <a:t>17</a:t>
+                      </a:r>
+                      <a:endParaRPr lang="ko-KR" altLang="en-US" dirty="0"/>
+                    </a:p>
+                  </a:txBody>
+                  <a:tcPr>
+                    <a:lnL w="6350" cap="flat" cmpd="sng" algn="ctr">
+                      <a:noFill/>
+                      <a:prstDash val="solid"/>
+                      <a:round/>
+                      <a:headEnd type="none" w="med" len="med"/>
+                      <a:tailEnd type="none" w="med" len="med"/>
+                    </a:lnL>
+                    <a:lnR w="6350" cap="flat" cmpd="sng" algn="ctr">
+                      <a:noFill/>
+                      <a:prstDash val="solid"/>
+                      <a:round/>
+                      <a:headEnd type="none" w="med" len="med"/>
+                      <a:tailEnd type="none" w="med" len="med"/>
+                    </a:lnR>
+                    <a:lnT w="6350" cap="flat" cmpd="sng" algn="ctr">
+                      <a:solidFill>
+                        <a:schemeClr val="tx1"/>
+                      </a:solidFill>
+                      <a:prstDash val="solid"/>
+                      <a:round/>
+                      <a:headEnd type="none" w="med" len="med"/>
+                      <a:tailEnd type="none" w="med" len="med"/>
+                    </a:lnT>
+                    <a:lnB w="6350" cap="flat" cmpd="sng" algn="ctr">
+                      <a:solidFill>
+                        <a:schemeClr val="tx1"/>
+                      </a:solidFill>
+                      <a:prstDash val="solid"/>
+                      <a:round/>
+                      <a:headEnd type="none" w="med" len="med"/>
+                      <a:tailEnd type="none" w="med" len="med"/>
+                    </a:lnB>
+                    <a:lnTlToBr w="12700" cmpd="sng">
+                      <a:noFill/>
+                      <a:prstDash val="solid"/>
+                    </a:lnTlToBr>
+                    <a:lnBlToTr w="12700" cmpd="sng">
+                      <a:noFill/>
+                      <a:prstDash val="solid"/>
+                    </a:lnBlToTr>
+                    <a:solidFill>
+                      <a:schemeClr val="bg1"/>
+                    </a:solidFill>
+                  </a:tcPr>
+                </a:tc>
+                <a:tc>
+                  <a:txBody>
+                    <a:bodyPr/>
+                    <a:lstStyle/>
+                    <a:p>
+                      <a:pPr algn="ctr" latinLnBrk="1"/>
+                      <a:endParaRPr lang="ko-KR" altLang="en-US" dirty="0"/>
+                    </a:p>
+                  </a:txBody>
+                  <a:tcPr>
+                    <a:lnL w="6350" cap="flat" cmpd="sng" algn="ctr">
+                      <a:noFill/>
+                      <a:prstDash val="solid"/>
+                      <a:round/>
+                      <a:headEnd type="none" w="med" len="med"/>
+                      <a:tailEnd type="none" w="med" len="med"/>
+                    </a:lnL>
+                    <a:lnR w="6350" cap="flat" cmpd="sng" algn="ctr">
+                      <a:noFill/>
+                      <a:prstDash val="solid"/>
+                      <a:round/>
+                      <a:headEnd type="none" w="med" len="med"/>
+                      <a:tailEnd type="none" w="med" len="med"/>
+                    </a:lnR>
+                    <a:lnT w="6350" cap="flat" cmpd="sng" algn="ctr">
+                      <a:solidFill>
+                        <a:schemeClr val="tx1"/>
+                      </a:solidFill>
+                      <a:prstDash val="solid"/>
+                      <a:round/>
+                      <a:headEnd type="none" w="med" len="med"/>
+                      <a:tailEnd type="none" w="med" len="med"/>
+                    </a:lnT>
+                    <a:lnB w="6350" cap="flat" cmpd="sng" algn="ctr">
+                      <a:solidFill>
+                        <a:schemeClr val="tx1"/>
+                      </a:solidFill>
+                      <a:prstDash val="solid"/>
+                      <a:round/>
+                      <a:headEnd type="none" w="med" len="med"/>
+                      <a:tailEnd type="none" w="med" len="med"/>
+                    </a:lnB>
+                    <a:lnTlToBr w="12700" cmpd="sng">
+                      <a:noFill/>
+                      <a:prstDash val="solid"/>
+                    </a:lnTlToBr>
+                    <a:lnBlToTr w="12700" cmpd="sng">
+                      <a:noFill/>
+                      <a:prstDash val="solid"/>
+                    </a:lnBlToTr>
+                    <a:solidFill>
+                      <a:schemeClr val="bg1"/>
+                    </a:solidFill>
+                  </a:tcPr>
+                </a:tc>
+                <a:tc>
+                  <a:txBody>
+                    <a:bodyPr/>
+                    <a:lstStyle/>
+                    <a:p>
+                      <a:pPr algn="ctr" latinLnBrk="1"/>
+                      <a:endParaRPr lang="ko-KR" altLang="en-US" dirty="0"/>
+                    </a:p>
+                  </a:txBody>
+                  <a:tcPr>
+                    <a:lnL w="6350" cap="flat" cmpd="sng" algn="ctr">
+                      <a:noFill/>
+                      <a:prstDash val="solid"/>
+                      <a:round/>
+                      <a:headEnd type="none" w="med" len="med"/>
+                      <a:tailEnd type="none" w="med" len="med"/>
+                    </a:lnL>
+                    <a:lnR w="6350" cap="flat" cmpd="sng" algn="ctr">
+                      <a:noFill/>
+                      <a:prstDash val="solid"/>
+                      <a:round/>
+                      <a:headEnd type="none" w="med" len="med"/>
+                      <a:tailEnd type="none" w="med" len="med"/>
+                    </a:lnR>
+                    <a:lnT w="6350" cap="flat" cmpd="sng" algn="ctr">
+                      <a:solidFill>
+                        <a:schemeClr val="tx1"/>
+                      </a:solidFill>
+                      <a:prstDash val="solid"/>
+                      <a:round/>
+                      <a:headEnd type="none" w="med" len="med"/>
+                      <a:tailEnd type="none" w="med" len="med"/>
+                    </a:lnT>
+                    <a:lnB w="6350" cap="flat" cmpd="sng" algn="ctr">
+                      <a:solidFill>
+                        <a:schemeClr val="tx1"/>
+                      </a:solidFill>
+                      <a:prstDash val="solid"/>
+                      <a:round/>
+                      <a:headEnd type="none" w="med" len="med"/>
+                      <a:tailEnd type="none" w="med" len="med"/>
+                    </a:lnB>
+                    <a:lnTlToBr w="12700" cmpd="sng">
+                      <a:noFill/>
+                      <a:prstDash val="solid"/>
+                    </a:lnTlToBr>
+                    <a:lnBlToTr w="12700" cmpd="sng">
+                      <a:noFill/>
+                      <a:prstDash val="solid"/>
+                    </a:lnBlToTr>
+                    <a:solidFill>
+                      <a:schemeClr val="bg1"/>
+                    </a:solidFill>
+                  </a:tcPr>
+                </a:tc>
+                <a:tc>
+                  <a:txBody>
+                    <a:bodyPr/>
+                    <a:lstStyle/>
+                    <a:p>
+                      <a:pPr algn="ctr" latinLnBrk="1"/>
+                      <a:endParaRPr lang="ko-KR" altLang="en-US" dirty="0"/>
+                    </a:p>
+                  </a:txBody>
+                  <a:tcPr>
+                    <a:lnL w="6350" cap="flat" cmpd="sng" algn="ctr">
+                      <a:noFill/>
+                      <a:prstDash val="solid"/>
+                      <a:round/>
+                      <a:headEnd type="none" w="med" len="med"/>
+                      <a:tailEnd type="none" w="med" len="med"/>
+                    </a:lnL>
+                    <a:lnR w="6350" cap="flat" cmpd="sng" algn="ctr">
+                      <a:noFill/>
+                      <a:prstDash val="solid"/>
+                      <a:round/>
+                      <a:headEnd type="none" w="med" len="med"/>
+                      <a:tailEnd type="none" w="med" len="med"/>
+                    </a:lnR>
+                    <a:lnT w="6350" cap="flat" cmpd="sng" algn="ctr">
+                      <a:solidFill>
+                        <a:schemeClr val="tx1"/>
+                      </a:solidFill>
+                      <a:prstDash val="solid"/>
+                      <a:round/>
+                      <a:headEnd type="none" w="med" len="med"/>
+                      <a:tailEnd type="none" w="med" len="med"/>
+                    </a:lnT>
+                    <a:lnB w="6350" cap="flat" cmpd="sng" algn="ctr">
+                      <a:solidFill>
+                        <a:schemeClr val="tx1"/>
+                      </a:solidFill>
+                      <a:prstDash val="solid"/>
+                      <a:round/>
+                      <a:headEnd type="none" w="med" len="med"/>
+                      <a:tailEnd type="none" w="med" len="med"/>
+                    </a:lnB>
+                    <a:lnTlToBr w="12700" cmpd="sng">
+                      <a:noFill/>
+                      <a:prstDash val="solid"/>
+                    </a:lnTlToBr>
+                    <a:lnBlToTr w="12700" cmpd="sng">
+                      <a:noFill/>
+                      <a:prstDash val="solid"/>
+                    </a:lnBlToTr>
+                    <a:solidFill>
+                      <a:schemeClr val="bg1"/>
+                    </a:solidFill>
+                  </a:tcPr>
+                </a:tc>
+                <a:extLst>
+                  <a:ext uri="{0D108BD9-81ED-4DB2-BD59-A6C34878D82A}">
+                    <a16:rowId xmlns:a16="http://schemas.microsoft.com/office/drawing/2014/main" val="3360451296"/>
+                  </a:ext>
+                </a:extLst>
+              </a:tr>
+              <a:tr h="316671">
+                <a:tc>
+                  <a:txBody>
+                    <a:bodyPr/>
+                    <a:lstStyle/>
+                    <a:p>
+                      <a:pPr algn="ctr" latinLnBrk="1"/>
+                      <a:r>
+                        <a:rPr lang="en-US" altLang="ko-KR" dirty="0"/>
+                        <a:t>18</a:t>
+                      </a:r>
+                      <a:endParaRPr lang="ko-KR" altLang="en-US" dirty="0"/>
+                    </a:p>
+                  </a:txBody>
+                  <a:tcPr>
+                    <a:lnL w="6350" cap="flat" cmpd="sng" algn="ctr">
+                      <a:noFill/>
+                      <a:prstDash val="solid"/>
+                      <a:round/>
+                      <a:headEnd type="none" w="med" len="med"/>
+                      <a:tailEnd type="none" w="med" len="med"/>
+                    </a:lnL>
+                    <a:lnR w="6350" cap="flat" cmpd="sng" algn="ctr">
+                      <a:noFill/>
+                      <a:prstDash val="solid"/>
+                      <a:round/>
+                      <a:headEnd type="none" w="med" len="med"/>
+                      <a:tailEnd type="none" w="med" len="med"/>
+                    </a:lnR>
+                    <a:lnT w="6350" cap="flat" cmpd="sng" algn="ctr">
+                      <a:solidFill>
+                        <a:schemeClr val="tx1"/>
+                      </a:solidFill>
+                      <a:prstDash val="solid"/>
+                      <a:round/>
+                      <a:headEnd type="none" w="med" len="med"/>
+                      <a:tailEnd type="none" w="med" len="med"/>
+                    </a:lnT>
+                    <a:lnB w="6350" cap="flat" cmpd="sng" algn="ctr">
+                      <a:solidFill>
+                        <a:schemeClr val="tx1"/>
+                      </a:solidFill>
+                      <a:prstDash val="solid"/>
+                      <a:round/>
+                      <a:headEnd type="none" w="med" len="med"/>
+                      <a:tailEnd type="none" w="med" len="med"/>
+                    </a:lnB>
+                    <a:lnTlToBr w="12700" cmpd="sng">
+                      <a:noFill/>
+                      <a:prstDash val="solid"/>
+                    </a:lnTlToBr>
+                    <a:lnBlToTr w="12700" cmpd="sng">
+                      <a:noFill/>
+                      <a:prstDash val="solid"/>
+                    </a:lnBlToTr>
+                    <a:solidFill>
+                      <a:schemeClr val="bg1"/>
+                    </a:solidFill>
+                  </a:tcPr>
+                </a:tc>
+                <a:tc>
+                  <a:txBody>
+                    <a:bodyPr/>
+                    <a:lstStyle/>
+                    <a:p>
+                      <a:pPr algn="ctr" latinLnBrk="1"/>
+                      <a:endParaRPr lang="ko-KR" altLang="en-US" dirty="0"/>
+                    </a:p>
+                  </a:txBody>
+                  <a:tcPr>
+                    <a:lnL w="6350" cap="flat" cmpd="sng" algn="ctr">
+                      <a:noFill/>
+                      <a:prstDash val="solid"/>
+                      <a:round/>
+                      <a:headEnd type="none" w="med" len="med"/>
+                      <a:tailEnd type="none" w="med" len="med"/>
+                    </a:lnL>
+                    <a:lnR w="6350" cap="flat" cmpd="sng" algn="ctr">
+                      <a:noFill/>
+                      <a:prstDash val="solid"/>
+                      <a:round/>
+                      <a:headEnd type="none" w="med" len="med"/>
+                      <a:tailEnd type="none" w="med" len="med"/>
+                    </a:lnR>
+                    <a:lnT w="6350" cap="flat" cmpd="sng" algn="ctr">
+                      <a:solidFill>
+                        <a:schemeClr val="tx1"/>
+                      </a:solidFill>
+                      <a:prstDash val="solid"/>
+                      <a:round/>
+                      <a:headEnd type="none" w="med" len="med"/>
+                      <a:tailEnd type="none" w="med" len="med"/>
+                    </a:lnT>
+                    <a:lnB w="6350" cap="flat" cmpd="sng" algn="ctr">
+                      <a:solidFill>
+                        <a:schemeClr val="tx1"/>
+                      </a:solidFill>
+                      <a:prstDash val="solid"/>
+                      <a:round/>
+                      <a:headEnd type="none" w="med" len="med"/>
+                      <a:tailEnd type="none" w="med" len="med"/>
+                    </a:lnB>
+                    <a:lnTlToBr w="12700" cmpd="sng">
+                      <a:noFill/>
+                      <a:prstDash val="solid"/>
+                    </a:lnTlToBr>
+                    <a:lnBlToTr w="12700" cmpd="sng">
+                      <a:noFill/>
+                      <a:prstDash val="solid"/>
+                    </a:lnBlToTr>
+                    <a:solidFill>
+                      <a:schemeClr val="bg1"/>
+                    </a:solidFill>
+                  </a:tcPr>
+                </a:tc>
+                <a:tc>
+                  <a:txBody>
+                    <a:bodyPr/>
+                    <a:lstStyle/>
+                    <a:p>
+                      <a:pPr algn="ctr" latinLnBrk="1"/>
+                      <a:endParaRPr lang="ko-KR" altLang="en-US" dirty="0"/>
+                    </a:p>
+                  </a:txBody>
+                  <a:tcPr>
+                    <a:lnL w="6350" cap="flat" cmpd="sng" algn="ctr">
+                      <a:noFill/>
+                      <a:prstDash val="solid"/>
+                      <a:round/>
+                      <a:headEnd type="none" w="med" len="med"/>
+                      <a:tailEnd type="none" w="med" len="med"/>
+                    </a:lnL>
+                    <a:lnR w="6350" cap="flat" cmpd="sng" algn="ctr">
+                      <a:noFill/>
+                      <a:prstDash val="solid"/>
+                      <a:round/>
+                      <a:headEnd type="none" w="med" len="med"/>
+                      <a:tailEnd type="none" w="med" len="med"/>
+                    </a:lnR>
+                    <a:lnT w="6350" cap="flat" cmpd="sng" algn="ctr">
+                      <a:solidFill>
+                        <a:schemeClr val="tx1"/>
+                      </a:solidFill>
+                      <a:prstDash val="solid"/>
+                      <a:round/>
+                      <a:headEnd type="none" w="med" len="med"/>
+                      <a:tailEnd type="none" w="med" len="med"/>
+                    </a:lnT>
+                    <a:lnB w="6350" cap="flat" cmpd="sng" algn="ctr">
+                      <a:solidFill>
+                        <a:schemeClr val="tx1"/>
+                      </a:solidFill>
+                      <a:prstDash val="solid"/>
+                      <a:round/>
+                      <a:headEnd type="none" w="med" len="med"/>
+                      <a:tailEnd type="none" w="med" len="med"/>
+                    </a:lnB>
+                    <a:lnTlToBr w="12700" cmpd="sng">
+                      <a:noFill/>
+                      <a:prstDash val="solid"/>
+                    </a:lnTlToBr>
+                    <a:lnBlToTr w="12700" cmpd="sng">
+                      <a:noFill/>
+                      <a:prstDash val="solid"/>
+                    </a:lnBlToTr>
+                    <a:solidFill>
+                      <a:schemeClr val="bg1"/>
+                    </a:solidFill>
+                  </a:tcPr>
+                </a:tc>
+                <a:tc>
+                  <a:txBody>
+                    <a:bodyPr/>
+                    <a:lstStyle/>
+                    <a:p>
+                      <a:pPr algn="ctr" latinLnBrk="1"/>
+                      <a:endParaRPr lang="ko-KR" altLang="en-US" dirty="0"/>
+                    </a:p>
+                  </a:txBody>
+                  <a:tcPr>
+                    <a:lnL w="6350" cap="flat" cmpd="sng" algn="ctr">
+                      <a:noFill/>
+                      <a:prstDash val="solid"/>
+                      <a:round/>
+                      <a:headEnd type="none" w="med" len="med"/>
+                      <a:tailEnd type="none" w="med" len="med"/>
+                    </a:lnL>
+                    <a:lnR w="6350" cap="flat" cmpd="sng" algn="ctr">
+                      <a:noFill/>
+                      <a:prstDash val="solid"/>
+                      <a:round/>
+                      <a:headEnd type="none" w="med" len="med"/>
+                      <a:tailEnd type="none" w="med" len="med"/>
+                    </a:lnR>
+                    <a:lnT w="6350" cap="flat" cmpd="sng" algn="ctr">
+                      <a:solidFill>
+                        <a:schemeClr val="tx1"/>
+                      </a:solidFill>
+                      <a:prstDash val="solid"/>
+                      <a:round/>
+                      <a:headEnd type="none" w="med" len="med"/>
+                      <a:tailEnd type="none" w="med" len="med"/>
+                    </a:lnT>
+                    <a:lnB w="6350" cap="flat" cmpd="sng" algn="ctr">
+                      <a:solidFill>
+                        <a:schemeClr val="tx1"/>
+                      </a:solidFill>
+                      <a:prstDash val="solid"/>
+                      <a:round/>
+                      <a:headEnd type="none" w="med" len="med"/>
+                      <a:tailEnd type="none" w="med" len="med"/>
+                    </a:lnB>
+                    <a:lnTlToBr w="12700" cmpd="sng">
+                      <a:noFill/>
+                      <a:prstDash val="solid"/>
+                    </a:lnTlToBr>
+                    <a:lnBlToTr w="12700" cmpd="sng">
+                      <a:noFill/>
+                      <a:prstDash val="solid"/>
+                    </a:lnBlToTr>
+                    <a:solidFill>
+                      <a:schemeClr val="bg1"/>
+                    </a:solidFill>
+                  </a:tcPr>
+                </a:tc>
+                <a:extLst>
+                  <a:ext uri="{0D108BD9-81ED-4DB2-BD59-A6C34878D82A}">
+                    <a16:rowId xmlns:a16="http://schemas.microsoft.com/office/drawing/2014/main" val="868142181"/>
+                  </a:ext>
+                </a:extLst>
+              </a:tr>
+              <a:tr h="316671">
+                <a:tc>
+                  <a:txBody>
+                    <a:bodyPr/>
+                    <a:lstStyle/>
+                    <a:p>
+                      <a:pPr algn="ctr" latinLnBrk="1"/>
+                      <a:endParaRPr lang="ko-KR" altLang="en-US" dirty="0"/>
+                    </a:p>
+                  </a:txBody>
+                  <a:tcPr>
+                    <a:lnL w="6350" cap="flat" cmpd="sng" algn="ctr">
+                      <a:noFill/>
+                      <a:prstDash val="solid"/>
+                      <a:round/>
+                      <a:headEnd type="none" w="med" len="med"/>
+                      <a:tailEnd type="none" w="med" len="med"/>
+                    </a:lnL>
+                    <a:lnR w="6350" cap="flat" cmpd="sng" algn="ctr">
+                      <a:noFill/>
+                      <a:prstDash val="solid"/>
+                      <a:round/>
+                      <a:headEnd type="none" w="med" len="med"/>
+                      <a:tailEnd type="none" w="med" len="med"/>
+                    </a:lnR>
+                    <a:lnT w="6350" cap="flat" cmpd="sng" algn="ctr">
+                      <a:solidFill>
+                        <a:schemeClr val="tx1"/>
+                      </a:solidFill>
+                      <a:prstDash val="solid"/>
+                      <a:round/>
+                      <a:headEnd type="none" w="med" len="med"/>
+                      <a:tailEnd type="none" w="med" len="med"/>
+                    </a:lnT>
+                    <a:lnB w="6350" cap="flat" cmpd="sng" algn="ctr">
+                      <a:solidFill>
+                        <a:schemeClr val="tx1"/>
+                      </a:solidFill>
+                      <a:prstDash val="solid"/>
+                      <a:round/>
+                      <a:headEnd type="none" w="med" len="med"/>
+                      <a:tailEnd type="none" w="med" len="med"/>
+                    </a:lnB>
+                    <a:lnTlToBr w="12700" cmpd="sng">
+                      <a:noFill/>
+                      <a:prstDash val="solid"/>
+                    </a:lnTlToBr>
+                    <a:lnBlToTr w="12700" cmpd="sng">
+                      <a:noFill/>
+                      <a:prstDash val="solid"/>
+                    </a:lnBlToTr>
+                    <a:solidFill>
+                      <a:schemeClr val="bg1"/>
+                    </a:solidFill>
+                  </a:tcPr>
+                </a:tc>
+                <a:tc>
+                  <a:txBody>
+                    <a:bodyPr/>
+                    <a:lstStyle/>
+                    <a:p>
+                      <a:pPr algn="ctr" latinLnBrk="1"/>
+                      <a:endParaRPr lang="ko-KR" altLang="en-US"/>
+                    </a:p>
+                  </a:txBody>
+                  <a:tcPr>
+                    <a:lnL w="6350" cap="flat" cmpd="sng" algn="ctr">
+                      <a:noFill/>
+                      <a:prstDash val="solid"/>
+                      <a:round/>
+                      <a:headEnd type="none" w="med" len="med"/>
+                      <a:tailEnd type="none" w="med" len="med"/>
+                    </a:lnL>
+                    <a:lnR w="6350" cap="flat" cmpd="sng" algn="ctr">
+                      <a:noFill/>
+                      <a:prstDash val="solid"/>
+                      <a:round/>
+                      <a:headEnd type="none" w="med" len="med"/>
+                      <a:tailEnd type="none" w="med" len="med"/>
+                    </a:lnR>
+                    <a:lnT w="6350" cap="flat" cmpd="sng" algn="ctr">
+                      <a:solidFill>
+                        <a:schemeClr val="tx1"/>
+                      </a:solidFill>
+                      <a:prstDash val="solid"/>
+                      <a:round/>
+                      <a:headEnd type="none" w="med" len="med"/>
+                      <a:tailEnd type="none" w="med" len="med"/>
+                    </a:lnT>
+                    <a:lnB w="6350" cap="flat" cmpd="sng" algn="ctr">
+                      <a:solidFill>
+                        <a:schemeClr val="tx1"/>
+                      </a:solidFill>
+                      <a:prstDash val="solid"/>
+                      <a:round/>
+                      <a:headEnd type="none" w="med" len="med"/>
+                      <a:tailEnd type="none" w="med" len="med"/>
+                    </a:lnB>
+                    <a:lnTlToBr w="12700" cmpd="sng">
+                      <a:noFill/>
+                      <a:prstDash val="solid"/>
+                    </a:lnTlToBr>
+                    <a:lnBlToTr w="12700" cmpd="sng">
+                      <a:noFill/>
+                      <a:prstDash val="solid"/>
+                    </a:lnBlToTr>
+                    <a:solidFill>
+                      <a:schemeClr val="bg1"/>
+                    </a:solidFill>
+                  </a:tcPr>
+                </a:tc>
+                <a:tc>
+                  <a:txBody>
+                    <a:bodyPr/>
+                    <a:lstStyle/>
+                    <a:p>
+                      <a:pPr algn="ctr" latinLnBrk="1"/>
+                      <a:endParaRPr lang="ko-KR" altLang="en-US" dirty="0"/>
+                    </a:p>
+                  </a:txBody>
+                  <a:tcPr>
+                    <a:lnL w="6350" cap="flat" cmpd="sng" algn="ctr">
+                      <a:noFill/>
+                      <a:prstDash val="solid"/>
+                      <a:round/>
+                      <a:headEnd type="none" w="med" len="med"/>
+                      <a:tailEnd type="none" w="med" len="med"/>
+                    </a:lnL>
+                    <a:lnR w="6350" cap="flat" cmpd="sng" algn="ctr">
+                      <a:noFill/>
+                      <a:prstDash val="solid"/>
+                      <a:round/>
+                      <a:headEnd type="none" w="med" len="med"/>
+                      <a:tailEnd type="none" w="med" len="med"/>
+                    </a:lnR>
+                    <a:lnT w="6350" cap="flat" cmpd="sng" algn="ctr">
+                      <a:solidFill>
+                        <a:schemeClr val="tx1"/>
+                      </a:solidFill>
+                      <a:prstDash val="solid"/>
+                      <a:round/>
+                      <a:headEnd type="none" w="med" len="med"/>
+                      <a:tailEnd type="none" w="med" len="med"/>
+                    </a:lnT>
+                    <a:lnB w="6350" cap="flat" cmpd="sng" algn="ctr">
+                      <a:solidFill>
+                        <a:schemeClr val="tx1"/>
+                      </a:solidFill>
+                      <a:prstDash val="solid"/>
+                      <a:round/>
+                      <a:headEnd type="none" w="med" len="med"/>
+                      <a:tailEnd type="none" w="med" len="med"/>
+                    </a:lnB>
+                    <a:lnTlToBr w="12700" cmpd="sng">
+                      <a:noFill/>
+                      <a:prstDash val="solid"/>
+                    </a:lnTlToBr>
+                    <a:lnBlToTr w="12700" cmpd="sng">
+                      <a:noFill/>
+                      <a:prstDash val="solid"/>
+                    </a:lnBlToTr>
+                    <a:solidFill>
+                      <a:schemeClr val="bg1"/>
+                    </a:solidFill>
+                  </a:tcPr>
+                </a:tc>
+                <a:tc>
+                  <a:txBody>
+                    <a:bodyPr/>
+                    <a:lstStyle/>
+                    <a:p>
+                      <a:pPr algn="ctr" latinLnBrk="1"/>
+                      <a:endParaRPr lang="ko-KR" altLang="en-US" dirty="0"/>
+                    </a:p>
+                  </a:txBody>
+                  <a:tcPr>
+                    <a:lnL w="6350" cap="flat" cmpd="sng" algn="ctr">
+                      <a:noFill/>
+                      <a:prstDash val="solid"/>
+                      <a:round/>
+                      <a:headEnd type="none" w="med" len="med"/>
+                      <a:tailEnd type="none" w="med" len="med"/>
+                    </a:lnL>
+                    <a:lnR w="6350" cap="flat" cmpd="sng" algn="ctr">
+                      <a:noFill/>
+                      <a:prstDash val="solid"/>
+                      <a:round/>
+                      <a:headEnd type="none" w="med" len="med"/>
+                      <a:tailEnd type="none" w="med" len="med"/>
+                    </a:lnR>
+                    <a:lnT w="6350" cap="flat" cmpd="sng" algn="ctr">
+                      <a:solidFill>
+                        <a:schemeClr val="tx1"/>
+                      </a:solidFill>
+                      <a:prstDash val="solid"/>
+                      <a:round/>
+                      <a:headEnd type="none" w="med" len="med"/>
+                      <a:tailEnd type="none" w="med" len="med"/>
+                    </a:lnT>
+                    <a:lnB w="6350" cap="flat" cmpd="sng" algn="ctr">
+                      <a:solidFill>
+                        <a:schemeClr val="tx1"/>
+                      </a:solidFill>
+                      <a:prstDash val="solid"/>
+                      <a:round/>
+                      <a:headEnd type="none" w="med" len="med"/>
+                      <a:tailEnd type="none" w="med" len="med"/>
+                    </a:lnB>
+                    <a:lnTlToBr w="12700" cmpd="sng">
+                      <a:noFill/>
+                      <a:prstDash val="solid"/>
+                    </a:lnTlToBr>
+                    <a:lnBlToTr w="12700" cmpd="sng">
+                      <a:noFill/>
+                      <a:prstDash val="solid"/>
+                    </a:lnBlToTr>
+                    <a:solidFill>
+                      <a:schemeClr val="bg1"/>
+                    </a:solidFill>
+                  </a:tcPr>
+                </a:tc>
+                <a:extLst>
+                  <a:ext uri="{0D108BD9-81ED-4DB2-BD59-A6C34878D82A}">
+                    <a16:rowId xmlns:a16="http://schemas.microsoft.com/office/drawing/2014/main" val="185854196"/>
+                  </a:ext>
+                </a:extLst>
+              </a:tr>
+            </a:tbl>
+          </a:graphicData>
+        </a:graphic>
+      </p:graphicFrame>
+    </p:spTree>
+    <p:extLst>
+      <p:ext uri="{BB962C8B-B14F-4D97-AF65-F5344CB8AC3E}">
+        <p14:creationId xmlns:p14="http://schemas.microsoft.com/office/powerpoint/2010/main" val="3237679877"/>
+      </p:ext>
+    </p:extLst>
+  </p:cSld>
+  <p:clrMapOvr>
+    <a:masterClrMapping/>
+  </p:clrMapOvr>
+</p:sld>
+</file>
+
+<file path=ppt/slides/slide19.xml><?xml version="1.0" encoding="utf-8"?>
+<p:sld xmlns:a="http://schemas.openxmlformats.org/drawingml/2006/main" xmlns:r="http://schemas.openxmlformats.org/officeDocument/2006/relationships" xmlns:p="http://schemas.openxmlformats.org/presentationml/2006/main">
+  <p:cSld>
+    <p:spTree>
+      <p:nvGrpSpPr>
+        <p:cNvPr id="1" name=""/>
+        <p:cNvGrpSpPr/>
+        <p:nvPr/>
+      </p:nvGrpSpPr>
+      <p:grpSpPr>
+        <a:xfrm>
+          <a:off x="0" y="0"/>
+          <a:ext cx="0" cy="0"/>
+          <a:chOff x="0" y="0"/>
+          <a:chExt cx="0" cy="0"/>
+        </a:xfrm>
+      </p:grpSpPr>
+      <p:sp>
+        <p:nvSpPr>
+          <p:cNvPr id="2" name="제목 1">
+            <a:extLst>
+              <a:ext uri="{FF2B5EF4-FFF2-40B4-BE49-F238E27FC236}">
+                <a16:creationId xmlns:a16="http://schemas.microsoft.com/office/drawing/2014/main" id="{72149F05-3A38-5B2C-2A0B-22E575C1AA3D}"/>
+              </a:ext>
+            </a:extLst>
+          </p:cNvPr>
+          <p:cNvSpPr>
+            <a:spLocks noGrp="1"/>
+          </p:cNvSpPr>
+          <p:nvPr>
+            <p:ph type="title"/>
+          </p:nvPr>
+        </p:nvSpPr>
+        <p:spPr>
+          <a:xfrm>
+            <a:off x="431673" y="219075"/>
+            <a:ext cx="10954512" cy="795528"/>
+          </a:xfrm>
+        </p:spPr>
+        <p:txBody>
+          <a:bodyPr/>
+          <a:lstStyle/>
+          <a:p>
+            <a:r>
+              <a:rPr lang="ko-KR" altLang="en-US" dirty="0"/>
+              <a:t>핵심 지표 설명</a:t>
+            </a:r>
+          </a:p>
+        </p:txBody>
+      </p:sp>
+      <p:sp>
+        <p:nvSpPr>
+          <p:cNvPr id="3" name="내용 개체 틀 2">
+            <a:extLst>
+              <a:ext uri="{FF2B5EF4-FFF2-40B4-BE49-F238E27FC236}">
+                <a16:creationId xmlns:a16="http://schemas.microsoft.com/office/drawing/2014/main" id="{FD101532-F6BC-3020-904D-0FE557BCE330}"/>
+              </a:ext>
+            </a:extLst>
+          </p:cNvPr>
+          <p:cNvSpPr>
+            <a:spLocks noGrp="1"/>
+          </p:cNvSpPr>
+          <p:nvPr>
+            <p:ph idx="1"/>
+          </p:nvPr>
+        </p:nvSpPr>
+        <p:spPr>
+          <a:xfrm>
+            <a:off x="431673" y="1295780"/>
+            <a:ext cx="10954512" cy="4956047"/>
+          </a:xfrm>
+        </p:spPr>
+        <p:txBody>
+          <a:bodyPr/>
+          <a:lstStyle/>
+          <a:p>
+            <a:pPr marL="342900" indent="-342900">
+              <a:buAutoNum type="arabicPeriod"/>
+            </a:pPr>
+            <a:r>
+              <a:rPr lang="ko-KR" altLang="en-US" dirty="0" err="1"/>
+              <a:t>포제션</a:t>
+            </a:r>
+            <a:r>
+              <a:rPr lang="ko-KR" altLang="en-US" dirty="0"/>
+              <a:t> </a:t>
+            </a:r>
+            <a:endParaRPr lang="en-US" altLang="ko-KR" dirty="0"/>
+          </a:p>
+          <a:p>
+            <a:pPr marL="342900" indent="-342900">
+              <a:buAutoNum type="arabicPeriod"/>
+            </a:pPr>
+            <a:endParaRPr lang="en-US" altLang="ko-KR" dirty="0"/>
+          </a:p>
+          <a:p>
+            <a:pPr marL="342900" indent="-342900">
+              <a:buAutoNum type="arabicPeriod"/>
+            </a:pPr>
+            <a:r>
+              <a:rPr lang="ko-KR" altLang="en-US" dirty="0"/>
+              <a:t>넷 </a:t>
+            </a:r>
+            <a:r>
+              <a:rPr lang="ko-KR" altLang="en-US" dirty="0" err="1"/>
+              <a:t>레이팅</a:t>
+            </a:r>
+            <a:endParaRPr lang="en-US" altLang="ko-KR" dirty="0"/>
+          </a:p>
+          <a:p>
+            <a:pPr marL="342900" indent="-342900">
+              <a:buAutoNum type="arabicPeriod"/>
+            </a:pPr>
+            <a:endParaRPr lang="en-US" altLang="ko-KR" dirty="0"/>
+          </a:p>
+          <a:p>
+            <a:pPr marL="342900" indent="-342900">
+              <a:buAutoNum type="arabicPeriod"/>
+            </a:pPr>
+            <a:r>
+              <a:rPr lang="ko-KR" altLang="en-US" dirty="0"/>
+              <a:t>포 </a:t>
+            </a:r>
+            <a:r>
+              <a:rPr lang="ko-KR" altLang="en-US" dirty="0" err="1"/>
+              <a:t>팩터스</a:t>
+            </a:r>
+            <a:r>
+              <a:rPr lang="ko-KR" altLang="en-US" dirty="0"/>
+              <a:t> </a:t>
+            </a:r>
+          </a:p>
+        </p:txBody>
+      </p:sp>
+    </p:spTree>
+    <p:extLst>
+      <p:ext uri="{BB962C8B-B14F-4D97-AF65-F5344CB8AC3E}">
+        <p14:creationId xmlns:p14="http://schemas.microsoft.com/office/powerpoint/2010/main" val="1980731042"/>
+      </p:ext>
+    </p:extLst>
+  </p:cSld>
+  <p:clrMapOvr>
+    <a:masterClrMapping/>
+  </p:clrMapOvr>
+</p:sld>
+</file>
+
 <file path=ppt/slides/slide2.xml><?xml version="1.0" encoding="utf-8"?>
 <p:sld xmlns:a="http://schemas.openxmlformats.org/drawingml/2006/main" xmlns:r="http://schemas.openxmlformats.org/officeDocument/2006/relationships" xmlns:p="http://schemas.openxmlformats.org/presentationml/2006/main">
   <p:cSld>
@@ -30228,7 +37292,7 @@
             <p:ph sz="quarter" idx="13"/>
             <p:extLst>
               <p:ext uri="{D42A27DB-BD31-4B8C-83A1-F6EECF244321}">
-                <p14:modId xmlns:p14="http://schemas.microsoft.com/office/powerpoint/2010/main" val="1391834511"/>
+                <p14:modId xmlns:p14="http://schemas.microsoft.com/office/powerpoint/2010/main" val="4060468965"/>
               </p:ext>
               <p:ext uri="{E7BDC344-281C-4309-B0C6-D0EE65EED2A8}">
                 <p202:designPr xmlns:p202="http://schemas.microsoft.com/office/powerpoint/2020/02/main">
@@ -30241,8 +37305,8 @@
           </p:nvPr>
         </p:nvGraphicFramePr>
         <p:xfrm>
-          <a:off x="5925726" y="2255404"/>
-          <a:ext cx="5509458" cy="2347191"/>
+          <a:off x="5958860" y="589889"/>
+          <a:ext cx="5509458" cy="4694382"/>
         </p:xfrm>
         <a:graphic>
           <a:graphicData uri="http://schemas.openxmlformats.org/drawingml/2006/table">
@@ -30291,9 +37355,12 @@
                       <a:noFill/>
                       <a:prstDash val="solid"/>
                     </a:lnL>
-                    <a:lnR w="12700" cmpd="sng">
-                      <a:noFill/>
-                      <a:prstDash val="solid"/>
+                    <a:lnR w="12700" cap="flat" cmpd="sng" algn="ctr">
+                      <a:noFill/>
+                      <a:prstDash val="solid"/>
+                      <a:round/>
+                      <a:headEnd type="none" w="med" len="med"/>
+                      <a:tailEnd type="none" w="med" len="med"/>
                     </a:lnR>
                     <a:lnT w="6350" cap="flat" cmpd="sng" algn="ctr">
                       <a:noFill/>
@@ -30343,23 +37410,33 @@
                     </a:p>
                   </a:txBody>
                   <a:tcPr marL="134381" marR="134381" marT="134381" marB="134381" anchor="ctr">
-                    <a:lnL w="12700" cmpd="sng">
-                      <a:noFill/>
-                      <a:prstDash val="solid"/>
+                    <a:lnL w="12700" cap="flat" cmpd="sng" algn="ctr">
+                      <a:noFill/>
+                      <a:prstDash val="solid"/>
+                      <a:round/>
+                      <a:headEnd type="none" w="med" len="med"/>
+                      <a:tailEnd type="none" w="med" len="med"/>
                     </a:lnL>
-                    <a:lnR w="12700" cmpd="sng">
-                      <a:noFill/>
-                      <a:prstDash val="solid"/>
+                    <a:lnR w="12700" cap="flat" cmpd="sng" algn="ctr">
+                      <a:noFill/>
+                      <a:prstDash val="solid"/>
+                      <a:round/>
+                      <a:headEnd type="none" w="med" len="med"/>
+                      <a:tailEnd type="none" w="med" len="med"/>
                     </a:lnR>
-                    <a:lnT w="6350" cap="flat" cmpd="sng" algn="ctr">
-                      <a:noFill/>
-                      <a:prstDash val="solid"/>
+                    <a:lnT w="12700" cap="flat" cmpd="sng" algn="ctr">
+                      <a:noFill/>
+                      <a:prstDash val="solid"/>
+                      <a:round/>
+                      <a:headEnd type="none" w="med" len="med"/>
+                      <a:tailEnd type="none" w="med" len="med"/>
                     </a:lnT>
-                    <a:lnB w="6350" cap="flat" cmpd="sng" algn="ctr">
-                      <a:solidFill>
-                        <a:schemeClr val="tx1"/>
-                      </a:solidFill>
-                      <a:prstDash val="solid"/>
+                    <a:lnB w="12700" cap="flat" cmpd="sng" algn="ctr">
+                      <a:noFill/>
+                      <a:prstDash val="solid"/>
+                      <a:round/>
+                      <a:headEnd type="none" w="med" len="med"/>
+                      <a:tailEnd type="none" w="med" len="med"/>
                     </a:lnB>
                     <a:noFill/>
                   </a:tcPr>
@@ -30380,7 +37457,7 @@
                         <a:buNone/>
                       </a:pPr>
                       <a:r>
-                        <a:rPr lang="en-US" altLang="ko-KR" sz="3100" b="1" cap="none" spc="0">
+                        <a:rPr lang="en-US" altLang="ko-KR" sz="3100" b="1" cap="none" spc="0" dirty="0">
                           <a:solidFill>
                             <a:schemeClr val="accent1"/>
                           </a:solidFill>
@@ -30394,9 +37471,12 @@
                       <a:noFill/>
                       <a:prstDash val="solid"/>
                     </a:lnL>
-                    <a:lnR w="12700" cmpd="sng">
-                      <a:noFill/>
-                      <a:prstDash val="solid"/>
+                    <a:lnR w="12700" cap="flat" cmpd="sng" algn="ctr">
+                      <a:noFill/>
+                      <a:prstDash val="solid"/>
+                      <a:round/>
+                      <a:headEnd type="none" w="med" len="med"/>
+                      <a:tailEnd type="none" w="med" len="med"/>
                     </a:lnR>
                     <a:lnT w="6350" cap="flat" cmpd="sng" algn="ctr">
                       <a:solidFill>
@@ -30432,25 +37512,33 @@
                     </a:p>
                   </a:txBody>
                   <a:tcPr marL="134381" marR="134381" marT="134381" marB="134381" anchor="ctr">
-                    <a:lnL w="12700" cmpd="sng">
-                      <a:noFill/>
-                      <a:prstDash val="solid"/>
+                    <a:lnL w="12700" cap="flat" cmpd="sng" algn="ctr">
+                      <a:noFill/>
+                      <a:prstDash val="solid"/>
+                      <a:round/>
+                      <a:headEnd type="none" w="med" len="med"/>
+                      <a:tailEnd type="none" w="med" len="med"/>
                     </a:lnL>
-                    <a:lnR w="12700" cmpd="sng">
-                      <a:noFill/>
-                      <a:prstDash val="solid"/>
+                    <a:lnR w="12700" cap="flat" cmpd="sng" algn="ctr">
+                      <a:noFill/>
+                      <a:prstDash val="solid"/>
+                      <a:round/>
+                      <a:headEnd type="none" w="med" len="med"/>
+                      <a:tailEnd type="none" w="med" len="med"/>
                     </a:lnR>
-                    <a:lnT w="6350" cap="flat" cmpd="sng" algn="ctr">
-                      <a:solidFill>
-                        <a:schemeClr val="tx1"/>
-                      </a:solidFill>
-                      <a:prstDash val="solid"/>
+                    <a:lnT w="12700" cap="flat" cmpd="sng" algn="ctr">
+                      <a:noFill/>
+                      <a:prstDash val="solid"/>
+                      <a:round/>
+                      <a:headEnd type="none" w="med" len="med"/>
+                      <a:tailEnd type="none" w="med" len="med"/>
                     </a:lnT>
-                    <a:lnB w="6350" cap="flat" cmpd="sng" algn="ctr">
-                      <a:solidFill>
-                        <a:schemeClr val="tx1"/>
-                      </a:solidFill>
-                      <a:prstDash val="solid"/>
+                    <a:lnB w="12700" cap="flat" cmpd="sng" algn="ctr">
+                      <a:noFill/>
+                      <a:prstDash val="solid"/>
+                      <a:round/>
+                      <a:headEnd type="none" w="med" len="med"/>
+                      <a:tailEnd type="none" w="med" len="med"/>
                     </a:lnB>
                     <a:noFill/>
                   </a:tcPr>
@@ -30471,7 +37559,7 @@
                         <a:buNone/>
                       </a:pPr>
                       <a:r>
-                        <a:rPr lang="en-US" altLang="ko-KR" sz="3100" b="1" cap="none" spc="0">
+                        <a:rPr lang="en-US" altLang="ko-KR" sz="3100" b="1" cap="none" spc="0" dirty="0">
                           <a:solidFill>
                             <a:schemeClr val="accent1"/>
                           </a:solidFill>
@@ -30485,9 +37573,12 @@
                       <a:noFill/>
                       <a:prstDash val="solid"/>
                     </a:lnL>
-                    <a:lnR w="12700" cmpd="sng">
-                      <a:noFill/>
-                      <a:prstDash val="solid"/>
+                    <a:lnR w="12700" cap="flat" cmpd="sng" algn="ctr">
+                      <a:noFill/>
+                      <a:prstDash val="solid"/>
+                      <a:round/>
+                      <a:headEnd type="none" w="med" len="med"/>
+                      <a:tailEnd type="none" w="med" len="med"/>
                     </a:lnR>
                     <a:lnT w="6350" cap="flat" cmpd="sng" algn="ctr">
                       <a:solidFill>
@@ -30500,6 +37591,9 @@
                         <a:schemeClr val="tx1"/>
                       </a:solidFill>
                       <a:prstDash val="solid"/>
+                      <a:round/>
+                      <a:headEnd type="none" w="med" len="med"/>
+                      <a:tailEnd type="none" w="med" len="med"/>
                     </a:lnB>
                     <a:noFill/>
                   </a:tcPr>
@@ -30528,28 +37622,41 @@
                         </a:rPr>
                         <a:t>알고리즘</a:t>
                       </a:r>
+                      <a:endParaRPr lang="en-US" altLang="ko-KR" sz="2000" b="0" cap="none" spc="0" dirty="0">
+                        <a:solidFill>
+                          <a:schemeClr val="tx1"/>
+                        </a:solidFill>
+                      </a:endParaRPr>
                     </a:p>
                   </a:txBody>
                   <a:tcPr marL="134381" marR="134381" marT="134381" marB="134381" anchor="ctr">
-                    <a:lnL w="12700" cmpd="sng">
-                      <a:noFill/>
-                      <a:prstDash val="solid"/>
+                    <a:lnL w="12700" cap="flat" cmpd="sng" algn="ctr">
+                      <a:noFill/>
+                      <a:prstDash val="solid"/>
+                      <a:round/>
+                      <a:headEnd type="none" w="med" len="med"/>
+                      <a:tailEnd type="none" w="med" len="med"/>
                     </a:lnL>
-                    <a:lnR w="12700" cmpd="sng">
-                      <a:noFill/>
-                      <a:prstDash val="solid"/>
+                    <a:lnR w="12700" cap="flat" cmpd="sng" algn="ctr">
+                      <a:noFill/>
+                      <a:prstDash val="solid"/>
+                      <a:round/>
+                      <a:headEnd type="none" w="med" len="med"/>
+                      <a:tailEnd type="none" w="med" len="med"/>
                     </a:lnR>
-                    <a:lnT w="6350" cap="flat" cmpd="sng" algn="ctr">
-                      <a:solidFill>
-                        <a:schemeClr val="tx1"/>
-                      </a:solidFill>
-                      <a:prstDash val="solid"/>
+                    <a:lnT w="12700" cap="flat" cmpd="sng" algn="ctr">
+                      <a:noFill/>
+                      <a:prstDash val="solid"/>
+                      <a:round/>
+                      <a:headEnd type="none" w="med" len="med"/>
+                      <a:tailEnd type="none" w="med" len="med"/>
                     </a:lnT>
-                    <a:lnB w="6350" cap="flat" cmpd="sng" algn="ctr">
-                      <a:solidFill>
-                        <a:schemeClr val="tx1"/>
-                      </a:solidFill>
-                      <a:prstDash val="solid"/>
+                    <a:lnB w="12700" cap="flat" cmpd="sng" algn="ctr">
+                      <a:noFill/>
+                      <a:prstDash val="solid"/>
+                      <a:round/>
+                      <a:headEnd type="none" w="med" len="med"/>
+                      <a:tailEnd type="none" w="med" len="med"/>
                     </a:lnB>
                     <a:noFill/>
                   </a:tcPr>
@@ -30557,6 +37664,309 @@
                 <a:extLst>
                   <a:ext uri="{0D108BD9-81ED-4DB2-BD59-A6C34878D82A}">
                     <a16:rowId xmlns:a16="http://schemas.microsoft.com/office/drawing/2014/main" val="4136357973"/>
+                  </a:ext>
+                </a:extLst>
+              </a:tr>
+              <a:tr h="782397">
+                <a:tc>
+                  <a:txBody>
+                    <a:bodyPr/>
+                    <a:lstStyle/>
+                    <a:p>
+                      <a:pPr>
+                        <a:buNone/>
+                      </a:pPr>
+                      <a:r>
+                        <a:rPr lang="en-US" altLang="ko-KR" sz="3100" b="1" cap="none" spc="0" dirty="0">
+                          <a:solidFill>
+                            <a:schemeClr val="accent1"/>
+                          </a:solidFill>
+                        </a:rPr>
+                        <a:t>04</a:t>
+                      </a:r>
+                    </a:p>
+                  </a:txBody>
+                  <a:tcPr marL="134381" marR="134381" marT="134381" marB="134381" anchor="ctr">
+                    <a:lnL w="12700" cmpd="sng">
+                      <a:noFill/>
+                      <a:prstDash val="solid"/>
+                    </a:lnL>
+                    <a:lnR w="12700" cap="flat" cmpd="sng" algn="ctr">
+                      <a:noFill/>
+                      <a:prstDash val="solid"/>
+                      <a:round/>
+                      <a:headEnd type="none" w="med" len="med"/>
+                      <a:tailEnd type="none" w="med" len="med"/>
+                    </a:lnR>
+                    <a:lnT w="6350" cap="flat" cmpd="sng" algn="ctr">
+                      <a:solidFill>
+                        <a:schemeClr val="tx1"/>
+                      </a:solidFill>
+                      <a:prstDash val="solid"/>
+                    </a:lnT>
+                    <a:lnB w="6350" cap="flat" cmpd="sng" algn="ctr">
+                      <a:solidFill>
+                        <a:schemeClr val="tx1"/>
+                      </a:solidFill>
+                      <a:prstDash val="solid"/>
+                      <a:round/>
+                      <a:headEnd type="none" w="med" len="med"/>
+                      <a:tailEnd type="none" w="med" len="med"/>
+                    </a:lnB>
+                    <a:noFill/>
+                  </a:tcPr>
+                </a:tc>
+                <a:tc>
+                  <a:txBody>
+                    <a:bodyPr/>
+                    <a:lstStyle/>
+                    <a:p>
+                      <a:pPr algn="l">
+                        <a:buNone/>
+                      </a:pPr>
+                      <a:endParaRPr lang="en-US" altLang="ko-KR" sz="2000" b="0" cap="none" spc="0" dirty="0">
+                        <a:solidFill>
+                          <a:schemeClr val="tx1"/>
+                        </a:solidFill>
+                      </a:endParaRPr>
+                    </a:p>
+                  </a:txBody>
+                  <a:tcPr marL="134381" marR="134381" marT="134381" marB="134381" anchor="ctr">
+                    <a:lnL w="12700" cap="flat" cmpd="sng" algn="ctr">
+                      <a:noFill/>
+                      <a:prstDash val="solid"/>
+                      <a:round/>
+                      <a:headEnd type="none" w="med" len="med"/>
+                      <a:tailEnd type="none" w="med" len="med"/>
+                    </a:lnL>
+                    <a:lnR w="12700" cap="flat" cmpd="sng" algn="ctr">
+                      <a:noFill/>
+                      <a:prstDash val="solid"/>
+                      <a:round/>
+                      <a:headEnd type="none" w="med" len="med"/>
+                      <a:tailEnd type="none" w="med" len="med"/>
+                    </a:lnR>
+                    <a:lnT w="12700" cap="flat" cmpd="sng" algn="ctr">
+                      <a:noFill/>
+                      <a:prstDash val="solid"/>
+                      <a:round/>
+                      <a:headEnd type="none" w="med" len="med"/>
+                      <a:tailEnd type="none" w="med" len="med"/>
+                    </a:lnT>
+                    <a:lnB w="12700" cap="flat" cmpd="sng" algn="ctr">
+                      <a:noFill/>
+                      <a:prstDash val="solid"/>
+                      <a:round/>
+                      <a:headEnd type="none" w="med" len="med"/>
+                      <a:tailEnd type="none" w="med" len="med"/>
+                    </a:lnB>
+                    <a:noFill/>
+                  </a:tcPr>
+                </a:tc>
+                <a:extLst>
+                  <a:ext uri="{0D108BD9-81ED-4DB2-BD59-A6C34878D82A}">
+                    <a16:rowId xmlns:a16="http://schemas.microsoft.com/office/drawing/2014/main" val="2826475425"/>
+                  </a:ext>
+                </a:extLst>
+              </a:tr>
+              <a:tr h="782397">
+                <a:tc>
+                  <a:txBody>
+                    <a:bodyPr/>
+                    <a:lstStyle/>
+                    <a:p>
+                      <a:pPr>
+                        <a:buNone/>
+                      </a:pPr>
+                      <a:r>
+                        <a:rPr lang="en-US" altLang="ko-KR" sz="3100" b="1" cap="none" spc="0" dirty="0">
+                          <a:solidFill>
+                            <a:schemeClr val="accent1"/>
+                          </a:solidFill>
+                        </a:rPr>
+                        <a:t>05</a:t>
+                      </a:r>
+                    </a:p>
+                  </a:txBody>
+                  <a:tcPr marL="134381" marR="134381" marT="134381" marB="134381" anchor="ctr">
+                    <a:lnL w="12700" cmpd="sng">
+                      <a:noFill/>
+                      <a:prstDash val="solid"/>
+                    </a:lnL>
+                    <a:lnR w="12700" cap="flat" cmpd="sng" algn="ctr">
+                      <a:noFill/>
+                      <a:prstDash val="solid"/>
+                      <a:round/>
+                      <a:headEnd type="none" w="med" len="med"/>
+                      <a:tailEnd type="none" w="med" len="med"/>
+                    </a:lnR>
+                    <a:lnT w="6350" cap="flat" cmpd="sng" algn="ctr">
+                      <a:solidFill>
+                        <a:schemeClr val="tx1"/>
+                      </a:solidFill>
+                      <a:prstDash val="solid"/>
+                    </a:lnT>
+                    <a:lnB w="6350" cap="flat" cmpd="sng" algn="ctr">
+                      <a:solidFill>
+                        <a:schemeClr val="tx1"/>
+                      </a:solidFill>
+                      <a:prstDash val="solid"/>
+                      <a:round/>
+                      <a:headEnd type="none" w="med" len="med"/>
+                      <a:tailEnd type="none" w="med" len="med"/>
+                    </a:lnB>
+                    <a:noFill/>
+                  </a:tcPr>
+                </a:tc>
+                <a:tc>
+                  <a:txBody>
+                    <a:bodyPr/>
+                    <a:lstStyle/>
+                    <a:p>
+                      <a:pPr algn="l">
+                        <a:buNone/>
+                      </a:pPr>
+                      <a:endParaRPr lang="en-US" altLang="ko-KR" sz="2000" b="0" cap="none" spc="0" dirty="0">
+                        <a:solidFill>
+                          <a:schemeClr val="tx1"/>
+                        </a:solidFill>
+                      </a:endParaRPr>
+                    </a:p>
+                  </a:txBody>
+                  <a:tcPr marL="134381" marR="134381" marT="134381" marB="134381" anchor="ctr">
+                    <a:lnL w="12700" cap="flat" cmpd="sng" algn="ctr">
+                      <a:noFill/>
+                      <a:prstDash val="solid"/>
+                      <a:round/>
+                      <a:headEnd type="none" w="med" len="med"/>
+                      <a:tailEnd type="none" w="med" len="med"/>
+                    </a:lnL>
+                    <a:lnR w="12700" cap="flat" cmpd="sng" algn="ctr">
+                      <a:noFill/>
+                      <a:prstDash val="solid"/>
+                      <a:round/>
+                      <a:headEnd type="none" w="med" len="med"/>
+                      <a:tailEnd type="none" w="med" len="med"/>
+                    </a:lnR>
+                    <a:lnT w="12700" cap="flat" cmpd="sng" algn="ctr">
+                      <a:noFill/>
+                      <a:prstDash val="solid"/>
+                      <a:round/>
+                      <a:headEnd type="none" w="med" len="med"/>
+                      <a:tailEnd type="none" w="med" len="med"/>
+                    </a:lnT>
+                    <a:lnB w="12700" cap="flat" cmpd="sng" algn="ctr">
+                      <a:noFill/>
+                      <a:prstDash val="solid"/>
+                      <a:round/>
+                      <a:headEnd type="none" w="med" len="med"/>
+                      <a:tailEnd type="none" w="med" len="med"/>
+                    </a:lnB>
+                    <a:noFill/>
+                  </a:tcPr>
+                </a:tc>
+                <a:extLst>
+                  <a:ext uri="{0D108BD9-81ED-4DB2-BD59-A6C34878D82A}">
+                    <a16:rowId xmlns:a16="http://schemas.microsoft.com/office/drawing/2014/main" val="1963122352"/>
+                  </a:ext>
+                </a:extLst>
+              </a:tr>
+              <a:tr h="782397">
+                <a:tc>
+                  <a:txBody>
+                    <a:bodyPr/>
+                    <a:lstStyle/>
+                    <a:p>
+                      <a:pPr>
+                        <a:buNone/>
+                      </a:pPr>
+                      <a:r>
+                        <a:rPr lang="en-US" altLang="ko-KR" sz="3100" b="1" cap="none" spc="0" dirty="0">
+                          <a:solidFill>
+                            <a:schemeClr val="accent1"/>
+                          </a:solidFill>
+                        </a:rPr>
+                        <a:t>06</a:t>
+                      </a:r>
+                    </a:p>
+                  </a:txBody>
+                  <a:tcPr marL="134381" marR="134381" marT="134381" marB="134381" anchor="ctr">
+                    <a:lnL w="12700" cmpd="sng">
+                      <a:noFill/>
+                      <a:prstDash val="solid"/>
+                    </a:lnL>
+                    <a:lnR w="12700" cap="flat" cmpd="sng" algn="ctr">
+                      <a:noFill/>
+                      <a:prstDash val="solid"/>
+                      <a:round/>
+                      <a:headEnd type="none" w="med" len="med"/>
+                      <a:tailEnd type="none" w="med" len="med"/>
+                    </a:lnR>
+                    <a:lnT w="6350" cap="flat" cmpd="sng" algn="ctr">
+                      <a:solidFill>
+                        <a:schemeClr val="tx1"/>
+                      </a:solidFill>
+                      <a:prstDash val="solid"/>
+                    </a:lnT>
+                    <a:lnB w="6350" cap="flat" cmpd="sng" algn="ctr">
+                      <a:solidFill>
+                        <a:schemeClr val="tx1"/>
+                      </a:solidFill>
+                      <a:prstDash val="solid"/>
+                    </a:lnB>
+                    <a:noFill/>
+                  </a:tcPr>
+                </a:tc>
+                <a:tc>
+                  <a:txBody>
+                    <a:bodyPr/>
+                    <a:lstStyle/>
+                    <a:p>
+                      <a:pPr algn="l">
+                        <a:buNone/>
+                      </a:pPr>
+                      <a:endParaRPr lang="en-US" altLang="ko-KR" sz="2000" b="0" cap="none" spc="0" dirty="0">
+                        <a:solidFill>
+                          <a:schemeClr val="tx1"/>
+                        </a:solidFill>
+                      </a:endParaRPr>
+                    </a:p>
+                  </a:txBody>
+                  <a:tcPr marL="134381" marR="134381" marT="134381" marB="134381" anchor="ctr">
+                    <a:lnL w="12700" cap="flat" cmpd="sng" algn="ctr">
+                      <a:noFill/>
+                      <a:prstDash val="solid"/>
+                      <a:round/>
+                      <a:headEnd type="none" w="med" len="med"/>
+                      <a:tailEnd type="none" w="med" len="med"/>
+                    </a:lnL>
+                    <a:lnR w="12700" cap="flat" cmpd="sng" algn="ctr">
+                      <a:noFill/>
+                      <a:prstDash val="solid"/>
+                      <a:round/>
+                      <a:headEnd type="none" w="med" len="med"/>
+                      <a:tailEnd type="none" w="med" len="med"/>
+                    </a:lnR>
+                    <a:lnT w="12700" cap="flat" cmpd="sng" algn="ctr">
+                      <a:noFill/>
+                      <a:prstDash val="solid"/>
+                      <a:round/>
+                      <a:headEnd type="none" w="med" len="med"/>
+                      <a:tailEnd type="none" w="med" len="med"/>
+                    </a:lnT>
+                    <a:lnB w="12700" cap="flat" cmpd="sng" algn="ctr">
+                      <a:noFill/>
+                      <a:prstDash val="solid"/>
+                      <a:round/>
+                      <a:headEnd type="none" w="med" len="med"/>
+                      <a:tailEnd type="none" w="med" len="med"/>
+                    </a:lnB>
+                    <a:noFill/>
+                  </a:tcPr>
+                </a:tc>
+                <a:extLst>
+                  <a:ext uri="{0D108BD9-81ED-4DB2-BD59-A6C34878D82A}">
+                    <a16:rowId xmlns:a16="http://schemas.microsoft.com/office/drawing/2014/main" val="705755452"/>
                   </a:ext>
                 </a:extLst>
               </a:tr>
@@ -30568,6 +37978,366 @@
     <p:extLst>
       <p:ext uri="{BB962C8B-B14F-4D97-AF65-F5344CB8AC3E}">
         <p14:creationId xmlns:p14="http://schemas.microsoft.com/office/powerpoint/2010/main" val="1659377132"/>
+      </p:ext>
+    </p:extLst>
+  </p:cSld>
+  <p:clrMapOvr>
+    <a:masterClrMapping/>
+  </p:clrMapOvr>
+</p:sld>
+</file>
+
+<file path=ppt/slides/slide20.xml><?xml version="1.0" encoding="utf-8"?>
+<p:sld xmlns:a="http://schemas.openxmlformats.org/drawingml/2006/main" xmlns:r="http://schemas.openxmlformats.org/officeDocument/2006/relationships" xmlns:p="http://schemas.openxmlformats.org/presentationml/2006/main">
+  <p:cSld>
+    <p:spTree>
+      <p:nvGrpSpPr>
+        <p:cNvPr id="1" name=""/>
+        <p:cNvGrpSpPr/>
+        <p:nvPr/>
+      </p:nvGrpSpPr>
+      <p:grpSpPr>
+        <a:xfrm>
+          <a:off x="0" y="0"/>
+          <a:ext cx="0" cy="0"/>
+          <a:chOff x="0" y="0"/>
+          <a:chExt cx="0" cy="0"/>
+        </a:xfrm>
+      </p:grpSpPr>
+      <p:sp>
+        <p:nvSpPr>
+          <p:cNvPr id="2" name="제목 1">
+            <a:extLst>
+              <a:ext uri="{FF2B5EF4-FFF2-40B4-BE49-F238E27FC236}">
+                <a16:creationId xmlns:a16="http://schemas.microsoft.com/office/drawing/2014/main" id="{8859D193-0A79-4BC5-814E-08D8E9D59FF9}"/>
+              </a:ext>
+            </a:extLst>
+          </p:cNvPr>
+          <p:cNvSpPr>
+            <a:spLocks noGrp="1"/>
+          </p:cNvSpPr>
+          <p:nvPr>
+            <p:ph type="title"/>
+          </p:nvPr>
+        </p:nvSpPr>
+        <p:spPr>
+          <a:xfrm>
+            <a:off x="230683" y="-376755"/>
+            <a:ext cx="6158541" cy="1444752"/>
+          </a:xfrm>
+        </p:spPr>
+        <p:txBody>
+          <a:bodyPr anchor="b">
+            <a:normAutofit/>
+          </a:bodyPr>
+          <a:lstStyle/>
+          <a:p>
+            <a:r>
+              <a:rPr lang="ko-KR" altLang="en-US" dirty="0"/>
+              <a:t>데이터 수집 및 처리 과정</a:t>
+            </a:r>
+          </a:p>
+        </p:txBody>
+      </p:sp>
+      <p:sp>
+        <p:nvSpPr>
+          <p:cNvPr id="18" name="Content Placeholder 2">
+            <a:extLst>
+              <a:ext uri="{FF2B5EF4-FFF2-40B4-BE49-F238E27FC236}">
+                <a16:creationId xmlns:a16="http://schemas.microsoft.com/office/drawing/2014/main" id="{4D5137F2-5EDA-942F-80BD-BBA9B39B010D}"/>
+              </a:ext>
+            </a:extLst>
+          </p:cNvPr>
+          <p:cNvSpPr>
+            <a:spLocks noGrp="1"/>
+          </p:cNvSpPr>
+          <p:nvPr>
+            <p:ph sz="quarter" idx="14"/>
+          </p:nvPr>
+        </p:nvSpPr>
+        <p:spPr>
+          <a:xfrm>
+            <a:off x="369580" y="1864913"/>
+            <a:ext cx="4389120" cy="4797144"/>
+          </a:xfrm>
+        </p:spPr>
+        <p:txBody>
+          <a:bodyPr>
+            <a:normAutofit lnSpcReduction="10000"/>
+          </a:bodyPr>
+          <a:lstStyle/>
+          <a:p>
+            <a:pPr marL="0" indent="0">
+              <a:buNone/>
+            </a:pPr>
+            <a:r>
+              <a:rPr lang="ko-KR" altLang="en-US" sz="2400" dirty="0"/>
+              <a:t>크롤링한 </a:t>
+            </a:r>
+            <a:r>
+              <a:rPr lang="en-US" altLang="ko-KR" sz="2400" dirty="0"/>
+              <a:t>c</a:t>
+            </a:r>
+            <a:r>
+              <a:rPr lang="en-US" sz="2400" dirty="0"/>
+              <a:t>sv</a:t>
+            </a:r>
+            <a:r>
+              <a:rPr lang="ko-KR" altLang="en-US" sz="2400" dirty="0"/>
+              <a:t>형태의 원본 데이터 </a:t>
+            </a:r>
+            <a:endParaRPr lang="en-US" altLang="ko-KR" sz="2400" dirty="0"/>
+          </a:p>
+          <a:p>
+            <a:pPr marL="0" indent="0">
+              <a:buNone/>
+            </a:pPr>
+            <a:r>
+              <a:rPr lang="ko-KR" altLang="en-US" sz="2400" b="1" dirty="0"/>
+              <a:t>핵심 과제</a:t>
+            </a:r>
+            <a:r>
+              <a:rPr lang="en-US" altLang="ko-KR" sz="2400" dirty="0"/>
+              <a:t>: </a:t>
+            </a:r>
+            <a:r>
+              <a:rPr lang="ko-KR" altLang="en-US" sz="2400" dirty="0"/>
+              <a:t>쿼터별 누적 데이터를 분석 가능한 </a:t>
+            </a:r>
+            <a:r>
+              <a:rPr lang="en-US" altLang="ko-KR" sz="2400" dirty="0"/>
+              <a:t> </a:t>
+            </a:r>
+            <a:r>
+              <a:rPr lang="ko-KR" altLang="en-US" sz="2400" dirty="0"/>
+              <a:t>경기 단위</a:t>
+            </a:r>
+            <a:r>
+              <a:rPr lang="en-US" altLang="ko-KR" sz="2400" dirty="0"/>
+              <a:t>(Q4) </a:t>
+            </a:r>
+            <a:r>
+              <a:rPr lang="ko-KR" altLang="en-US" sz="2400" dirty="0"/>
+              <a:t>및 실시간</a:t>
+            </a:r>
+            <a:r>
+              <a:rPr lang="en-US" altLang="ko-KR" sz="2400" dirty="0"/>
+              <a:t> </a:t>
+            </a:r>
+            <a:r>
+              <a:rPr lang="ko-KR" altLang="en-US" sz="2400" dirty="0"/>
+              <a:t>데이터로 분리 및 정제</a:t>
+            </a:r>
+            <a:endParaRPr lang="en-US" altLang="ko-KR" sz="2400" dirty="0"/>
+          </a:p>
+          <a:p>
+            <a:pPr marL="0" indent="0">
+              <a:buNone/>
+            </a:pPr>
+            <a:r>
+              <a:rPr lang="ko-KR" altLang="en-US" sz="2400" dirty="0"/>
+              <a:t>이를 분석가능한 데이터로 가공하는 것이 첫번째 과제였음</a:t>
+            </a:r>
+            <a:r>
+              <a:rPr lang="en-US" altLang="ko-KR" sz="2400" dirty="0"/>
+              <a:t>.</a:t>
+            </a:r>
+          </a:p>
+          <a:p>
+            <a:pPr marL="0" indent="0">
+              <a:buNone/>
+            </a:pPr>
+            <a:r>
+              <a:rPr lang="ko-KR" altLang="en-US" sz="2400" dirty="0"/>
+              <a:t>팀 이름</a:t>
+            </a:r>
+            <a:r>
+              <a:rPr lang="en-US" altLang="ko-KR" sz="2400" dirty="0"/>
+              <a:t>(</a:t>
+            </a:r>
+            <a:r>
+              <a:rPr lang="ko-KR" altLang="en-US" sz="2400" dirty="0"/>
+              <a:t>코드</a:t>
+            </a:r>
+            <a:r>
+              <a:rPr lang="en-US" altLang="ko-KR" sz="2400" dirty="0"/>
+              <a:t>) </a:t>
+            </a:r>
+            <a:r>
+              <a:rPr lang="ko-KR" altLang="en-US" sz="2400" dirty="0"/>
+              <a:t>정리하는 것 두번째 과제</a:t>
+            </a:r>
+            <a:r>
+              <a:rPr lang="en-US" altLang="ko-KR" sz="2400" dirty="0"/>
+              <a:t>?</a:t>
+            </a:r>
+          </a:p>
+          <a:p>
+            <a:pPr marL="0" indent="0">
+              <a:buNone/>
+            </a:pPr>
+            <a:endParaRPr lang="en-US" sz="2400" dirty="0"/>
+          </a:p>
+        </p:txBody>
+      </p:sp>
+      <p:pic>
+        <p:nvPicPr>
+          <p:cNvPr id="5" name="내용 개체 틀 4" descr="전자제품, 전자 공학, 회로, 컴퓨터이(가) 표시된 사진&#10;&#10;AI 생성 콘텐츠는 정확하지 않을 수 있습니다.">
+            <a:extLst>
+              <a:ext uri="{FF2B5EF4-FFF2-40B4-BE49-F238E27FC236}">
+                <a16:creationId xmlns:a16="http://schemas.microsoft.com/office/drawing/2014/main" id="{9962671C-57AB-299E-FED1-5892F8366138}"/>
+              </a:ext>
+            </a:extLst>
+          </p:cNvPr>
+          <p:cNvPicPr>
+            <a:picLocks noGrp="1" noChangeAspect="1"/>
+          </p:cNvPicPr>
+          <p:nvPr>
+            <p:ph type="pic" sz="quarter" idx="15"/>
+          </p:nvPr>
+        </p:nvPicPr>
+        <p:blipFill>
+          <a:blip r:embed="rId2"/>
+          <a:stretch/>
+        </p:blipFill>
+        <p:spPr>
+          <a:xfrm>
+            <a:off x="4847643" y="1538529"/>
+            <a:ext cx="7220995" cy="4260387"/>
+          </a:xfrm>
+          <a:noFill/>
+        </p:spPr>
+      </p:pic>
+    </p:spTree>
+    <p:extLst>
+      <p:ext uri="{BB962C8B-B14F-4D97-AF65-F5344CB8AC3E}">
+        <p14:creationId xmlns:p14="http://schemas.microsoft.com/office/powerpoint/2010/main" val="1439426689"/>
+      </p:ext>
+    </p:extLst>
+  </p:cSld>
+  <p:clrMapOvr>
+    <a:masterClrMapping/>
+  </p:clrMapOvr>
+</p:sld>
+</file>
+
+<file path=ppt/slides/slide21.xml><?xml version="1.0" encoding="utf-8"?>
+<p:sld xmlns:a="http://schemas.openxmlformats.org/drawingml/2006/main" xmlns:r="http://schemas.openxmlformats.org/officeDocument/2006/relationships" xmlns:p="http://schemas.openxmlformats.org/presentationml/2006/main">
+  <p:cSld>
+    <p:spTree>
+      <p:nvGrpSpPr>
+        <p:cNvPr id="1" name=""/>
+        <p:cNvGrpSpPr/>
+        <p:nvPr/>
+      </p:nvGrpSpPr>
+      <p:grpSpPr>
+        <a:xfrm>
+          <a:off x="0" y="0"/>
+          <a:ext cx="0" cy="0"/>
+          <a:chOff x="0" y="0"/>
+          <a:chExt cx="0" cy="0"/>
+        </a:xfrm>
+      </p:grpSpPr>
+      <p:sp>
+        <p:nvSpPr>
+          <p:cNvPr id="2" name="제목 1">
+            <a:extLst>
+              <a:ext uri="{FF2B5EF4-FFF2-40B4-BE49-F238E27FC236}">
+                <a16:creationId xmlns:a16="http://schemas.microsoft.com/office/drawing/2014/main" id="{6DB27C8A-F43C-5368-9566-50011BBDD4E3}"/>
+              </a:ext>
+            </a:extLst>
+          </p:cNvPr>
+          <p:cNvSpPr>
+            <a:spLocks noGrp="1"/>
+          </p:cNvSpPr>
+          <p:nvPr>
+            <p:ph type="title"/>
+          </p:nvPr>
+        </p:nvSpPr>
+        <p:spPr/>
+        <p:txBody>
+          <a:bodyPr/>
+          <a:lstStyle/>
+          <a:p>
+            <a:r>
+              <a:rPr lang="ko-KR" altLang="en-US" dirty="0"/>
+              <a:t>모델 개발 및 시스템 구축 </a:t>
+            </a:r>
+          </a:p>
+        </p:txBody>
+      </p:sp>
+      <p:sp>
+        <p:nvSpPr>
+          <p:cNvPr id="3" name="내용 개체 틀 2">
+            <a:extLst>
+              <a:ext uri="{FF2B5EF4-FFF2-40B4-BE49-F238E27FC236}">
+                <a16:creationId xmlns:a16="http://schemas.microsoft.com/office/drawing/2014/main" id="{2EA425D1-34B5-F14D-D078-1860B9E0E602}"/>
+              </a:ext>
+            </a:extLst>
+          </p:cNvPr>
+          <p:cNvSpPr>
+            <a:spLocks noGrp="1"/>
+          </p:cNvSpPr>
+          <p:nvPr>
+            <p:ph idx="1"/>
+          </p:nvPr>
+        </p:nvSpPr>
+        <p:spPr/>
+        <p:txBody>
+          <a:bodyPr/>
+          <a:lstStyle/>
+          <a:p>
+            <a:r>
+              <a:rPr lang="ko-KR" altLang="en-US" dirty="0"/>
+              <a:t>로지스틱 회귀분석 </a:t>
+            </a:r>
+            <a:r>
+              <a:rPr lang="en-US" altLang="ko-KR" dirty="0"/>
+              <a:t>vs </a:t>
+            </a:r>
+            <a:r>
+              <a:rPr lang="ko-KR" altLang="en-US" dirty="0"/>
+              <a:t>인공 신경망 </a:t>
+            </a:r>
+            <a:endParaRPr lang="en-US" altLang="ko-KR" dirty="0"/>
+          </a:p>
+          <a:p>
+            <a:endParaRPr lang="en-US" altLang="ko-KR" dirty="0"/>
+          </a:p>
+          <a:p>
+            <a:r>
+              <a:rPr lang="en-US" altLang="ko-KR" dirty="0"/>
+              <a:t>MLP </a:t>
+            </a:r>
+            <a:r>
+              <a:rPr lang="ko-KR" altLang="en-US" dirty="0"/>
+              <a:t>모델 선택한 이유</a:t>
+            </a:r>
+            <a:endParaRPr lang="en-US" altLang="ko-KR" dirty="0"/>
+          </a:p>
+          <a:p>
+            <a:endParaRPr lang="en-US" altLang="ko-KR" dirty="0"/>
+          </a:p>
+          <a:p>
+            <a:r>
+              <a:rPr lang="ko-KR" altLang="en-US" dirty="0" err="1"/>
+              <a:t>머신러닝</a:t>
+            </a:r>
+            <a:r>
+              <a:rPr lang="ko-KR" altLang="en-US" dirty="0"/>
+              <a:t> 딥러닝 중 딥러닝 선택한 이유</a:t>
+            </a:r>
+            <a:endParaRPr lang="en-US" altLang="ko-KR" dirty="0"/>
+          </a:p>
+          <a:p>
+            <a:endParaRPr lang="ko-KR" altLang="en-US" dirty="0"/>
+          </a:p>
+        </p:txBody>
+      </p:sp>
+    </p:spTree>
+    <p:extLst>
+      <p:ext uri="{BB962C8B-B14F-4D97-AF65-F5344CB8AC3E}">
+        <p14:creationId xmlns:p14="http://schemas.microsoft.com/office/powerpoint/2010/main" val="1857038705"/>
       </p:ext>
     </p:extLst>
   </p:cSld>
@@ -30910,7 +38680,7 @@
             </a:br>
             <a:r>
               <a:rPr kumimoji="1" lang="en-US" altLang="ko-KR" dirty="0"/>
-              <a:t>[0.090, 0.244, 0.665].</a:t>
+              <a:t>[0.090, 0.244, 0.665]. </a:t>
             </a:r>
           </a:p>
           <a:p>
@@ -31053,8 +38823,8 @@
           </a:p>
         </p:txBody>
       </p:sp>
-      <mc:AlternateContent xmlns:mc="http://schemas.openxmlformats.org/markup-compatibility/2006">
-        <mc:Choice xmlns:a14="http://schemas.microsoft.com/office/drawing/2010/main" Requires="a14">
+      <mc:AlternateContent xmlns:mc="http://schemas.openxmlformats.org/markup-compatibility/2006" xmlns:a14="http://schemas.microsoft.com/office/drawing/2010/main">
+        <mc:Choice Requires="a14">
           <p:sp>
             <p:nvSpPr>
               <p:cNvPr id="3" name="내용 개체 틀 2">
@@ -31439,7 +39209,7 @@
             </p:txBody>
           </p:sp>
         </mc:Choice>
-        <mc:Fallback>
+        <mc:Fallback xmlns="">
           <p:sp>
             <p:nvSpPr>
               <p:cNvPr id="3" name="내용 개체 틀 2">
